--- a/Profiles_jobs_it.pptx
+++ b/Profiles_jobs_it.pptx
@@ -13,27 +13,42 @@
     <p:sldId id="283" r:id="rId7"/>
     <p:sldId id="271" r:id="rId8"/>
     <p:sldId id="272" r:id="rId9"/>
-    <p:sldId id="273" r:id="rId10"/>
-    <p:sldId id="274" r:id="rId11"/>
-    <p:sldId id="268" r:id="rId12"/>
-    <p:sldId id="276" r:id="rId13"/>
-    <p:sldId id="277" r:id="rId14"/>
-    <p:sldId id="278" r:id="rId15"/>
-    <p:sldId id="279" r:id="rId16"/>
-    <p:sldId id="281" r:id="rId17"/>
-    <p:sldId id="282" r:id="rId18"/>
-    <p:sldId id="284" r:id="rId19"/>
-    <p:sldId id="285" r:id="rId20"/>
-    <p:sldId id="287" r:id="rId21"/>
-    <p:sldId id="286" r:id="rId22"/>
-    <p:sldId id="288" r:id="rId23"/>
-    <p:sldId id="289" r:id="rId24"/>
-    <p:sldId id="290" r:id="rId25"/>
-    <p:sldId id="291" r:id="rId26"/>
-    <p:sldId id="292" r:id="rId27"/>
-    <p:sldId id="293" r:id="rId28"/>
-    <p:sldId id="294" r:id="rId29"/>
-    <p:sldId id="261" r:id="rId30"/>
+    <p:sldId id="299" r:id="rId10"/>
+    <p:sldId id="273" r:id="rId11"/>
+    <p:sldId id="300" r:id="rId12"/>
+    <p:sldId id="298" r:id="rId13"/>
+    <p:sldId id="274" r:id="rId14"/>
+    <p:sldId id="268" r:id="rId15"/>
+    <p:sldId id="307" r:id="rId16"/>
+    <p:sldId id="276" r:id="rId17"/>
+    <p:sldId id="277" r:id="rId18"/>
+    <p:sldId id="301" r:id="rId19"/>
+    <p:sldId id="302" r:id="rId20"/>
+    <p:sldId id="278" r:id="rId21"/>
+    <p:sldId id="279" r:id="rId22"/>
+    <p:sldId id="281" r:id="rId23"/>
+    <p:sldId id="303" r:id="rId24"/>
+    <p:sldId id="304" r:id="rId25"/>
+    <p:sldId id="282" r:id="rId26"/>
+    <p:sldId id="284" r:id="rId27"/>
+    <p:sldId id="285" r:id="rId28"/>
+    <p:sldId id="287" r:id="rId29"/>
+    <p:sldId id="286" r:id="rId30"/>
+    <p:sldId id="305" r:id="rId31"/>
+    <p:sldId id="306" r:id="rId32"/>
+    <p:sldId id="288" r:id="rId33"/>
+    <p:sldId id="289" r:id="rId34"/>
+    <p:sldId id="290" r:id="rId35"/>
+    <p:sldId id="291" r:id="rId36"/>
+    <p:sldId id="297" r:id="rId37"/>
+    <p:sldId id="295" r:id="rId38"/>
+    <p:sldId id="296" r:id="rId39"/>
+    <p:sldId id="308" r:id="rId40"/>
+    <p:sldId id="309" r:id="rId41"/>
+    <p:sldId id="292" r:id="rId42"/>
+    <p:sldId id="293" r:id="rId43"/>
+    <p:sldId id="294" r:id="rId44"/>
+    <p:sldId id="261" r:id="rId45"/>
   </p:sldIdLst>
   <p:sldSz cx="12192000" cy="6858000"/>
   <p:notesSz cx="6858000" cy="9144000"/>
@@ -3556,12 +3571,14 @@
           </a:xfrm>
         </p:spPr>
         <p:txBody>
-          <a:bodyPr/>
+          <a:bodyPr>
+            <a:normAutofit/>
+          </a:bodyPr>
           <a:lstStyle/>
           <a:p>
             <a:r>
               <a:rPr lang="en-US" dirty="0" err="1"/>
-              <a:t>Architecte</a:t>
+              <a:t>Compétence</a:t>
             </a:r>
             <a:r>
               <a:rPr lang="en-US" dirty="0"/>
@@ -3569,9 +3586,20 @@
             </a:r>
             <a:r>
               <a:rPr lang="en-US" dirty="0" err="1"/>
-              <a:t>Logiciel</a:t>
-            </a:r>
-            <a:endParaRPr lang="en-US" dirty="0"/>
+              <a:t>professionnelles</a:t>
+            </a:r>
+            <a:r>
+              <a:rPr lang="en-US" dirty="0"/>
+              <a:t> d’un </a:t>
+            </a:r>
+            <a:r>
+              <a:rPr lang="en-US" dirty="0" err="1"/>
+              <a:t>Développeur</a:t>
+            </a:r>
+            <a:r>
+              <a:rPr lang="en-US" dirty="0"/>
+              <a:t> Web</a:t>
+            </a:r>
           </a:p>
         </p:txBody>
       </p:sp>
@@ -3593,7 +3621,7 @@
         </p:spPr>
         <p:txBody>
           <a:bodyPr>
-            <a:normAutofit fontScale="47500" lnSpcReduction="20000"/>
+            <a:normAutofit fontScale="25000" lnSpcReduction="20000"/>
           </a:bodyPr>
           <a:lstStyle/>
           <a:p>
@@ -3603,16 +3631,8 @@
               </a:lnSpc>
             </a:pPr>
             <a:r>
-              <a:rPr lang="fr-FR" dirty="0"/>
-              <a:t>Les </a:t>
-            </a:r>
-            <a:r>
-              <a:rPr lang="fr-FR" b="1" dirty="0"/>
-              <a:t>architectes d'applications </a:t>
-            </a:r>
-            <a:r>
-              <a:rPr lang="fr-FR" dirty="0"/>
-              <a:t>sont responsables de l'administration, de la surveillance et de la maintenance des infrastructures et des applications logicielles.</a:t>
+              <a:rPr lang="fr-FR" sz="5400" dirty="0"/>
+              <a:t>Analyser les besoins du client spécifiés par la maîtrise d’ouvrage et les traduire en cahier des charges techniques.</a:t>
             </a:r>
           </a:p>
           <a:p>
@@ -3622,8 +3642,8 @@
               </a:lnSpc>
             </a:pPr>
             <a:r>
-              <a:rPr lang="fr-FR" dirty="0"/>
-              <a:t>Un architecte supervise les meilleures pratiques et les processus nécessaires au bon fonctionnement d'une entreprise pour fonctionner et réussir, agissant en tant que point de contact technique pour résoudre les problèmes d'application et de système - généralement sur une base immédiate.</a:t>
+              <a:rPr lang="fr-FR" sz="5400" dirty="0"/>
+              <a:t>Ecrire les spécifications techniques générales et détaillées en envisageant les problèmes éventuels et les évolutions.</a:t>
             </a:r>
           </a:p>
           <a:p>
@@ -3633,8 +3653,8 @@
               </a:lnSpc>
             </a:pPr>
             <a:r>
-              <a:rPr lang="fr-FR" dirty="0"/>
-              <a:t>Le titre du poste nécessite de travailler au sein de différents services informatiques aux côtés de développeurs d'applications et d'ingénieurs logiciels et impliqué dans des tâches telles que:</a:t>
+              <a:rPr lang="fr-FR" sz="5400" dirty="0"/>
+              <a:t>Rédiger les lignes de codes nécessaires à la création d’un produit web, pouvant contenir du texte, des images, de la vidéo et/ou du son.</a:t>
             </a:r>
           </a:p>
           <a:p>
@@ -3644,8 +3664,8 @@
               </a:lnSpc>
             </a:pPr>
             <a:r>
-              <a:rPr lang="fr-FR" dirty="0"/>
-              <a:t>Formation et accompagnement du personnel dans l'utilisation des applications</a:t>
+              <a:rPr lang="fr-FR" sz="5400" dirty="0"/>
+              <a:t>Appliquer les règles de navigation, créer des liens entre les pages.</a:t>
             </a:r>
           </a:p>
           <a:p>
@@ -3655,8 +3675,8 @@
               </a:lnSpc>
             </a:pPr>
             <a:r>
-              <a:rPr lang="fr-FR" dirty="0"/>
-              <a:t>Analyse et diagnostic des erreurs d'application</a:t>
+              <a:rPr lang="fr-FR" sz="5400" dirty="0"/>
+              <a:t>Développer les interfaces.</a:t>
             </a:r>
           </a:p>
           <a:p>
@@ -3666,8 +3686,8 @@
               </a:lnSpc>
             </a:pPr>
             <a:r>
-              <a:rPr lang="fr-FR" dirty="0"/>
-              <a:t>Résolution des problèmes à la fois à long et à court terme</a:t>
+              <a:rPr lang="fr-FR" sz="5400" dirty="0"/>
+              <a:t>Corriger et optimiser les fonctionnalités (qualité, charte graphique, ergonomie...).</a:t>
             </a:r>
           </a:p>
           <a:p>
@@ -3677,8 +3697,8 @@
               </a:lnSpc>
             </a:pPr>
             <a:r>
-              <a:rPr lang="fr-FR" dirty="0"/>
-              <a:t>Conception et développement d'applications existantes et nouvelles</a:t>
+              <a:rPr lang="fr-FR" sz="5400" dirty="0"/>
+              <a:t>Documenter les applications pour les développements ultérieurs et la mise en production.</a:t>
             </a:r>
           </a:p>
           <a:p>
@@ -3688,9 +3708,35 @@
               </a:lnSpc>
             </a:pPr>
             <a:r>
-              <a:rPr lang="fr-FR" dirty="0"/>
-              <a:t>Essais routiers et mise en œuvre de nouvelles applications. </a:t>
-            </a:r>
+              <a:rPr lang="fr-FR" sz="5400" dirty="0"/>
+              <a:t>Préparer et réaliser les tests unitaires.</a:t>
+            </a:r>
+          </a:p>
+          <a:p>
+            <a:pPr>
+              <a:lnSpc>
+                <a:spcPct val="150000"/>
+              </a:lnSpc>
+            </a:pPr>
+            <a:r>
+              <a:rPr lang="fr-FR" sz="5400" dirty="0"/>
+              <a:t>Apporter les correctifs nécessaires suite à ces tests ou aux tests fonctionnels réalisés par les utilisateurs ou la maîtrise d’ouvrage.</a:t>
+            </a:r>
+          </a:p>
+          <a:p>
+            <a:pPr>
+              <a:lnSpc>
+                <a:spcPct val="150000"/>
+              </a:lnSpc>
+            </a:pPr>
+            <a:endParaRPr lang="fr-FR" sz="5400" dirty="0"/>
+          </a:p>
+          <a:p>
+            <a:pPr>
+              <a:lnSpc>
+                <a:spcPct val="150000"/>
+              </a:lnSpc>
+            </a:pPr>
             <a:endParaRPr lang="en-US" dirty="0"/>
           </a:p>
         </p:txBody>
@@ -3767,35 +3813,32 @@
         </p:nvSpPr>
         <p:spPr>
           <a:xfrm>
-            <a:off x="4063042" y="365125"/>
+            <a:off x="4063042" y="155275"/>
             <a:ext cx="7290758" cy="1325563"/>
           </a:xfrm>
         </p:spPr>
         <p:txBody>
-          <a:bodyPr/>
+          <a:bodyPr>
+            <a:normAutofit/>
+          </a:bodyPr>
           <a:lstStyle/>
           <a:p>
             <a:r>
               <a:rPr lang="en-US" dirty="0" err="1"/>
-              <a:t>Compétences</a:t>
+              <a:t>Compétence</a:t>
             </a:r>
             <a:r>
               <a:rPr lang="en-US" dirty="0"/>
-              <a:t> d’un </a:t>
+              <a:t> technique d’un </a:t>
             </a:r>
             <a:r>
               <a:rPr lang="en-US" dirty="0" err="1"/>
-              <a:t>Architecte</a:t>
+              <a:t>Développeur</a:t>
             </a:r>
             <a:r>
               <a:rPr lang="en-US" dirty="0"/>
-              <a:t> </a:t>
-            </a:r>
-            <a:r>
-              <a:rPr lang="en-US" dirty="0" err="1"/>
-              <a:t>Logiciel</a:t>
-            </a:r>
-            <a:endParaRPr lang="en-US" dirty="0"/>
+              <a:t> Web</a:t>
+            </a:r>
           </a:p>
         </p:txBody>
       </p:sp>
@@ -3811,86 +3854,100 @@
         </p:nvSpPr>
         <p:spPr>
           <a:xfrm>
-            <a:off x="4063042" y="1825625"/>
-            <a:ext cx="7290758" cy="4351338"/>
+            <a:off x="4063042" y="1480838"/>
+            <a:ext cx="7290758" cy="4600785"/>
           </a:xfrm>
         </p:spPr>
         <p:txBody>
           <a:bodyPr>
-            <a:normAutofit fontScale="25000" lnSpcReduction="20000"/>
+            <a:normAutofit fontScale="40000" lnSpcReduction="20000"/>
           </a:bodyPr>
           <a:lstStyle/>
           <a:p>
-            <a:r>
-              <a:rPr lang="fr-FR" sz="4800" dirty="0"/>
-              <a:t>Identifier le besoin organisationnel de nouvelles applications.</a:t>
-            </a:r>
-          </a:p>
-          <a:p>
-            <a:r>
-              <a:rPr lang="fr-FR" sz="4800" dirty="0"/>
-              <a:t>Préparer une spécification technique comme feuille de route pour les logiciels.</a:t>
-            </a:r>
-          </a:p>
-          <a:p>
-            <a:r>
-              <a:rPr lang="fr-FR" sz="4800" dirty="0"/>
-              <a:t>Fournir des instructions et une formation au personnel si nécessaire.</a:t>
-            </a:r>
-          </a:p>
-          <a:p>
-            <a:r>
-              <a:rPr lang="fr-FR" sz="4800" dirty="0"/>
-              <a:t>Surveiller, enregistrer et répondre aux demandes d'assistance.</a:t>
-            </a:r>
-          </a:p>
-          <a:p>
-            <a:r>
-              <a:rPr lang="fr-FR" sz="4800" dirty="0"/>
-              <a:t>Analysez les tendances d'erreur visant à réduire ou minimiser les temps d'arrêt.</a:t>
-            </a:r>
-          </a:p>
-          <a:p>
-            <a:r>
-              <a:rPr lang="fr-FR" sz="4800" dirty="0"/>
-              <a:t>Communiquez rapidement les messages concernant les problèmes de système aux utilisateurs.</a:t>
-            </a:r>
-          </a:p>
-          <a:p>
-            <a:r>
-              <a:rPr lang="fr-FR" sz="4800" dirty="0"/>
-              <a:t>Assurer la liaison avec les fournisseurs de logiciels pour répondre aux exigences de l'organisation.</a:t>
-            </a:r>
-          </a:p>
-          <a:p>
-            <a:r>
-              <a:rPr lang="fr-FR" sz="4800" dirty="0"/>
-              <a:t>Planifiez des tests réguliers pour améliorer les systèmes et applications actuels.</a:t>
-            </a:r>
-          </a:p>
-          <a:p>
-            <a:r>
-              <a:rPr lang="fr-FR" sz="4800" dirty="0"/>
-              <a:t>Identifiez les changements de fonctionnalité.</a:t>
-            </a:r>
-          </a:p>
-          <a:p>
-            <a:r>
-              <a:rPr lang="fr-FR" sz="4800" dirty="0"/>
-              <a:t>Tenir à jour la documentation des bases de données clés et des applications liées.</a:t>
-            </a:r>
-          </a:p>
-          <a:p>
-            <a:r>
-              <a:rPr lang="fr-FR" sz="4800" dirty="0"/>
-              <a:t>Préparez et gérez les sprints et assurez-vous que toutes les exigences sont correctement remplies.</a:t>
-            </a:r>
-          </a:p>
-          <a:p>
-            <a:r>
-              <a:rPr lang="fr-FR" sz="4800" dirty="0"/>
-              <a:t>Participez régulièrement à des réunions internes et externes pour faire le point sur l'avancement de votre tâche et présenter aux utilisateurs les solutions applicatives que vous proposez. </a:t>
-            </a:r>
+            <a:pPr>
+              <a:lnSpc>
+                <a:spcPct val="150000"/>
+              </a:lnSpc>
+            </a:pPr>
+            <a:r>
+              <a:rPr lang="fr-FR" sz="5400" dirty="0"/>
+              <a:t>Idem Développeur Application</a:t>
+            </a:r>
+          </a:p>
+          <a:p>
+            <a:pPr>
+              <a:lnSpc>
+                <a:spcPct val="150000"/>
+              </a:lnSpc>
+            </a:pPr>
+            <a:r>
+              <a:rPr lang="fr-FR" sz="5400" dirty="0"/>
+              <a:t>Applications web (ex : JavaScript, Flash, </a:t>
+            </a:r>
+            <a:r>
+              <a:rPr lang="fr-FR" sz="5400" dirty="0" err="1"/>
+              <a:t>dreamweaver</a:t>
+            </a:r>
+            <a:r>
+              <a:rPr lang="fr-FR" sz="5400" dirty="0"/>
+              <a:t>, Visual Basic, PHP, Flash et autres logiciels associés....)</a:t>
+            </a:r>
+          </a:p>
+          <a:p>
+            <a:pPr>
+              <a:lnSpc>
+                <a:spcPct val="150000"/>
+              </a:lnSpc>
+            </a:pPr>
+            <a:r>
+              <a:rPr lang="fr-FR" sz="5400" dirty="0"/>
+              <a:t>Langages de programmation (ex (X)HTLM, C/C , Java, (</a:t>
+            </a:r>
+            <a:r>
+              <a:rPr lang="fr-FR" sz="5400" dirty="0" err="1"/>
+              <a:t>My</a:t>
+            </a:r>
+            <a:r>
+              <a:rPr lang="fr-FR" sz="5400" dirty="0"/>
+              <a:t>)SQL, JSP, XSLT...)</a:t>
+            </a:r>
+          </a:p>
+          <a:p>
+            <a:pPr>
+              <a:lnSpc>
+                <a:spcPct val="150000"/>
+              </a:lnSpc>
+            </a:pPr>
+            <a:r>
+              <a:rPr lang="fr-FR" sz="5400" dirty="0"/>
+              <a:t>Connaissance des méthodologies de développement (méthodologies objet, « agile »…)</a:t>
+            </a:r>
+          </a:p>
+          <a:p>
+            <a:pPr>
+              <a:lnSpc>
+                <a:spcPct val="150000"/>
+              </a:lnSpc>
+            </a:pPr>
+            <a:r>
+              <a:rPr lang="fr-FR" sz="5400" dirty="0"/>
+              <a:t>Bonne maitrise de l’anglais technique indispensable</a:t>
+            </a:r>
+          </a:p>
+          <a:p>
+            <a:pPr>
+              <a:lnSpc>
+                <a:spcPct val="150000"/>
+              </a:lnSpc>
+            </a:pPr>
+            <a:endParaRPr lang="fr-FR" sz="5400" dirty="0"/>
+          </a:p>
+          <a:p>
+            <a:pPr>
+              <a:lnSpc>
+                <a:spcPct val="150000"/>
+              </a:lnSpc>
+            </a:pPr>
             <a:endParaRPr lang="en-US" dirty="0"/>
           </a:p>
         </p:txBody>
@@ -3898,7 +3955,7 @@
     </p:spTree>
     <p:extLst>
       <p:ext uri="{BB962C8B-B14F-4D97-AF65-F5344CB8AC3E}">
-        <p14:creationId xmlns:p14="http://schemas.microsoft.com/office/powerpoint/2010/main" val="1398404491"/>
+        <p14:creationId xmlns:p14="http://schemas.microsoft.com/office/powerpoint/2010/main" val="1643144713"/>
       </p:ext>
     </p:extLst>
   </p:cSld>
@@ -3967,7 +4024,7 @@
         </p:nvSpPr>
         <p:spPr>
           <a:xfrm>
-            <a:off x="4063042" y="365125"/>
+            <a:off x="4063042" y="155275"/>
             <a:ext cx="7290758" cy="1325563"/>
           </a:xfrm>
         </p:spPr>
@@ -3976,8 +4033,20 @@
           <a:lstStyle/>
           <a:p>
             <a:r>
+              <a:rPr lang="en-US" dirty="0" err="1"/>
+              <a:t>Exemples</a:t>
+            </a:r>
+            <a:r>
               <a:rPr lang="en-US" dirty="0"/>
-              <a:t>Data Analyst/Scientist</a:t>
+              <a:t> formations d’un </a:t>
+            </a:r>
+            <a:r>
+              <a:rPr lang="en-US" dirty="0" err="1"/>
+              <a:t>Développeur</a:t>
+            </a:r>
+            <a:r>
+              <a:rPr lang="en-US" dirty="0"/>
+              <a:t> Web</a:t>
             </a:r>
           </a:p>
         </p:txBody>
@@ -3994,47 +4063,54 @@
         </p:nvSpPr>
         <p:spPr>
           <a:xfrm>
-            <a:off x="4063042" y="1825625"/>
-            <a:ext cx="7290758" cy="4351338"/>
+            <a:off x="4063042" y="1480838"/>
+            <a:ext cx="7290758" cy="4600785"/>
           </a:xfrm>
         </p:spPr>
         <p:txBody>
           <a:bodyPr>
-            <a:normAutofit/>
+            <a:normAutofit fontScale="92500"/>
           </a:bodyPr>
           <a:lstStyle/>
           <a:p>
-            <a:r>
-              <a:rPr lang="fr-FR" dirty="0"/>
-              <a:t>Un data </a:t>
-            </a:r>
-            <a:r>
-              <a:rPr lang="fr-FR" dirty="0" err="1"/>
-              <a:t>analyst</a:t>
-            </a:r>
-            <a:r>
-              <a:rPr lang="fr-FR" dirty="0"/>
-              <a:t> est un professionnel qui récupère et rassemble des données, les organise et les utilise pour tirer des conclusions significatives. Il s’intéresse au </a:t>
-            </a:r>
-            <a:r>
-              <a:rPr lang="fr-FR"/>
-              <a:t>Big Data.</a:t>
-            </a:r>
-            <a:endParaRPr lang="fr-FR" dirty="0"/>
-          </a:p>
-          <a:p>
-            <a:r>
-              <a:rPr lang="fr-FR" dirty="0"/>
-              <a:t>Un data </a:t>
-            </a:r>
-            <a:r>
-              <a:rPr lang="fr-FR" dirty="0" err="1"/>
-              <a:t>scientist</a:t>
-            </a:r>
-            <a:r>
-              <a:rPr lang="fr-FR" dirty="0"/>
-              <a:t>, quant à lui, est responsable de l'analyse et de l'interprétation de très grandes quantités de données et est capable d'effectuer une analyse prédictive basée sur des modèles passés. </a:t>
-            </a:r>
+            <a:pPr>
+              <a:lnSpc>
+                <a:spcPct val="150000"/>
+              </a:lnSpc>
+            </a:pPr>
+            <a:r>
+              <a:rPr lang="fr-FR" dirty="0"/>
+              <a:t>Formation de niveau bac +2 / 3 (BTS informatique, DUT informatique ou télécommunications, licence professionnelle spécialisée en informatique …)</a:t>
+            </a:r>
+          </a:p>
+          <a:p>
+            <a:pPr>
+              <a:lnSpc>
+                <a:spcPct val="150000"/>
+              </a:lnSpc>
+            </a:pPr>
+            <a:r>
+              <a:rPr lang="fr-FR" dirty="0"/>
+              <a:t>Formation de niveau bac +4/5 (Master) spécialisée en informatique, réseaux et télécommunications</a:t>
+            </a:r>
+          </a:p>
+          <a:p>
+            <a:pPr>
+              <a:lnSpc>
+                <a:spcPct val="150000"/>
+              </a:lnSpc>
+            </a:pPr>
+            <a:r>
+              <a:rPr lang="fr-FR" dirty="0"/>
+              <a:t>Écoles d’ingénieurs (informatique, télécoms, généralistes…)</a:t>
+            </a:r>
+          </a:p>
+          <a:p>
+            <a:pPr>
+              <a:lnSpc>
+                <a:spcPct val="150000"/>
+              </a:lnSpc>
+            </a:pPr>
             <a:endParaRPr lang="en-US" dirty="0"/>
           </a:p>
         </p:txBody>
@@ -4042,7 +4118,7 @@
     </p:spTree>
     <p:extLst>
       <p:ext uri="{BB962C8B-B14F-4D97-AF65-F5344CB8AC3E}">
-        <p14:creationId xmlns:p14="http://schemas.microsoft.com/office/powerpoint/2010/main" val="1398404491"/>
+        <p14:creationId xmlns:p14="http://schemas.microsoft.com/office/powerpoint/2010/main" val="3934356655"/>
       </p:ext>
     </p:extLst>
   </p:cSld>
@@ -4111,7 +4187,7 @@
         </p:nvSpPr>
         <p:spPr>
           <a:xfrm>
-            <a:off x="4063042" y="365125"/>
+            <a:off x="4063042" y="155275"/>
             <a:ext cx="7290758" cy="1325563"/>
           </a:xfrm>
         </p:spPr>
@@ -4121,12 +4197,17 @@
           <a:p>
             <a:r>
               <a:rPr lang="en-US" dirty="0" err="1"/>
-              <a:t>Comptétences</a:t>
+              <a:t>Architecte</a:t>
             </a:r>
             <a:r>
               <a:rPr lang="en-US" dirty="0"/>
-              <a:t> Data Analyst</a:t>
-            </a:r>
+              <a:t> </a:t>
+            </a:r>
+            <a:r>
+              <a:rPr lang="en-US" dirty="0" err="1"/>
+              <a:t>Logiciel</a:t>
+            </a:r>
+            <a:endParaRPr lang="en-US" dirty="0"/>
           </a:p>
         </p:txBody>
       </p:sp>
@@ -4142,93 +4223,132 @@
         </p:nvSpPr>
         <p:spPr>
           <a:xfrm>
-            <a:off x="4063042" y="1825625"/>
-            <a:ext cx="7290758" cy="4351338"/>
+            <a:off x="4063042" y="1480838"/>
+            <a:ext cx="7290758" cy="4600785"/>
           </a:xfrm>
         </p:spPr>
         <p:txBody>
           <a:bodyPr>
-            <a:normAutofit fontScale="55000" lnSpcReduction="20000"/>
+            <a:normAutofit fontScale="40000" lnSpcReduction="20000"/>
           </a:bodyPr>
           <a:lstStyle/>
           <a:p>
-            <a:r>
-              <a:rPr lang="fr-FR" dirty="0"/>
-              <a:t>Élaborer des processus et des politiques de gestion des documents.</a:t>
-            </a:r>
-          </a:p>
-          <a:p>
-            <a:r>
-              <a:rPr lang="fr-FR" dirty="0"/>
-              <a:t>Identifiez les domaines pour augmenter l'efficacité et l'automatisation des processus.</a:t>
-            </a:r>
-          </a:p>
-          <a:p>
-            <a:r>
-              <a:rPr lang="fr-FR" dirty="0"/>
-              <a:t>Mettre en place et maintenir des processus de données automatisés.</a:t>
-            </a:r>
-          </a:p>
-          <a:p>
-            <a:r>
-              <a:rPr lang="fr-FR" dirty="0"/>
-              <a:t>Identifier, évaluer et mettre en œuvre des services et des outils externes pour soutenir la validation et le nettoyage des données.</a:t>
-            </a:r>
-          </a:p>
-          <a:p>
-            <a:r>
-              <a:rPr lang="fr-FR" dirty="0"/>
-              <a:t>Produire et suivre des indicateurs de performance clés.</a:t>
-            </a:r>
-          </a:p>
-          <a:p>
-            <a:r>
-              <a:rPr lang="fr-FR" dirty="0"/>
-              <a:t>Développer et soutenir les processus de reporting.</a:t>
-            </a:r>
-          </a:p>
-          <a:p>
-            <a:r>
-              <a:rPr lang="fr-FR" dirty="0"/>
-              <a:t>Surveiller et auditer la qualité des données.</a:t>
-            </a:r>
-          </a:p>
-          <a:p>
-            <a:r>
-              <a:rPr lang="fr-FR" dirty="0"/>
-              <a:t>Rassemblez, comprenez et documentez les exigences commerciales détaillées à l'aide des outils et techniques appropriés.</a:t>
-            </a:r>
-          </a:p>
-          <a:p>
-            <a:r>
-              <a:rPr lang="fr-FR" dirty="0"/>
-              <a:t>Concevoir et réaliser des enquêtes et analyser les données d'enquête.</a:t>
-            </a:r>
-          </a:p>
-          <a:p>
-            <a:r>
-              <a:rPr lang="fr-FR" dirty="0"/>
-              <a:t>Préparez des rapports pour des publics internes et externes à l'aide d'outils de création de rapports d'analyse commerciale.</a:t>
-            </a:r>
-          </a:p>
-          <a:p>
-            <a:r>
-              <a:rPr lang="fr-FR" dirty="0"/>
-              <a:t>Créez des tableaux de bord de données, des graphiques et des visualisations.</a:t>
-            </a:r>
-          </a:p>
-          <a:p>
-            <a:r>
-              <a:rPr lang="fr-FR" dirty="0"/>
-              <a:t>Fournir une analyse comparative des secteurs et des concurrents.</a:t>
-            </a:r>
-          </a:p>
-          <a:p>
-            <a:r>
-              <a:rPr lang="fr-FR" dirty="0"/>
-              <a:t>Exploitez et analysez de grands ensembles de données, tirez des inférences valides et présentez-les avec succès à la direction à l'aide d'un outil de reporting.</a:t>
-            </a:r>
-            <a:endParaRPr lang="en-US" dirty="0"/>
+            <a:pPr>
+              <a:lnSpc>
+                <a:spcPct val="150000"/>
+              </a:lnSpc>
+            </a:pPr>
+            <a:r>
+              <a:rPr lang="fr-FR" dirty="0"/>
+              <a:t>Les </a:t>
+            </a:r>
+            <a:r>
+              <a:rPr lang="fr-FR" b="1" dirty="0"/>
+              <a:t>architectes d'applications </a:t>
+            </a:r>
+            <a:r>
+              <a:rPr lang="fr-FR" dirty="0"/>
+              <a:t>est un ingénieur expérimenté </a:t>
+            </a:r>
+          </a:p>
+          <a:p>
+            <a:pPr>
+              <a:lnSpc>
+                <a:spcPct val="150000"/>
+              </a:lnSpc>
+            </a:pPr>
+            <a:r>
+              <a:rPr lang="fr-FR" dirty="0"/>
+              <a:t>Il a une vision globale du système à concevoir.</a:t>
+            </a:r>
+          </a:p>
+          <a:p>
+            <a:pPr>
+              <a:lnSpc>
+                <a:spcPct val="150000"/>
+              </a:lnSpc>
+            </a:pPr>
+            <a:r>
+              <a:rPr lang="fr-FR" dirty="0"/>
+              <a:t>Un architecte supervise les meilleures pratiques et les processus nécessaires au bon fonctionnement d'une entreprise pour fonctionner et réussir, agissant en tant que point de contact technique pour résoudre les problèmes d'application et de système - généralement sur une base immédiate.</a:t>
+            </a:r>
+          </a:p>
+          <a:p>
+            <a:pPr>
+              <a:lnSpc>
+                <a:spcPct val="150000"/>
+              </a:lnSpc>
+            </a:pPr>
+            <a:r>
+              <a:rPr lang="fr-FR" dirty="0"/>
+              <a:t>Nécessite de travailler au sein de différents services informatiques aux côtés de développeurs d'applications et d'ingénieurs logiciels et impliqué dans des tâches telles que:</a:t>
+            </a:r>
+          </a:p>
+          <a:p>
+            <a:pPr lvl="1">
+              <a:lnSpc>
+                <a:spcPct val="150000"/>
+              </a:lnSpc>
+            </a:pPr>
+            <a:r>
+              <a:rPr lang="fr-FR" dirty="0"/>
+              <a:t>Formation et accompagnement du personnel dans l'utilisation des applications</a:t>
+            </a:r>
+          </a:p>
+          <a:p>
+            <a:pPr lvl="1">
+              <a:lnSpc>
+                <a:spcPct val="150000"/>
+              </a:lnSpc>
+            </a:pPr>
+            <a:r>
+              <a:rPr lang="fr-FR" dirty="0"/>
+              <a:t>Analyse et diagnostic des erreurs d'application</a:t>
+            </a:r>
+          </a:p>
+          <a:p>
+            <a:pPr lvl="1">
+              <a:lnSpc>
+                <a:spcPct val="150000"/>
+              </a:lnSpc>
+            </a:pPr>
+            <a:r>
+              <a:rPr lang="fr-FR" dirty="0"/>
+              <a:t>Résolution des problèmes à la fois à long et à court terme</a:t>
+            </a:r>
+          </a:p>
+          <a:p>
+            <a:pPr lvl="1">
+              <a:lnSpc>
+                <a:spcPct val="150000"/>
+              </a:lnSpc>
+            </a:pPr>
+            <a:r>
+              <a:rPr lang="fr-FR" dirty="0"/>
+              <a:t>Conception et développement d'applications existantes et nouvelles</a:t>
+            </a:r>
+          </a:p>
+          <a:p>
+            <a:pPr>
+              <a:lnSpc>
+                <a:spcPct val="150000"/>
+              </a:lnSpc>
+            </a:pPr>
+            <a:r>
+              <a:rPr lang="fr-FR" dirty="0"/>
+              <a:t>Il échange avec les responsables/demandeurs que veulent de l’automatisation et une réduction des cout et les développeurs pour le développement des demandes.</a:t>
+            </a:r>
+          </a:p>
+          <a:p>
+            <a:pPr>
+              <a:lnSpc>
+                <a:spcPct val="150000"/>
+              </a:lnSpc>
+            </a:pPr>
+            <a:r>
+              <a:rPr lang="fr-FR" dirty="0"/>
+              <a:t>Il a souvent un implication dans le développement. Développer lui-même, suivre le travail des développeurs.</a:t>
+            </a:r>
           </a:p>
         </p:txBody>
       </p:sp>
@@ -4309,17 +4429,40 @@
           </a:xfrm>
         </p:spPr>
         <p:txBody>
-          <a:bodyPr/>
+          <a:bodyPr>
+            <a:normAutofit/>
+          </a:bodyPr>
           <a:lstStyle/>
           <a:p>
             <a:r>
               <a:rPr lang="en-US" dirty="0" err="1"/>
-              <a:t>Compétence</a:t>
+              <a:t>Compétences</a:t>
             </a:r>
             <a:r>
               <a:rPr lang="en-US" dirty="0"/>
-              <a:t> d’un Data Scientist</a:t>
-            </a:r>
+              <a:t> </a:t>
+            </a:r>
+            <a:r>
+              <a:rPr lang="en-US" dirty="0" err="1"/>
+              <a:t>professionnelles</a:t>
+            </a:r>
+            <a:r>
+              <a:rPr lang="en-US" dirty="0"/>
+              <a:t> d’un </a:t>
+            </a:r>
+            <a:r>
+              <a:rPr lang="en-US" dirty="0" err="1"/>
+              <a:t>Architecte</a:t>
+            </a:r>
+            <a:r>
+              <a:rPr lang="en-US" dirty="0"/>
+              <a:t> </a:t>
+            </a:r>
+            <a:r>
+              <a:rPr lang="en-US" dirty="0" err="1"/>
+              <a:t>Logiciel</a:t>
+            </a:r>
+            <a:endParaRPr lang="en-US" dirty="0"/>
           </a:p>
         </p:txBody>
       </p:sp>
@@ -4341,106 +4484,74 @@
         </p:spPr>
         <p:txBody>
           <a:bodyPr>
-            <a:normAutofit fontScale="85000" lnSpcReduction="10000"/>
+            <a:normAutofit fontScale="32500" lnSpcReduction="20000"/>
           </a:bodyPr>
           <a:lstStyle/>
           <a:p>
             <a:r>
-              <a:rPr lang="fr-FR" dirty="0"/>
-              <a:t>à la connaissance de l'activité et du fonctionnement de l'entreprise ou de l'organisation qui l'emploie.</a:t>
-            </a:r>
-          </a:p>
-          <a:p>
-            <a:r>
-              <a:rPr lang="fr-FR" dirty="0"/>
-              <a:t>Il est à l'aise avec les techniques du data </a:t>
-            </a:r>
-            <a:r>
-              <a:rPr lang="fr-FR" dirty="0" err="1"/>
-              <a:t>mining</a:t>
-            </a:r>
-            <a:r>
-              <a:rPr lang="fr-FR" dirty="0"/>
-              <a:t> (exploration des données), les outils mathématiques statistiques et informatiques (IA).</a:t>
-            </a:r>
-          </a:p>
-          <a:p>
-            <a:r>
-              <a:rPr lang="fr-FR" b="0" i="0" dirty="0">
-                <a:solidFill>
-                  <a:srgbClr val="182642"/>
-                </a:solidFill>
-                <a:effectLst/>
-                <a:latin typeface="Lato"/>
-              </a:rPr>
-              <a:t>Il maîtrise les méthodes et normes de conception.</a:t>
-            </a:r>
-          </a:p>
-          <a:p>
-            <a:r>
-              <a:rPr lang="fr-FR" b="0" i="0" dirty="0">
-                <a:solidFill>
-                  <a:srgbClr val="182642"/>
-                </a:solidFill>
-                <a:effectLst/>
-                <a:latin typeface="Lato"/>
-              </a:rPr>
-              <a:t>Il a également la connaissance des systèmes de gestion de bases de données relationnelles ou non capables de gérer de grosses quantités de données.</a:t>
-            </a:r>
-          </a:p>
-          <a:p>
-            <a:r>
-              <a:rPr lang="fr-FR" b="0" i="0" dirty="0">
-                <a:solidFill>
-                  <a:srgbClr val="182642"/>
-                </a:solidFill>
-                <a:effectLst/>
-                <a:latin typeface="Lato"/>
-              </a:rPr>
-              <a:t>Le data </a:t>
-            </a:r>
-            <a:r>
-              <a:rPr lang="fr-FR" b="0" i="0" dirty="0" err="1">
-                <a:solidFill>
-                  <a:srgbClr val="182642"/>
-                </a:solidFill>
-                <a:effectLst/>
-                <a:latin typeface="Lato"/>
-              </a:rPr>
-              <a:t>scientist</a:t>
-            </a:r>
-            <a:r>
-              <a:rPr lang="fr-FR" b="0" i="0" dirty="0">
-                <a:solidFill>
-                  <a:srgbClr val="182642"/>
-                </a:solidFill>
-                <a:effectLst/>
-                <a:latin typeface="Lato"/>
-              </a:rPr>
-              <a:t> a un bon sens du business et s'intéresse aux </a:t>
-            </a:r>
-            <a:r>
-              <a:rPr lang="fr-FR" b="0" i="0" u="none" strike="noStrike" dirty="0">
-                <a:solidFill>
-                  <a:srgbClr val="09A0DB"/>
-                </a:solidFill>
-                <a:effectLst/>
-                <a:latin typeface="Lato"/>
-                <a:hlinkClick r:id="rId3"/>
-              </a:rPr>
-              <a:t>techniques du marketing</a:t>
-            </a:r>
-            <a:r>
-              <a:rPr lang="fr-FR" b="0" i="0" dirty="0">
-                <a:solidFill>
-                  <a:srgbClr val="182642"/>
-                </a:solidFill>
-                <a:effectLst/>
-                <a:latin typeface="Lato"/>
-              </a:rPr>
-              <a:t>.</a:t>
-            </a:r>
-            <a:endParaRPr lang="en-US" dirty="0"/>
+              <a:rPr lang="fr-FR" sz="4800" dirty="0"/>
+              <a:t>Identifier le besoin organisationnel de nouvelles applications.</a:t>
+            </a:r>
+          </a:p>
+          <a:p>
+            <a:r>
+              <a:rPr lang="fr-FR" sz="4800" dirty="0"/>
+              <a:t>Participer aux sprints Agile pour orienter les développements</a:t>
+            </a:r>
+          </a:p>
+          <a:p>
+            <a:r>
+              <a:rPr lang="fr-FR" sz="4800" dirty="0"/>
+              <a:t>Préparer une spécification technique comme feuille de route pour les logiciels.</a:t>
+            </a:r>
+          </a:p>
+          <a:p>
+            <a:r>
+              <a:rPr lang="fr-FR" sz="4800" dirty="0"/>
+              <a:t>Fournir des instructions et une formation au personnel si nécessaire.</a:t>
+            </a:r>
+          </a:p>
+          <a:p>
+            <a:r>
+              <a:rPr lang="fr-FR" sz="4800" dirty="0"/>
+              <a:t>Surveiller, enregistrer et répondre aux demandes d'assistance.</a:t>
+            </a:r>
+          </a:p>
+          <a:p>
+            <a:r>
+              <a:rPr lang="fr-FR" sz="4800" dirty="0"/>
+              <a:t>Analysez les tendances d'erreur visant à réduire ou minimiser les temps d'arrêt.</a:t>
+            </a:r>
+          </a:p>
+          <a:p>
+            <a:r>
+              <a:rPr lang="fr-FR" sz="4800" dirty="0"/>
+              <a:t>Communiquez rapidement les messages concernant les problèmes de système aux utilisateurs.</a:t>
+            </a:r>
+          </a:p>
+          <a:p>
+            <a:r>
+              <a:rPr lang="fr-FR" sz="4800" dirty="0"/>
+              <a:t>Assurer la liaison avec les fournisseurs de logiciels pour répondre aux exigences de l'organisation.</a:t>
+            </a:r>
+          </a:p>
+          <a:p>
+            <a:r>
+              <a:rPr lang="fr-FR" sz="4800" dirty="0"/>
+              <a:t>Planifiez des tests réguliers pour améliorer les systèmes et applications actuels.</a:t>
+            </a:r>
+          </a:p>
+          <a:p>
+            <a:r>
+              <a:rPr lang="fr-FR" sz="4800" dirty="0"/>
+              <a:t>Identifiez les changements de fonctionnalité.</a:t>
+            </a:r>
+          </a:p>
+          <a:p>
+            <a:r>
+              <a:rPr lang="fr-FR" sz="4800" dirty="0"/>
+              <a:t>Participez régulièrement à des réunions internes et externes pour faire le point sur l'avancement de votre tâche et présenter aux utilisateurs les solutions applicatives que vous proposez. </a:t>
+            </a:r>
           </a:p>
         </p:txBody>
       </p:sp>
@@ -4521,22 +4632,31 @@
           </a:xfrm>
         </p:spPr>
         <p:txBody>
-          <a:bodyPr/>
+          <a:bodyPr>
+            <a:normAutofit/>
+          </a:bodyPr>
           <a:lstStyle/>
           <a:p>
             <a:r>
               <a:rPr lang="en-US" dirty="0" err="1"/>
-              <a:t>Ingénieur</a:t>
+              <a:t>Compétences</a:t>
+            </a:r>
+            <a:r>
+              <a:rPr lang="en-US" dirty="0"/>
+              <a:t> technique d’un </a:t>
+            </a:r>
+            <a:r>
+              <a:rPr lang="en-US" dirty="0" err="1"/>
+              <a:t>Architecte</a:t>
             </a:r>
             <a:r>
               <a:rPr lang="en-US" dirty="0"/>
               <a:t> </a:t>
             </a:r>
             <a:r>
-              <a:rPr lang="en-US" dirty="0" err="1"/>
-              <a:t>Testeur</a:t>
-            </a:r>
-            <a:endParaRPr lang="en-US" dirty="0"/>
+              <a:rPr lang="fr-FR" dirty="0"/>
+              <a:t>Logiciel</a:t>
+            </a:r>
           </a:p>
         </p:txBody>
       </p:sp>
@@ -4552,180 +4672,57 @@
         </p:nvSpPr>
         <p:spPr>
           <a:xfrm>
-            <a:off x="4063042" y="1690688"/>
+            <a:off x="4063042" y="1825625"/>
             <a:ext cx="7290758" cy="4351338"/>
           </a:xfrm>
         </p:spPr>
         <p:txBody>
           <a:bodyPr>
-            <a:noAutofit/>
+            <a:normAutofit fontScale="62500" lnSpcReduction="20000"/>
           </a:bodyPr>
           <a:lstStyle/>
           <a:p>
-            <a:pPr>
-              <a:lnSpc>
-                <a:spcPct val="120000"/>
-              </a:lnSpc>
-            </a:pPr>
-            <a:r>
-              <a:rPr lang="fr-FR" sz="1400" b="1" dirty="0"/>
-              <a:t>Un testeur </a:t>
-            </a:r>
-            <a:r>
-              <a:rPr lang="fr-FR" sz="1400" dirty="0"/>
-              <a:t>est un professionnel qui effectue des tests automatisés et manuels pour s'assurer que le logiciel créé par les développeurs est adapté à son objectif et que tous les bogues ou problèmes sont supprimés dans un produit avant qu'il ne soit déployé auprès des utilisateurs quotidiens. </a:t>
-            </a:r>
-            <a:endParaRPr lang="en-US" sz="1400" dirty="0"/>
-          </a:p>
-          <a:p>
-            <a:r>
-              <a:rPr lang="fr-FR" sz="1400" dirty="0"/>
-              <a:t>Un testeur doit être bien informé dans divers types de tests fonctionnels tels que: </a:t>
-            </a:r>
-            <a:endParaRPr lang="en-US" sz="1400" dirty="0"/>
-          </a:p>
-          <a:p>
-            <a:pPr lvl="1"/>
-            <a:r>
-              <a:rPr lang="en-US" sz="1400" dirty="0"/>
-              <a:t>Tests </a:t>
-            </a:r>
-            <a:r>
-              <a:rPr lang="en-US" sz="1400" dirty="0" err="1"/>
-              <a:t>Unitaires</a:t>
-            </a:r>
-            <a:endParaRPr lang="en-US" sz="1400" dirty="0"/>
-          </a:p>
-          <a:p>
-            <a:pPr lvl="1"/>
-            <a:r>
-              <a:rPr lang="en-US" sz="1400" dirty="0"/>
-              <a:t>Tests </a:t>
-            </a:r>
-            <a:r>
-              <a:rPr lang="en-US" sz="1400" dirty="0" err="1"/>
-              <a:t>d’intégration</a:t>
-            </a:r>
-            <a:endParaRPr lang="en-US" sz="1400" dirty="0"/>
-          </a:p>
-          <a:p>
-            <a:pPr lvl="1"/>
-            <a:r>
-              <a:rPr lang="en-US" sz="1400" dirty="0"/>
-              <a:t>Test </a:t>
-            </a:r>
-            <a:r>
-              <a:rPr lang="en-US" sz="1400" dirty="0" err="1"/>
-              <a:t>système</a:t>
-            </a:r>
-            <a:endParaRPr lang="en-US" sz="1400" dirty="0"/>
-          </a:p>
-          <a:p>
-            <a:pPr lvl="1"/>
-            <a:r>
-              <a:rPr lang="en-US" sz="1400" dirty="0"/>
-              <a:t>Tests de non </a:t>
-            </a:r>
-            <a:r>
-              <a:rPr lang="en-US" sz="1400" dirty="0" err="1"/>
-              <a:t>régression</a:t>
-            </a:r>
-            <a:endParaRPr lang="en-US" sz="1400" dirty="0"/>
-          </a:p>
-          <a:p>
-            <a:r>
-              <a:rPr lang="en-US" sz="1400" dirty="0"/>
-              <a:t>Et tests non </a:t>
-            </a:r>
-            <a:r>
-              <a:rPr lang="en-US" sz="1400" dirty="0" err="1"/>
-              <a:t>fonctionnels</a:t>
-            </a:r>
-            <a:r>
-              <a:rPr lang="en-US" sz="1400" dirty="0"/>
-              <a:t>:</a:t>
-            </a:r>
-          </a:p>
-          <a:p>
-            <a:pPr lvl="1"/>
-            <a:r>
-              <a:rPr lang="en-US" sz="1400" dirty="0"/>
-              <a:t>Tests de performance</a:t>
-            </a:r>
-          </a:p>
-          <a:p>
-            <a:pPr lvl="1"/>
-            <a:r>
-              <a:rPr lang="en-US" sz="1400" dirty="0"/>
-              <a:t>Tests de </a:t>
-            </a:r>
-            <a:r>
-              <a:rPr lang="en-US" sz="1400" dirty="0" err="1"/>
-              <a:t>chargement</a:t>
-            </a:r>
-            <a:endParaRPr lang="en-US" sz="1400" dirty="0"/>
-          </a:p>
-          <a:p>
-            <a:pPr lvl="1"/>
-            <a:r>
-              <a:rPr lang="en-US" sz="1400" dirty="0"/>
-              <a:t>Tests de stress </a:t>
-            </a:r>
-          </a:p>
-          <a:p>
-            <a:pPr lvl="1"/>
-            <a:r>
-              <a:rPr lang="en-US" sz="1400" dirty="0"/>
-              <a:t>Tests de </a:t>
-            </a:r>
-            <a:r>
-              <a:rPr lang="en-US" sz="1400" dirty="0" err="1"/>
-              <a:t>sécurité</a:t>
-            </a:r>
-            <a:endParaRPr lang="en-US" sz="1400" dirty="0"/>
-          </a:p>
-          <a:p>
-            <a:pPr lvl="1"/>
-            <a:r>
-              <a:rPr lang="en-US" sz="1400" dirty="0"/>
-              <a:t>Tests de </a:t>
-            </a:r>
-            <a:r>
-              <a:rPr lang="en-US" sz="1400" dirty="0" err="1"/>
-              <a:t>compatibilité</a:t>
-            </a:r>
-            <a:endParaRPr lang="en-US" sz="1400" dirty="0"/>
-          </a:p>
-          <a:p>
-            <a:pPr lvl="1"/>
-            <a:r>
-              <a:rPr lang="en-US" sz="1400" dirty="0"/>
-              <a:t>Tests </a:t>
-            </a:r>
-            <a:r>
-              <a:rPr lang="en-US" sz="1400" dirty="0" err="1"/>
-              <a:t>utilisateurs</a:t>
-            </a:r>
-            <a:endParaRPr lang="en-US" sz="1400" dirty="0"/>
-          </a:p>
-          <a:p>
-            <a:pPr lvl="1"/>
-            <a:r>
-              <a:rPr lang="en-US" sz="1400" dirty="0"/>
-              <a:t>Tests </a:t>
-            </a:r>
-            <a:r>
-              <a:rPr lang="en-US" sz="1400" dirty="0" err="1"/>
-              <a:t>conformités</a:t>
-            </a:r>
-            <a:endParaRPr lang="en-US" sz="1400" dirty="0"/>
+            <a:r>
+              <a:rPr lang="fr-FR" sz="4800" dirty="0"/>
+              <a:t>Maitrise parfaite des systèmes d’exploitation (Windows, OS, Linux) ;</a:t>
+            </a:r>
+          </a:p>
+          <a:p>
+            <a:r>
+              <a:rPr lang="fr-FR" sz="4800" dirty="0"/>
+              <a:t>Maitrise des langages programmatiques (C+, SQL, Java, Python, PHP, R) ;</a:t>
+            </a:r>
+          </a:p>
+          <a:p>
+            <a:r>
+              <a:rPr lang="fr-FR" sz="4800" dirty="0"/>
+              <a:t>Connaissance des différentes normes de sécurité ;</a:t>
+            </a:r>
+          </a:p>
+          <a:p>
+            <a:r>
+              <a:rPr lang="fr-FR" sz="4800" dirty="0"/>
+              <a:t>Connaissance des protocoles réseaux ;</a:t>
+            </a:r>
+          </a:p>
+          <a:p>
+            <a:r>
+              <a:rPr lang="fr-FR" sz="4800" dirty="0"/>
+              <a:t>Maitrise de l’anglais technique ;</a:t>
+            </a:r>
+          </a:p>
+          <a:p>
+            <a:r>
+              <a:rPr lang="fr-FR" sz="4800" dirty="0"/>
+              <a:t>Maitrise de la gestion de projets techniques.</a:t>
+            </a:r>
           </a:p>
         </p:txBody>
       </p:sp>
     </p:spTree>
     <p:extLst>
       <p:ext uri="{BB962C8B-B14F-4D97-AF65-F5344CB8AC3E}">
-        <p14:creationId xmlns:p14="http://schemas.microsoft.com/office/powerpoint/2010/main" val="1398404491"/>
+        <p14:creationId xmlns:p14="http://schemas.microsoft.com/office/powerpoint/2010/main" val="130851272"/>
       </p:ext>
     </p:extLst>
   </p:cSld>
@@ -4803,20 +4800,8 @@
           <a:lstStyle/>
           <a:p>
             <a:r>
-              <a:rPr lang="en-US" dirty="0" err="1"/>
-              <a:t>Compétences</a:t>
-            </a:r>
-            <a:r>
               <a:rPr lang="en-US" dirty="0"/>
-              <a:t> d'un </a:t>
-            </a:r>
-            <a:r>
-              <a:rPr lang="en-US" dirty="0" err="1"/>
-              <a:t>testeur</a:t>
-            </a:r>
-            <a:r>
-              <a:rPr lang="en-US" dirty="0"/>
-              <a:t> </a:t>
+              <a:t>Data Analyst/Scientist</a:t>
             </a:r>
           </a:p>
         </p:txBody>
@@ -4839,80 +4824,20 @@
         </p:spPr>
         <p:txBody>
           <a:bodyPr>
-            <a:normAutofit fontScale="62500" lnSpcReduction="20000"/>
+            <a:normAutofit/>
           </a:bodyPr>
           <a:lstStyle/>
           <a:p>
             <a:r>
               <a:rPr lang="fr-FR" dirty="0"/>
-              <a:t>Effectuer des tests de résistance, des tests de performance, des tests fonctionnels et des tests d'évolutivité.</a:t>
-            </a:r>
-          </a:p>
-          <a:p>
-            <a:r>
-              <a:rPr lang="fr-FR" dirty="0"/>
-              <a:t>Écrivez et exécutez des scripts de test.</a:t>
-            </a:r>
-          </a:p>
-          <a:p>
-            <a:r>
-              <a:rPr lang="fr-FR" dirty="0"/>
-              <a:t>Exécutez des tests manuels et automatisés.</a:t>
-            </a:r>
-          </a:p>
-          <a:p>
-            <a:r>
-              <a:rPr lang="fr-FR" dirty="0"/>
-              <a:t>Testez dans différents environnements, y compris le Web et le mobile.</a:t>
-            </a:r>
-          </a:p>
-          <a:p>
-            <a:r>
-              <a:rPr lang="fr-FR" dirty="0"/>
-              <a:t>Rédiger des rapports de bogue.</a:t>
-            </a:r>
-          </a:p>
-          <a:p>
-            <a:r>
-              <a:rPr lang="fr-FR" dirty="0"/>
-              <a:t>Examiner la documentation.</a:t>
-            </a:r>
-          </a:p>
-          <a:p>
-            <a:r>
-              <a:rPr lang="fr-FR" dirty="0"/>
-              <a:t>Fournir une assurance qualité.</a:t>
-            </a:r>
-          </a:p>
-          <a:p>
-            <a:r>
-              <a:rPr lang="fr-FR" dirty="0"/>
-              <a:t>Fournir une rétroaction objective aux équipes de projet de développement logiciel.</a:t>
-            </a:r>
-          </a:p>
-          <a:p>
-            <a:r>
-              <a:rPr lang="fr-FR" dirty="0"/>
-              <a:t>Dépanner et résoudre les problèmes.</a:t>
-            </a:r>
-          </a:p>
-          <a:p>
-            <a:r>
-              <a:rPr lang="fr-FR" dirty="0"/>
-              <a:t>Concevez des tests pour atténuer les risques.</a:t>
-            </a:r>
-          </a:p>
-          <a:p>
-            <a:r>
-              <a:rPr lang="fr-FR" dirty="0"/>
-              <a:t>Présenter les résultats aux équipes de développement de logiciels et d'utilisateurs professionnels.</a:t>
-            </a:r>
-            <a:endParaRPr lang="en-US" dirty="0"/>
-          </a:p>
-          <a:p>
-            <a:pPr>
-              <a:buNone/>
-            </a:pPr>
+              <a:t>La tâche du Data Analyst consiste à traiter les différentes données concernant les clients, les produits ou les performances de l’entreprise afin de dégager des indicateurs utiles aux décideurs. C’est un poste clé du Big Data.</a:t>
+            </a:r>
+          </a:p>
+          <a:p>
+            <a:r>
+              <a:rPr lang="fr-FR" dirty="0"/>
+              <a:t>Un Data scientist, quant à lui, est responsable de l'analyse et de l'interprétation de très grandes quantités de données et est capable d'effectuer une analyse prédictive basée sur des modèles passés. </a:t>
+            </a:r>
             <a:endParaRPr lang="en-US" dirty="0"/>
           </a:p>
         </p:txBody>
@@ -4998,18 +4923,13 @@
           <a:lstStyle/>
           <a:p>
             <a:r>
-              <a:rPr lang="en-US" dirty="0" err="1"/>
-              <a:t>Opérations</a:t>
+              <a:rPr lang="fr-FR" dirty="0"/>
+              <a:t>Compétences</a:t>
             </a:r>
             <a:r>
               <a:rPr lang="en-US" dirty="0"/>
-              <a:t> </a:t>
-            </a:r>
-            <a:r>
-              <a:rPr lang="en-US" dirty="0" err="1"/>
-              <a:t>Logiciels</a:t>
-            </a:r>
-            <a:endParaRPr lang="en-US" dirty="0"/>
+              <a:t> Data Analyst</a:t>
+            </a:r>
           </a:p>
         </p:txBody>
       </p:sp>
@@ -5031,61 +4951,80 @@
         </p:spPr>
         <p:txBody>
           <a:bodyPr>
-            <a:normAutofit fontScale="85000" lnSpcReduction="20000"/>
+            <a:normAutofit fontScale="55000" lnSpcReduction="20000"/>
           </a:bodyPr>
           <a:lstStyle/>
           <a:p>
             <a:r>
               <a:rPr lang="fr-FR" dirty="0"/>
-              <a:t>Les opérations logicielles comprennent des processus administratifs avec prise en charge du matériel et des logiciels.</a:t>
-            </a:r>
-          </a:p>
-          <a:p>
-            <a:r>
-              <a:rPr lang="fr-FR" dirty="0"/>
-              <a:t>Les rôles importants de l'équipe des opérations informatiques comprennent la gestion de la technologie, l'assurance qualité, la gestion de l'infrastructure et la confirmation que les produits finis répondent à tous les besoins et attentes du client.</a:t>
-            </a:r>
-          </a:p>
-          <a:p>
-            <a:r>
-              <a:rPr lang="fr-FR" dirty="0"/>
-              <a:t>Les principaux profils d'emploi dans les opérations sont les suivants:</a:t>
-            </a:r>
-          </a:p>
-          <a:p>
-            <a:pPr lvl="1"/>
-            <a:r>
-              <a:rPr lang="fr-FR" dirty="0"/>
-              <a:t>Administrateur de base de données</a:t>
-            </a:r>
-          </a:p>
-          <a:p>
-            <a:pPr lvl="1"/>
-            <a:r>
-              <a:rPr lang="fr-FR" dirty="0"/>
-              <a:t>Ingénieur réseau</a:t>
-            </a:r>
-          </a:p>
-          <a:p>
-            <a:pPr lvl="1"/>
-            <a:r>
-              <a:rPr lang="fr-FR" dirty="0"/>
-              <a:t>Ingénieur sécurité</a:t>
-            </a:r>
-          </a:p>
-          <a:p>
-            <a:pPr lvl="1"/>
-            <a:r>
-              <a:rPr lang="fr-FR" dirty="0"/>
-              <a:t>Ingénieur Cloud </a:t>
-            </a:r>
-            <a:endParaRPr lang="en-US" dirty="0"/>
-          </a:p>
-          <a:p>
-            <a:pPr lvl="1"/>
-            <a:endParaRPr lang="en-US" dirty="0"/>
-          </a:p>
-          <a:p>
+              <a:t>Élaborer des processus et des politiques de gestion des documents.</a:t>
+            </a:r>
+          </a:p>
+          <a:p>
+            <a:r>
+              <a:rPr lang="fr-FR" dirty="0"/>
+              <a:t>Identifiez les domaines pour augmenter l'efficacité et l'automatisation des processus.</a:t>
+            </a:r>
+          </a:p>
+          <a:p>
+            <a:r>
+              <a:rPr lang="fr-FR" dirty="0"/>
+              <a:t>Mettre en place et maintenir des processus de données automatisés.</a:t>
+            </a:r>
+          </a:p>
+          <a:p>
+            <a:r>
+              <a:rPr lang="fr-FR" dirty="0"/>
+              <a:t>Identifier, évaluer et mettre en œuvre des services et des outils externes pour soutenir la validation et le nettoyage des données.</a:t>
+            </a:r>
+          </a:p>
+          <a:p>
+            <a:r>
+              <a:rPr lang="fr-FR" dirty="0"/>
+              <a:t>Produire et suivre des indicateurs de performance clés.</a:t>
+            </a:r>
+          </a:p>
+          <a:p>
+            <a:r>
+              <a:rPr lang="fr-FR" dirty="0"/>
+              <a:t>Développer et soutenir les processus de reporting.</a:t>
+            </a:r>
+          </a:p>
+          <a:p>
+            <a:r>
+              <a:rPr lang="fr-FR" dirty="0"/>
+              <a:t>Surveiller et auditer la qualité des données.</a:t>
+            </a:r>
+          </a:p>
+          <a:p>
+            <a:r>
+              <a:rPr lang="fr-FR" dirty="0"/>
+              <a:t>Rassembler, comprendre et documenter les exigences commerciales détaillées à l'aide des outils et techniques appropriés.</a:t>
+            </a:r>
+          </a:p>
+          <a:p>
+            <a:r>
+              <a:rPr lang="fr-FR" dirty="0"/>
+              <a:t>Concevoir et réaliser des enquêtes et analyser les données d'enquête.</a:t>
+            </a:r>
+          </a:p>
+          <a:p>
+            <a:r>
+              <a:rPr lang="fr-FR" dirty="0"/>
+              <a:t>Créez des tableaux de bord de données, des graphiques et des visualisations.</a:t>
+            </a:r>
+          </a:p>
+          <a:p>
+            <a:r>
+              <a:rPr lang="fr-FR" dirty="0"/>
+              <a:t>Fournir une analyse comparative des secteurs et des concurrents.</a:t>
+            </a:r>
+          </a:p>
+          <a:p>
+            <a:r>
+              <a:rPr lang="fr-FR" dirty="0"/>
+              <a:t>Exploitez et analysez de grands ensembles de données, tirez des inférences valides et présentez-les avec succès à la direction à l'aide d'un outil de reporting.</a:t>
+            </a:r>
             <a:endParaRPr lang="en-US" dirty="0"/>
           </a:p>
         </p:txBody>
@@ -5171,22 +5110,13 @@
           <a:lstStyle/>
           <a:p>
             <a:r>
+              <a:rPr lang="fr-FR" dirty="0"/>
+              <a:t>Compétences</a:t>
+            </a:r>
+            <a:r>
               <a:rPr lang="en-US" dirty="0"/>
-              <a:t>Database Administrator/ </a:t>
-            </a:r>
-            <a:r>
-              <a:rPr lang="en-US" dirty="0" err="1"/>
-              <a:t>Ingénieur</a:t>
-            </a:r>
-            <a:r>
-              <a:rPr lang="en-US" dirty="0"/>
-              <a:t> Bases de </a:t>
-            </a:r>
-            <a:r>
-              <a:rPr lang="en-US" dirty="0" err="1"/>
-              <a:t>Données</a:t>
-            </a:r>
-            <a:endParaRPr lang="en-US" dirty="0"/>
+              <a:t> Technique Data Analyst</a:t>
+            </a:r>
           </a:p>
         </p:txBody>
       </p:sp>
@@ -5208,54 +5138,29 @@
         </p:spPr>
         <p:txBody>
           <a:bodyPr>
-            <a:normAutofit fontScale="92500"/>
+            <a:normAutofit/>
           </a:bodyPr>
           <a:lstStyle/>
           <a:p>
             <a:r>
               <a:rPr lang="fr-FR" dirty="0"/>
-              <a:t>Un administrateur de base de données est un professionnel qui maintient les performances, l'intégrité et la sécurité d'une base de données.</a:t>
-            </a:r>
-            <a:endParaRPr lang="en-US" dirty="0"/>
-          </a:p>
-          <a:p>
-            <a:r>
-              <a:rPr lang="fr-FR" dirty="0"/>
-              <a:t>Un DBA s'assurera que:</a:t>
-            </a:r>
-          </a:p>
-          <a:p>
-            <a:pPr lvl="1"/>
-            <a:r>
-              <a:rPr lang="fr-FR" dirty="0"/>
-              <a:t>Les données restent cohérentes dans toute la base de données.</a:t>
-            </a:r>
-          </a:p>
-          <a:p>
-            <a:pPr lvl="1"/>
-            <a:r>
-              <a:rPr lang="fr-FR" dirty="0"/>
-              <a:t>Les données sont clairement définies.</a:t>
-            </a:r>
-          </a:p>
-          <a:p>
-            <a:pPr lvl="1"/>
-            <a:r>
-              <a:rPr lang="fr-FR" dirty="0"/>
-              <a:t>Les utilisateurs accèdent aux données simultanément, sous une forme adaptée à leurs besoins.</a:t>
-            </a:r>
-          </a:p>
-          <a:p>
-            <a:pPr lvl="1"/>
-            <a:r>
-              <a:rPr lang="fr-FR" dirty="0"/>
-              <a:t>Il existe des dispositions pour la sécurité des données et le contrôle de la récupération (garantissant que toutes les données sont récupérables en cas d'urgence).</a:t>
-            </a:r>
-            <a:endParaRPr lang="en-US" dirty="0"/>
-          </a:p>
-          <a:p>
-            <a:pPr lvl="1"/>
-            <a:endParaRPr lang="en-US" dirty="0"/>
+              <a:t>Connaissance Hadoop et/ou Spark</a:t>
+            </a:r>
+          </a:p>
+          <a:p>
+            <a:r>
+              <a:rPr lang="fr-FR" dirty="0"/>
+              <a:t>Connaissance des langages informatiques</a:t>
+            </a:r>
+          </a:p>
+          <a:p>
+            <a:r>
+              <a:rPr lang="fr-FR" dirty="0"/>
+              <a:t>Connaissance des outils et méthodes statistiques</a:t>
+            </a:r>
+          </a:p>
+          <a:p>
+            <a:endParaRPr lang="fr-FR" dirty="0"/>
           </a:p>
           <a:p>
             <a:endParaRPr lang="en-US" dirty="0"/>
@@ -5265,7 +5170,7 @@
     </p:spTree>
     <p:extLst>
       <p:ext uri="{BB962C8B-B14F-4D97-AF65-F5344CB8AC3E}">
-        <p14:creationId xmlns:p14="http://schemas.microsoft.com/office/powerpoint/2010/main" val="1398404491"/>
+        <p14:creationId xmlns:p14="http://schemas.microsoft.com/office/powerpoint/2010/main" val="2388562069"/>
       </p:ext>
     </p:extLst>
   </p:cSld>
@@ -5343,12 +5248,12 @@
           <a:lstStyle/>
           <a:p>
             <a:r>
-              <a:rPr lang="en-US" dirty="0" err="1"/>
-              <a:t>Compétences</a:t>
+              <a:rPr lang="fr-FR" dirty="0"/>
+              <a:t>Profils</a:t>
             </a:r>
             <a:r>
               <a:rPr lang="en-US" dirty="0"/>
-              <a:t> d’un DBA</a:t>
+              <a:t> Data Analyst</a:t>
             </a:r>
           </a:p>
         </p:txBody>
@@ -5371,83 +5276,26 @@
         </p:spPr>
         <p:txBody>
           <a:bodyPr>
-            <a:normAutofit fontScale="55000" lnSpcReduction="20000"/>
+            <a:normAutofit/>
           </a:bodyPr>
           <a:lstStyle/>
           <a:p>
             <a:r>
               <a:rPr lang="fr-FR" dirty="0"/>
-              <a:t>Établir les besoins des utilisateurs et surveiller l'accès et la sécurité des utilisateurs.</a:t>
-            </a:r>
-          </a:p>
-          <a:p>
-            <a:r>
-              <a:rPr lang="fr-FR" dirty="0"/>
-              <a:t>Surveillez les performances et gérez les paramètres afin de fournir des réponses rapides aux utilisateurs frontaux.</a:t>
-            </a:r>
-          </a:p>
-          <a:p>
-            <a:r>
-              <a:rPr lang="fr-FR" dirty="0"/>
-              <a:t>Cartographiez la conception conceptuelle d'une base de données planifiée.</a:t>
-            </a:r>
-          </a:p>
-          <a:p>
-            <a:r>
-              <a:rPr lang="fr-FR" dirty="0"/>
-              <a:t>Installez et testez de nouvelles versions du système de gestion de base de données (SGBD).</a:t>
-            </a:r>
-          </a:p>
-          <a:p>
-            <a:r>
-              <a:rPr lang="fr-FR" dirty="0"/>
-              <a:t>Maintenir les normes de données, y compris le respect de la loi sur la protection des données.</a:t>
-            </a:r>
-          </a:p>
-          <a:p>
-            <a:r>
-              <a:rPr lang="fr-FR" dirty="0"/>
-              <a:t>Rédiger la documentation de la base de données, y compris les normes de données, les procédures et les définitions du dictionnaire de données (métadonnées).</a:t>
-            </a:r>
-          </a:p>
-          <a:p>
-            <a:r>
-              <a:rPr lang="fr-FR" dirty="0"/>
-              <a:t>Contrôlez les autorisations d'accès et les privilèges.</a:t>
-            </a:r>
-          </a:p>
-          <a:p>
-            <a:r>
-              <a:rPr lang="fr-FR" dirty="0"/>
-              <a:t>Gérez et testez les plans de sauvegarde et de récupération.</a:t>
-            </a:r>
-          </a:p>
-          <a:p>
-            <a:r>
-              <a:rPr lang="fr-FR" dirty="0"/>
-              <a:t>Assurez-vous que les procédures de stockage et d'archivage fonctionnent correctement.</a:t>
-            </a:r>
-          </a:p>
-          <a:p>
-            <a:r>
-              <a:rPr lang="fr-FR" dirty="0"/>
-              <a:t>Effectuer la planification des capacités.</a:t>
-            </a:r>
-          </a:p>
-          <a:p>
-            <a:r>
-              <a:rPr lang="fr-FR" dirty="0"/>
-              <a:t>Travailler en étroite collaboration avec les chefs de projets informatiques, les programmeurs de bases de données et les programmeurs multimédias.</a:t>
-            </a:r>
-            <a:endParaRPr lang="en-US" dirty="0"/>
-          </a:p>
-          <a:p>
-            <a:pPr lvl="1"/>
-            <a:endParaRPr lang="en-US" dirty="0"/>
-          </a:p>
-          <a:p>
-            <a:pPr lvl="1"/>
-            <a:endParaRPr lang="en-US" dirty="0"/>
+              <a:t>Le candidat au poste de Data Analyst doit suivre une formation d’ingénieur en informatique. </a:t>
+            </a:r>
+          </a:p>
+          <a:p>
+            <a:r>
+              <a:rPr lang="fr-FR" dirty="0"/>
+              <a:t>Il lui est aussi conseillé d’intégrer une formation afin d’obtenir un master en marketing ou en statistiques. </a:t>
+            </a:r>
+          </a:p>
+          <a:p>
+            <a:r>
+              <a:rPr lang="fr-FR" dirty="0"/>
+              <a:t>La maîtrise de l’anglais et l’aisance rédactionnelle sont des qualités fortement appréciées des recruteurs. </a:t>
+            </a:r>
           </a:p>
           <a:p>
             <a:endParaRPr lang="en-US" dirty="0"/>
@@ -5457,7 +5305,7 @@
     </p:spTree>
     <p:extLst>
       <p:ext uri="{BB962C8B-B14F-4D97-AF65-F5344CB8AC3E}">
-        <p14:creationId xmlns:p14="http://schemas.microsoft.com/office/powerpoint/2010/main" val="1398404491"/>
+        <p14:creationId xmlns:p14="http://schemas.microsoft.com/office/powerpoint/2010/main" val="4079878329"/>
       </p:ext>
     </p:extLst>
   </p:cSld>
@@ -5537,18 +5385,13 @@
           <a:lstStyle/>
           <a:p>
             <a:r>
-              <a:rPr lang="en-US" sz="3600" dirty="0" err="1">
+              <a:rPr lang="en-US" sz="3600" dirty="0">
                 <a:solidFill>
                   <a:schemeClr val="bg1"/>
                 </a:solidFill>
               </a:rPr>
-              <a:t>Contenu</a:t>
-            </a:r>
-            <a:endParaRPr lang="en-US" sz="3600" dirty="0">
-              <a:solidFill>
-                <a:schemeClr val="bg1"/>
-              </a:solidFill>
-            </a:endParaRPr>
+              <a:t>Table des Matières</a:t>
+            </a:r>
           </a:p>
         </p:txBody>
       </p:sp>
@@ -5653,21 +5496,30 @@
               <a:buChar char="§"/>
             </a:pPr>
             <a:r>
-              <a:rPr lang="en-US" sz="1200" dirty="0" err="1"/>
+              <a:rPr lang="en-US" sz="1200" dirty="0" err="1">
+                <a:hlinkClick r:id="rId3" action="ppaction://hlinksldjump"/>
+              </a:rPr>
               <a:t>Ingénieur</a:t>
             </a:r>
             <a:r>
-              <a:rPr lang="en-US" sz="1200" dirty="0"/>
+              <a:rPr lang="en-US" sz="1200" dirty="0">
+                <a:hlinkClick r:id="rId3" action="ppaction://hlinksldjump"/>
+              </a:rPr>
               <a:t> </a:t>
             </a:r>
             <a:r>
-              <a:rPr lang="en-US" sz="1200" dirty="0" err="1"/>
+              <a:rPr lang="en-US" sz="1200" dirty="0" err="1">
+                <a:hlinkClick r:id="rId3" action="ppaction://hlinksldjump"/>
+              </a:rPr>
               <a:t>Développement</a:t>
             </a:r>
             <a:r>
-              <a:rPr lang="en-US" sz="1200" dirty="0"/>
+              <a:rPr lang="en-US" sz="1200" dirty="0">
+                <a:hlinkClick r:id="rId3" action="ppaction://hlinksldjump"/>
+              </a:rPr>
               <a:t> Application/Web Developer</a:t>
             </a:r>
+            <a:endParaRPr lang="en-US" sz="1200" dirty="0"/>
           </a:p>
           <a:p>
             <a:pPr lvl="2">
@@ -5675,13 +5527,18 @@
               <a:buChar char="§"/>
             </a:pPr>
             <a:r>
-              <a:rPr lang="en-US" sz="1200" dirty="0" err="1"/>
+              <a:rPr lang="en-US" sz="1200" dirty="0" err="1">
+                <a:hlinkClick r:id="rId4" action="ppaction://hlinksldjump"/>
+              </a:rPr>
               <a:t>Architecte</a:t>
             </a:r>
             <a:r>
-              <a:rPr lang="en-US" sz="1200" dirty="0"/>
+              <a:rPr lang="en-US" sz="1200" dirty="0">
+                <a:hlinkClick r:id="rId4" action="ppaction://hlinksldjump"/>
+              </a:rPr>
               <a:t> Application</a:t>
             </a:r>
+            <a:endParaRPr lang="en-US" sz="1200" dirty="0"/>
           </a:p>
           <a:p>
             <a:pPr lvl="2">
@@ -5689,9 +5546,18 @@
               <a:buChar char="§"/>
             </a:pPr>
             <a:r>
-              <a:rPr lang="en-US" sz="1200" dirty="0"/>
-              <a:t>Data Analyst/Scientist/Engineer</a:t>
-            </a:r>
+              <a:rPr lang="en-US" sz="1200" dirty="0" err="1">
+                <a:hlinkClick r:id="rId5" action="ppaction://hlinksldjump"/>
+              </a:rPr>
+              <a:t>Ingénieur</a:t>
+            </a:r>
+            <a:r>
+              <a:rPr lang="en-US" sz="1200" dirty="0">
+                <a:hlinkClick r:id="rId5" action="ppaction://hlinksldjump"/>
+              </a:rPr>
+              <a:t> Data Analyst/Scientist</a:t>
+            </a:r>
+            <a:endParaRPr lang="en-US" sz="1200" dirty="0"/>
           </a:p>
           <a:p>
             <a:pPr lvl="2">
@@ -5699,13 +5565,24 @@
               <a:buChar char="§"/>
             </a:pPr>
             <a:r>
-              <a:rPr lang="en-US" sz="1200" dirty="0" err="1"/>
+              <a:rPr lang="en-US" sz="1200" dirty="0" err="1">
+                <a:hlinkClick r:id="rId6" action="ppaction://hlinksldjump"/>
+              </a:rPr>
               <a:t>Ingénieur</a:t>
             </a:r>
             <a:r>
-              <a:rPr lang="en-US" sz="1200" dirty="0"/>
-              <a:t> Tester</a:t>
-            </a:r>
+              <a:rPr lang="en-US" sz="1200" dirty="0">
+                <a:hlinkClick r:id="rId6" action="ppaction://hlinksldjump"/>
+              </a:rPr>
+              <a:t> </a:t>
+            </a:r>
+            <a:r>
+              <a:rPr lang="en-US" sz="1200" dirty="0" err="1">
+                <a:hlinkClick r:id="rId6" action="ppaction://hlinksldjump"/>
+              </a:rPr>
+              <a:t>Testeur</a:t>
+            </a:r>
+            <a:endParaRPr lang="en-US" sz="1200" dirty="0"/>
           </a:p>
           <a:p>
             <a:pPr lvl="2">
@@ -5732,7 +5609,7 @@
         <p:spPr>
           <a:xfrm>
             <a:off x="6090249" y="3640347"/>
-            <a:ext cx="5727940" cy="1015663"/>
+            <a:ext cx="5727940" cy="1200329"/>
           </a:xfrm>
           <a:prstGeom prst="rect">
             <a:avLst/>
@@ -5760,16 +5637,22 @@
               <a:buChar char="§"/>
             </a:pPr>
             <a:r>
-              <a:rPr lang="en-US" sz="1200" dirty="0" err="1"/>
+              <a:rPr lang="en-US" sz="1200" dirty="0" err="1">
+                <a:hlinkClick r:id="rId7" action="ppaction://hlinksldjump"/>
+              </a:rPr>
               <a:t>Administrateur</a:t>
             </a:r>
             <a:r>
-              <a:rPr lang="en-US" sz="1200" dirty="0"/>
-              <a:t> </a:t>
-            </a:r>
-            <a:r>
-              <a:rPr lang="en-US" sz="1200" dirty="0" err="1"/>
-              <a:t>Réseaur</a:t>
+              <a:rPr lang="en-US" sz="1200" dirty="0">
+                <a:hlinkClick r:id="rId7" action="ppaction://hlinksldjump"/>
+              </a:rPr>
+              <a:t> Base de </a:t>
+            </a:r>
+            <a:r>
+              <a:rPr lang="en-US" sz="1200" dirty="0" err="1">
+                <a:hlinkClick r:id="rId7" action="ppaction://hlinksldjump"/>
+              </a:rPr>
+              <a:t>Données</a:t>
             </a:r>
             <a:endParaRPr lang="en-US" sz="1200" dirty="0"/>
           </a:p>
@@ -5779,15 +5662,21 @@
               <a:buChar char="§"/>
             </a:pPr>
             <a:r>
-              <a:rPr lang="en-US" sz="1200" dirty="0" err="1"/>
+              <a:rPr lang="en-US" sz="1200" dirty="0" err="1">
+                <a:hlinkClick r:id="rId8" action="ppaction://hlinksldjump"/>
+              </a:rPr>
               <a:t>Ingénieur</a:t>
             </a:r>
             <a:r>
-              <a:rPr lang="en-US" sz="1200" dirty="0"/>
+              <a:rPr lang="en-US" sz="1200" dirty="0">
+                <a:hlinkClick r:id="rId8" action="ppaction://hlinksldjump"/>
+              </a:rPr>
               <a:t> </a:t>
             </a:r>
             <a:r>
-              <a:rPr lang="en-US" sz="1200" dirty="0" err="1"/>
+              <a:rPr lang="en-US" sz="1200" dirty="0" err="1">
+                <a:hlinkClick r:id="rId8" action="ppaction://hlinksldjump"/>
+              </a:rPr>
               <a:t>Réseau</a:t>
             </a:r>
             <a:endParaRPr lang="en-US" sz="1200" dirty="0"/>
@@ -5798,15 +5687,21 @@
               <a:buChar char="§"/>
             </a:pPr>
             <a:r>
-              <a:rPr lang="en-US" sz="1200" dirty="0" err="1"/>
+              <a:rPr lang="en-US" sz="1200" dirty="0" err="1">
+                <a:hlinkClick r:id="rId9" action="ppaction://hlinksldjump"/>
+              </a:rPr>
               <a:t>Ingénieur</a:t>
             </a:r>
             <a:r>
-              <a:rPr lang="en-US" sz="1200" dirty="0"/>
+              <a:rPr lang="en-US" sz="1200" dirty="0">
+                <a:hlinkClick r:id="rId9" action="ppaction://hlinksldjump"/>
+              </a:rPr>
               <a:t> </a:t>
             </a:r>
             <a:r>
-              <a:rPr lang="en-US" sz="1200" dirty="0" err="1"/>
+              <a:rPr lang="en-US" sz="1200" dirty="0" err="1">
+                <a:hlinkClick r:id="rId9" action="ppaction://hlinksldjump"/>
+              </a:rPr>
               <a:t>Sécurité</a:t>
             </a:r>
             <a:endParaRPr lang="en-US" sz="1200" dirty="0"/>
@@ -5817,13 +5712,43 @@
               <a:buChar char="§"/>
             </a:pPr>
             <a:r>
-              <a:rPr lang="en-US" sz="1200" dirty="0" err="1"/>
+              <a:rPr lang="en-US" sz="1200" dirty="0" err="1">
+                <a:hlinkClick r:id="rId10" action="ppaction://hlinksldjump"/>
+              </a:rPr>
               <a:t>Ingénieur</a:t>
             </a:r>
             <a:r>
-              <a:rPr lang="en-US" sz="1200" dirty="0"/>
+              <a:rPr lang="en-US" sz="1200" dirty="0">
+                <a:hlinkClick r:id="rId10" action="ppaction://hlinksldjump"/>
+              </a:rPr>
               <a:t> Cloud</a:t>
             </a:r>
+            <a:endParaRPr lang="en-US" sz="1200" dirty="0"/>
+          </a:p>
+          <a:p>
+            <a:pPr lvl="2">
+              <a:buFont typeface="Wingdings" pitchFamily="2" charset="2"/>
+              <a:buChar char="§"/>
+            </a:pPr>
+            <a:r>
+              <a:rPr lang="en-US" sz="1200" dirty="0" err="1">
+                <a:hlinkClick r:id="rId11" action="ppaction://hlinksldjump"/>
+              </a:rPr>
+              <a:t>Ingénieur</a:t>
+            </a:r>
+            <a:r>
+              <a:rPr lang="en-US" sz="1200" dirty="0">
+                <a:hlinkClick r:id="rId11" action="ppaction://hlinksldjump"/>
+              </a:rPr>
+              <a:t> </a:t>
+            </a:r>
+            <a:r>
+              <a:rPr lang="en-US" sz="1200" dirty="0" err="1">
+                <a:hlinkClick r:id="rId11" action="ppaction://hlinksldjump"/>
+              </a:rPr>
+              <a:t>Système</a:t>
+            </a:r>
+            <a:endParaRPr lang="en-US" sz="1200" dirty="0"/>
           </a:p>
         </p:txBody>
       </p:sp>
@@ -5865,13 +5790,18 @@
               <a:buChar char="§"/>
             </a:pPr>
             <a:r>
-              <a:rPr lang="en-US" sz="1200" dirty="0" err="1"/>
+              <a:rPr lang="en-US" sz="1200" dirty="0" err="1">
+                <a:hlinkClick r:id="rId12" action="ppaction://hlinksldjump"/>
+              </a:rPr>
               <a:t>Ingénieur</a:t>
             </a:r>
             <a:r>
-              <a:rPr lang="en-US" sz="1200" dirty="0"/>
+              <a:rPr lang="en-US" sz="1200" dirty="0">
+                <a:hlinkClick r:id="rId12" action="ppaction://hlinksldjump"/>
+              </a:rPr>
               <a:t> DevOps</a:t>
             </a:r>
+            <a:endParaRPr lang="en-US" sz="1200" dirty="0"/>
           </a:p>
         </p:txBody>
       </p:sp>
@@ -5927,7 +5857,7 @@
         </p:blipFill>
         <p:spPr>
           <a:xfrm>
-            <a:off x="0" y="0"/>
+            <a:off x="0" y="-347241"/>
             <a:ext cx="12192000" cy="6858000"/>
           </a:xfrm>
           <a:prstGeom prst="rect">
@@ -5956,18 +5886,13 @@
           <a:lstStyle/>
           <a:p>
             <a:r>
-              <a:rPr lang="en-US" dirty="0" err="1"/>
-              <a:t>Ingénieur</a:t>
+              <a:rPr lang="fr-FR" dirty="0"/>
+              <a:t>Compétence</a:t>
             </a:r>
             <a:r>
               <a:rPr lang="en-US" dirty="0"/>
-              <a:t> </a:t>
-            </a:r>
-            <a:r>
-              <a:rPr lang="en-US" dirty="0" err="1"/>
-              <a:t>Réseau</a:t>
-            </a:r>
-            <a:endParaRPr lang="en-US" dirty="0"/>
+              <a:t> d’un Data Scientist</a:t>
+            </a:r>
           </a:p>
         </p:txBody>
       </p:sp>
@@ -5989,24 +5914,64 @@
         </p:spPr>
         <p:txBody>
           <a:bodyPr>
-            <a:normAutofit/>
+            <a:normAutofit fontScale="85000" lnSpcReduction="10000"/>
           </a:bodyPr>
           <a:lstStyle/>
           <a:p>
             <a:r>
               <a:rPr lang="fr-FR" dirty="0"/>
-              <a:t>Un ingénieur réseau est un professionnel responsable de la mise en place, du développement et de la maintenance des réseaux informatiques au sein d'une organisation ou entre organisations.</a:t>
-            </a:r>
-          </a:p>
-          <a:p>
-            <a:r>
-              <a:rPr lang="fr-FR" dirty="0"/>
-              <a:t>Garantit l'intégrité de l'infrastructure réseau haute disponibilité pour fournir des performances maximales à vos utilisateurs, y compris des réseaux tels que la voix et le pare-feu.</a:t>
-            </a:r>
-            <a:endParaRPr lang="en-US" dirty="0"/>
-          </a:p>
-          <a:p>
-            <a:endParaRPr lang="en-US" dirty="0"/>
+              <a:t>A la connaissance de l'activité et du fonctionnement de l'entreprise ou de l'organisation qui l'emploie.</a:t>
+            </a:r>
+          </a:p>
+          <a:p>
+            <a:r>
+              <a:rPr lang="fr-FR" dirty="0"/>
+              <a:t>Il est à l'aise avec les techniques du data </a:t>
+            </a:r>
+            <a:r>
+              <a:rPr lang="fr-FR" dirty="0" err="1"/>
+              <a:t>mining</a:t>
+            </a:r>
+            <a:r>
+              <a:rPr lang="fr-FR" dirty="0"/>
+              <a:t> (exploration des données), les outils mathématiques statistiques et informatiques (IA).</a:t>
+            </a:r>
+          </a:p>
+          <a:p>
+            <a:r>
+              <a:rPr lang="fr-FR" b="0" i="0" dirty="0">
+                <a:solidFill>
+                  <a:srgbClr val="182642"/>
+                </a:solidFill>
+                <a:effectLst/>
+                <a:latin typeface="Lato"/>
+              </a:rPr>
+              <a:t>Il maîtrise les méthodes et normes de conception.</a:t>
+            </a:r>
+          </a:p>
+          <a:p>
+            <a:r>
+              <a:rPr lang="fr-FR" b="0" i="0" dirty="0">
+                <a:solidFill>
+                  <a:srgbClr val="182642"/>
+                </a:solidFill>
+                <a:effectLst/>
+                <a:latin typeface="Lato"/>
+              </a:rPr>
+              <a:t>Il a la connaissance des systèmes de gestion de bases de données relationnelles ou non capables de gérer de grosses quantités de données.</a:t>
+            </a:r>
+          </a:p>
+          <a:p>
+            <a:r>
+              <a:rPr lang="fr-FR" b="0" i="0" dirty="0">
+                <a:solidFill>
+                  <a:srgbClr val="182642"/>
+                </a:solidFill>
+                <a:effectLst/>
+                <a:latin typeface="Lato"/>
+              </a:rPr>
+              <a:t>Le data scientist a un bon sens du business et s'intéresse aux techniques de marketing</a:t>
+            </a:r>
           </a:p>
         </p:txBody>
       </p:sp>
@@ -6092,25 +6057,12 @@
           <a:p>
             <a:r>
               <a:rPr lang="en-US" dirty="0" err="1"/>
-              <a:t>Compétence</a:t>
+              <a:t>Ingénieur</a:t>
             </a:r>
             <a:r>
               <a:rPr lang="en-US" dirty="0"/>
-              <a:t> d’un </a:t>
-            </a:r>
-            <a:r>
-              <a:rPr lang="en-US" dirty="0" err="1"/>
-              <a:t>Ingénieur</a:t>
-            </a:r>
-            <a:r>
-              <a:rPr lang="en-US" dirty="0"/>
-              <a:t> </a:t>
-            </a:r>
-            <a:r>
-              <a:rPr lang="en-US" dirty="0" err="1"/>
-              <a:t>Réseau</a:t>
-            </a:r>
-            <a:endParaRPr lang="en-US" dirty="0"/>
+              <a:t> Tests et Validation</a:t>
+            </a:r>
           </a:p>
         </p:txBody>
       </p:sp>
@@ -6126,81 +6078,169 @@
         </p:nvSpPr>
         <p:spPr>
           <a:xfrm>
-            <a:off x="4063042" y="1825625"/>
-            <a:ext cx="7290758" cy="4747703"/>
+            <a:off x="4063042" y="1690688"/>
+            <a:ext cx="7290758" cy="4351338"/>
           </a:xfrm>
         </p:spPr>
         <p:txBody>
           <a:bodyPr>
-            <a:normAutofit fontScale="47500" lnSpcReduction="20000"/>
+            <a:noAutofit/>
           </a:bodyPr>
           <a:lstStyle/>
           <a:p>
-            <a:r>
-              <a:rPr lang="fr-FR" dirty="0"/>
-              <a:t>Établir l'environnement réseau en concevant la configuration du système, en dirigeant l'installation du système et en définissant, documentant et appliquant les normes du système.</a:t>
-            </a:r>
-          </a:p>
-          <a:p>
-            <a:r>
-              <a:rPr lang="fr-FR" dirty="0"/>
-              <a:t>Optimisez les performances du réseau en surveillant les performances, en résolvant les problèmes et les pannes de réseau, en planifiant les mises à niveau et en collaborant avec les architectes réseau sur l'optimisation du réseau.</a:t>
-            </a:r>
-          </a:p>
-          <a:p>
-            <a:r>
-              <a:rPr lang="fr-FR" dirty="0"/>
-              <a:t>Entreprendre des enquêtes sur les pannes du réseau de données dans des environnements locaux et étendus à l'aide d'informations provenant de plusieurs sources.</a:t>
-            </a:r>
-          </a:p>
-          <a:p>
-            <a:r>
-              <a:rPr lang="fr-FR" dirty="0"/>
-              <a:t>Sécurisez les systèmes de réseau en établissant et en appliquant des politiques, et en définissant et en surveillant l'accès.</a:t>
-            </a:r>
-          </a:p>
-          <a:p>
-            <a:r>
-              <a:rPr lang="fr-FR" dirty="0"/>
-              <a:t>Soutenir et administrer les environnements de pare-feu conformément à la politique de sécurité informatique.</a:t>
-            </a:r>
-          </a:p>
-          <a:p>
-            <a:r>
-              <a:rPr lang="fr-FR" dirty="0"/>
-              <a:t>Signaler l'état opérationnel du réseau en collectant et en hiérarchisant les informations et en gérant les projets.</a:t>
-            </a:r>
-          </a:p>
-          <a:p>
-            <a:r>
-              <a:rPr lang="fr-FR" dirty="0"/>
-              <a:t>Mettez à niveau l'équipement de réseau de données vers les dernières versions de micrologiciel stables.</a:t>
-            </a:r>
-          </a:p>
-          <a:p>
-            <a:r>
-              <a:rPr lang="fr-FR" dirty="0"/>
-              <a:t>Configurez les équipements de routage et de commutation, les services vocaux IP hébergés et les pare-feu.</a:t>
-            </a:r>
-          </a:p>
-          <a:p>
-            <a:r>
-              <a:rPr lang="fr-FR" dirty="0"/>
-              <a:t>Fournir une assistance à distance aux ingénieurs sur site et aux utilisateurs finaux / clients pendant l'installation.</a:t>
-            </a:r>
-          </a:p>
-          <a:p>
-            <a:r>
-              <a:rPr lang="fr-FR" dirty="0"/>
-              <a:t>Fournir un dépannage et une recherche de pannes à distance si des problèmes surviennent lors de l'installation initiale.</a:t>
-            </a:r>
-          </a:p>
-          <a:p>
-            <a:r>
-              <a:rPr lang="fr-FR" dirty="0"/>
-              <a:t>Entreprendre la gestion de la capacité et l'audit de l'adressage IP et des appareils hébergés dans les centres de données. </a:t>
-            </a:r>
-            <a:endParaRPr lang="en-US" dirty="0"/>
+            <a:pPr>
+              <a:lnSpc>
+                <a:spcPct val="120000"/>
+              </a:lnSpc>
+            </a:pPr>
+            <a:r>
+              <a:rPr lang="fr-FR" sz="1400" dirty="0"/>
+              <a:t>L’ ingénieur test et validation a pour rôle de valider intégralement des logiciels ou des applications avant leur mise en ligne sur des environnements clients.</a:t>
+            </a:r>
+            <a:endParaRPr lang="en-US" sz="1400" dirty="0"/>
+          </a:p>
+          <a:p>
+            <a:r>
+              <a:rPr lang="fr-FR" sz="1400" dirty="0"/>
+              <a:t>Un testeur doit être bien informé dans divers types de tests fonctionnels tels que: </a:t>
+            </a:r>
+            <a:endParaRPr lang="en-US" sz="1400" dirty="0"/>
+          </a:p>
+          <a:p>
+            <a:pPr lvl="1"/>
+            <a:r>
+              <a:rPr lang="en-US" sz="1400" dirty="0"/>
+              <a:t>Tests </a:t>
+            </a:r>
+            <a:r>
+              <a:rPr lang="en-US" sz="1400" dirty="0" err="1"/>
+              <a:t>Unitaires</a:t>
+            </a:r>
+            <a:endParaRPr lang="en-US" sz="1400" dirty="0"/>
+          </a:p>
+          <a:p>
+            <a:pPr lvl="1"/>
+            <a:r>
+              <a:rPr lang="en-US" sz="1400" dirty="0"/>
+              <a:t>Tests </a:t>
+            </a:r>
+            <a:r>
+              <a:rPr lang="en-US" sz="1400" dirty="0" err="1"/>
+              <a:t>d’intégration</a:t>
+            </a:r>
+            <a:endParaRPr lang="en-US" sz="1400" dirty="0"/>
+          </a:p>
+          <a:p>
+            <a:pPr lvl="1"/>
+            <a:r>
+              <a:rPr lang="en-US" sz="1400" dirty="0"/>
+              <a:t>Test </a:t>
+            </a:r>
+            <a:r>
+              <a:rPr lang="en-US" sz="1400" dirty="0" err="1"/>
+              <a:t>système</a:t>
+            </a:r>
+            <a:endParaRPr lang="en-US" sz="1400" dirty="0"/>
+          </a:p>
+          <a:p>
+            <a:pPr lvl="1"/>
+            <a:r>
+              <a:rPr lang="en-US" sz="1400" dirty="0"/>
+              <a:t>Tests de non </a:t>
+            </a:r>
+            <a:r>
+              <a:rPr lang="en-US" sz="1400" dirty="0" err="1"/>
+              <a:t>régression</a:t>
+            </a:r>
+            <a:endParaRPr lang="en-US" sz="1400" dirty="0"/>
+          </a:p>
+          <a:p>
+            <a:r>
+              <a:rPr lang="en-US" sz="1400" dirty="0"/>
+              <a:t>Et tests non </a:t>
+            </a:r>
+            <a:r>
+              <a:rPr lang="en-US" sz="1400" dirty="0" err="1"/>
+              <a:t>fonctionnels</a:t>
+            </a:r>
+            <a:r>
+              <a:rPr lang="en-US" sz="1400" dirty="0"/>
+              <a:t>:</a:t>
+            </a:r>
+          </a:p>
+          <a:p>
+            <a:pPr lvl="1"/>
+            <a:r>
+              <a:rPr lang="en-US" sz="1400" dirty="0"/>
+              <a:t>Tests de performance</a:t>
+            </a:r>
+          </a:p>
+          <a:p>
+            <a:pPr lvl="1"/>
+            <a:r>
+              <a:rPr lang="en-US" sz="1400" dirty="0"/>
+              <a:t>Tests de </a:t>
+            </a:r>
+            <a:r>
+              <a:rPr lang="en-US" sz="1400" dirty="0" err="1"/>
+              <a:t>chargement</a:t>
+            </a:r>
+            <a:endParaRPr lang="en-US" sz="1400" dirty="0"/>
+          </a:p>
+          <a:p>
+            <a:pPr lvl="1"/>
+            <a:r>
+              <a:rPr lang="en-US" sz="1400" dirty="0"/>
+              <a:t>Tests de stress </a:t>
+            </a:r>
+          </a:p>
+          <a:p>
+            <a:pPr lvl="1"/>
+            <a:r>
+              <a:rPr lang="en-US" sz="1400" dirty="0"/>
+              <a:t>Tests de </a:t>
+            </a:r>
+            <a:r>
+              <a:rPr lang="en-US" sz="1400" dirty="0" err="1"/>
+              <a:t>sécurité</a:t>
+            </a:r>
+            <a:endParaRPr lang="en-US" sz="1400" dirty="0"/>
+          </a:p>
+          <a:p>
+            <a:pPr lvl="1"/>
+            <a:r>
+              <a:rPr lang="en-US" sz="1400" dirty="0"/>
+              <a:t>Tests de </a:t>
+            </a:r>
+            <a:r>
+              <a:rPr lang="en-US" sz="1400" dirty="0" err="1"/>
+              <a:t>compatibilité</a:t>
+            </a:r>
+            <a:endParaRPr lang="en-US" sz="1400" dirty="0"/>
+          </a:p>
+          <a:p>
+            <a:pPr lvl="1"/>
+            <a:r>
+              <a:rPr lang="en-US" sz="1400" dirty="0"/>
+              <a:t>Tests </a:t>
+            </a:r>
+            <a:r>
+              <a:rPr lang="en-US" sz="1400" dirty="0" err="1"/>
+              <a:t>utilisateurs</a:t>
+            </a:r>
+            <a:endParaRPr lang="en-US" sz="1400" dirty="0"/>
+          </a:p>
+          <a:p>
+            <a:pPr lvl="1"/>
+            <a:r>
+              <a:rPr lang="en-US" sz="1400" dirty="0"/>
+              <a:t>Tests </a:t>
+            </a:r>
+            <a:r>
+              <a:rPr lang="en-US" sz="1400" dirty="0" err="1"/>
+              <a:t>conformités</a:t>
+            </a:r>
+            <a:endParaRPr lang="en-US" sz="1400" dirty="0"/>
           </a:p>
         </p:txBody>
       </p:sp>
@@ -6286,17 +6326,20 @@
           <a:p>
             <a:r>
               <a:rPr lang="en-US" dirty="0" err="1"/>
+              <a:t>Compétences</a:t>
+            </a:r>
+            <a:r>
+              <a:rPr lang="en-US" dirty="0"/>
+              <a:t> d’un </a:t>
+            </a:r>
+            <a:r>
+              <a:rPr lang="en-US" dirty="0" err="1"/>
               <a:t>Ingénieur</a:t>
             </a:r>
             <a:r>
               <a:rPr lang="en-US" dirty="0"/>
-              <a:t> </a:t>
-            </a:r>
-            <a:r>
-              <a:rPr lang="en-US" dirty="0" err="1"/>
-              <a:t>Sécurité</a:t>
-            </a:r>
-            <a:endParaRPr lang="en-US" dirty="0"/>
+              <a:t> Tests et Validation </a:t>
+            </a:r>
           </a:p>
         </p:txBody>
       </p:sp>
@@ -6318,23 +6361,44 @@
         </p:spPr>
         <p:txBody>
           <a:bodyPr>
-            <a:normAutofit lnSpcReduction="10000"/>
+            <a:normAutofit fontScale="85000" lnSpcReduction="10000"/>
           </a:bodyPr>
           <a:lstStyle/>
           <a:p>
             <a:r>
               <a:rPr lang="fr-FR" dirty="0"/>
-              <a:t>Un ingénieur en cybersécurité est un professionnel chargé de protéger l'infrastructure informatique (y compris les réseaux, le matériel et les logiciels) contre une gamme d'activités criminelles.</a:t>
-            </a:r>
-          </a:p>
-          <a:p>
-            <a:r>
-              <a:rPr lang="fr-FR" dirty="0"/>
-              <a:t>Surveillez les réseaux et les systèmes, détectez les menaces de sécurité (`` événements ''), analysez et évaluez les alarmes et signalez les menaces, les tentatives d'intrusion et les fausses alarmes, en les résolvant ou en les augmentant, selon la gravité. </a:t>
-            </a:r>
-            <a:endParaRPr lang="en-US" dirty="0"/>
-          </a:p>
-          <a:p>
+              <a:t>Prendre connaissance de manière exhaustive de la spécification produit</a:t>
+            </a:r>
+          </a:p>
+          <a:p>
+            <a:r>
+              <a:rPr lang="fr-FR" dirty="0"/>
+              <a:t>Créer une batterie de tests correspondant à tous les points de la spécification à valider</a:t>
+            </a:r>
+          </a:p>
+          <a:p>
+            <a:r>
+              <a:rPr lang="fr-FR" dirty="0"/>
+              <a:t>Exécuter la batterie de tests jusqu’à ce que le produit donne satisfaction au vu des normes de test imposées</a:t>
+            </a:r>
+          </a:p>
+          <a:p>
+            <a:r>
+              <a:rPr lang="fr-FR" dirty="0"/>
+              <a:t>Réaliser un reporting précis</a:t>
+            </a:r>
+          </a:p>
+          <a:p>
+            <a:r>
+              <a:rPr lang="fr-FR" dirty="0"/>
+              <a:t>Livrer le logiciel validé au demandeur</a:t>
+            </a:r>
+          </a:p>
+          <a:p>
+            <a:r>
+              <a:rPr lang="fr-FR" dirty="0"/>
+              <a:t>Potentiellement poursuivre la surveillance des performances du logiciel via un monitoring quotidien : les scripts de validation continuent à tourner, mais ils sont devenus des scripts de non-régression</a:t>
+            </a:r>
             <a:endParaRPr lang="en-US" dirty="0"/>
           </a:p>
         </p:txBody>
@@ -6421,25 +6485,20 @@
           <a:p>
             <a:r>
               <a:rPr lang="en-US" dirty="0" err="1"/>
-              <a:t>Compétence</a:t>
+              <a:t>Compétences</a:t>
             </a:r>
             <a:r>
               <a:rPr lang="en-US" dirty="0"/>
-              <a:t> d’un </a:t>
+              <a:t> Technique d’un </a:t>
             </a:r>
             <a:r>
               <a:rPr lang="en-US" dirty="0" err="1"/>
-              <a:t>ingénieur</a:t>
+              <a:t>Ingénieur</a:t>
             </a:r>
             <a:r>
               <a:rPr lang="en-US" dirty="0"/>
-              <a:t> </a:t>
-            </a:r>
-            <a:r>
-              <a:rPr lang="en-US" dirty="0" err="1"/>
-              <a:t>Sécurité</a:t>
-            </a:r>
-            <a:endParaRPr lang="en-US" dirty="0"/>
+              <a:t> Tests et Validation </a:t>
+            </a:r>
           </a:p>
         </p:txBody>
       </p:sp>
@@ -6456,78 +6515,42 @@
         <p:spPr>
           <a:xfrm>
             <a:off x="4063042" y="1825625"/>
-            <a:ext cx="7290758" cy="4557921"/>
+            <a:ext cx="7290758" cy="4351338"/>
           </a:xfrm>
         </p:spPr>
         <p:txBody>
           <a:bodyPr>
-            <a:normAutofit fontScale="55000" lnSpcReduction="20000"/>
+            <a:normAutofit fontScale="92500" lnSpcReduction="20000"/>
           </a:bodyPr>
           <a:lstStyle/>
           <a:p>
             <a:r>
               <a:rPr lang="fr-FR" dirty="0"/>
-              <a:t>Se tenir au courant des derniers développements en matière de sécurité et de technologie.</a:t>
-            </a:r>
-          </a:p>
-          <a:p>
-            <a:r>
-              <a:rPr lang="fr-FR" dirty="0"/>
-              <a:t>Rechercher / évaluer les menaces de cybersécurité émergentes et les moyens de les gérer.</a:t>
-            </a:r>
-          </a:p>
-          <a:p>
-            <a:r>
-              <a:rPr lang="fr-FR" dirty="0"/>
-              <a:t>Planifiez la reprise après sinistre et créez des plans d'urgence en cas de faille de sécurité.</a:t>
-            </a:r>
-          </a:p>
-          <a:p>
-            <a:r>
-              <a:rPr lang="fr-FR" dirty="0"/>
-              <a:t>Surveillez les attaques, intrusions et activités inhabituelles, non autorisées ou illégales.</a:t>
-            </a:r>
-          </a:p>
-          <a:p>
-            <a:r>
-              <a:rPr lang="fr-FR" dirty="0"/>
-              <a:t>Utilisez des outils d'analyse avancés pour déterminer les modèles de menaces et les vulnérabilités émergentes.</a:t>
-            </a:r>
-          </a:p>
-          <a:p>
-            <a:r>
-              <a:rPr lang="fr-FR" dirty="0"/>
-              <a:t>Participez au «piratage éthique», par exemple en simulant des failles de sécurité.</a:t>
-            </a:r>
-          </a:p>
-          <a:p>
-            <a:r>
-              <a:rPr lang="fr-FR" dirty="0"/>
-              <a:t>Identifiez les faiblesses potentielles et mettez en œuvre des mesures, telles que les pare-feu et le chiffrement.</a:t>
-            </a:r>
-          </a:p>
-          <a:p>
-            <a:r>
-              <a:rPr lang="fr-FR" dirty="0"/>
-              <a:t>Examinez les alertes de sécurité et fournissez une réponse aux incidents.</a:t>
-            </a:r>
-          </a:p>
-          <a:p>
-            <a:r>
-              <a:rPr lang="fr-FR" dirty="0"/>
-              <a:t>Surveillez la gestion des identités et des accès, y compris la surveillance des abus d'autorisations par les utilisateurs système autorisés.</a:t>
-            </a:r>
-          </a:p>
-          <a:p>
-            <a:r>
-              <a:rPr lang="fr-FR" dirty="0"/>
-              <a:t>Tenir un registre des risques de sécurité de l'information et participer aux audits internes et externes relatifs à la sécurité de l'information.</a:t>
-            </a:r>
-          </a:p>
-          <a:p>
-            <a:r>
-              <a:rPr lang="fr-FR" dirty="0"/>
-              <a:t>Surveillez et répondez aux e-mails de «phishing» et aux activités de «pharming».</a:t>
+              <a:t>La maîtrise d’outils de test, par exemple ALM de Hewlett Packard</a:t>
+            </a:r>
+          </a:p>
+          <a:p>
+            <a:r>
+              <a:rPr lang="fr-FR" dirty="0"/>
+              <a:t>La connaissance de méthodologies de test logiciel, par exemple ISTQB</a:t>
+            </a:r>
+          </a:p>
+          <a:p>
+            <a:r>
+              <a:rPr lang="fr-FR" dirty="0"/>
+              <a:t>La capacité à intégrer rapidement les aspects fonctionnels du logiciel testé</a:t>
+            </a:r>
+          </a:p>
+          <a:p>
+            <a:r>
+              <a:rPr lang="fr-FR" dirty="0"/>
+              <a:t>La connaissance de langages de script, par exemple Python</a:t>
+            </a:r>
+          </a:p>
+          <a:p>
+            <a:r>
+              <a:rPr lang="fr-FR" dirty="0"/>
+              <a:t>En lien avec le point précédent : savoir programmer n’est pas obligatoire ; néanmoins, cela s’avère très utile pour développer des outils qui vont faciliter le travail quotidien</a:t>
             </a:r>
             <a:endParaRPr lang="en-US" dirty="0"/>
           </a:p>
@@ -6536,7 +6559,7 @@
     </p:spTree>
     <p:extLst>
       <p:ext uri="{BB962C8B-B14F-4D97-AF65-F5344CB8AC3E}">
-        <p14:creationId xmlns:p14="http://schemas.microsoft.com/office/powerpoint/2010/main" val="1398404491"/>
+        <p14:creationId xmlns:p14="http://schemas.microsoft.com/office/powerpoint/2010/main" val="2855937645"/>
       </p:ext>
     </p:extLst>
   </p:cSld>
@@ -6614,12 +6637,16 @@
           <a:lstStyle/>
           <a:p>
             <a:r>
+              <a:rPr lang="en-US" dirty="0"/>
+              <a:t>Formation </a:t>
+            </a:r>
+            <a:r>
               <a:rPr lang="en-US" dirty="0" err="1"/>
               <a:t>Ingénieur</a:t>
             </a:r>
             <a:r>
               <a:rPr lang="en-US" dirty="0"/>
-              <a:t> Cloud</a:t>
+              <a:t> Tests et Validation </a:t>
             </a:r>
           </a:p>
         </p:txBody>
@@ -6648,31 +6675,14 @@
           <a:p>
             <a:r>
               <a:rPr lang="fr-FR" dirty="0"/>
-              <a:t>Les ingénieurs cloud sont responsables de l'exécution des tâches techniques associées au cloud </a:t>
-            </a:r>
-            <a:r>
-              <a:rPr lang="fr-FR" dirty="0" err="1"/>
-              <a:t>computing</a:t>
-            </a:r>
-            <a:r>
-              <a:rPr lang="fr-FR" dirty="0"/>
-              <a:t>. Cela peut impliquer n'importe quoi, de la conception de logiciels et de systèmes cloud à leur mise en œuvre et leur maintenance.</a:t>
-            </a:r>
-          </a:p>
-          <a:p>
-            <a:r>
-              <a:rPr lang="fr-FR" dirty="0"/>
-              <a:t>Implémentez des applications cloud, migrez les applications sur site existantes vers le cloud et déboguez les piles cloud.</a:t>
-            </a:r>
-            <a:endParaRPr lang="en-US" dirty="0"/>
-          </a:p>
-          <a:p>
-            <a:pPr>
-              <a:buNone/>
-            </a:pPr>
-            <a:endParaRPr lang="en-US" dirty="0"/>
-          </a:p>
-          <a:p>
+              <a:t>Spécialisation en Ecole D’ingénieur</a:t>
+            </a:r>
+          </a:p>
+          <a:p>
+            <a:r>
+              <a:rPr lang="fr-FR" dirty="0"/>
+              <a:t>Orientation après une expérience dans le domaine du développement logiciel</a:t>
+            </a:r>
             <a:endParaRPr lang="en-US" dirty="0"/>
           </a:p>
         </p:txBody>
@@ -6680,7 +6690,7 @@
     </p:spTree>
     <p:extLst>
       <p:ext uri="{BB962C8B-B14F-4D97-AF65-F5344CB8AC3E}">
-        <p14:creationId xmlns:p14="http://schemas.microsoft.com/office/powerpoint/2010/main" val="1398404491"/>
+        <p14:creationId xmlns:p14="http://schemas.microsoft.com/office/powerpoint/2010/main" val="1236633030"/>
       </p:ext>
     </p:extLst>
   </p:cSld>
@@ -6758,21 +6768,14 @@
           <a:lstStyle/>
           <a:p>
             <a:r>
+              <a:rPr lang="en-US" dirty="0"/>
+              <a:t>Administration/Production </a:t>
+            </a:r>
+            <a:r>
               <a:rPr lang="en-US" dirty="0" err="1"/>
-              <a:t>Compétence</a:t>
-            </a:r>
-            <a:r>
-              <a:rPr lang="en-US" dirty="0"/>
-              <a:t> d’un </a:t>
-            </a:r>
-            <a:r>
-              <a:rPr lang="en-US" dirty="0" err="1"/>
-              <a:t>Ingénieur</a:t>
-            </a:r>
-            <a:r>
-              <a:rPr lang="en-US" dirty="0"/>
-              <a:t> Cloud</a:t>
-            </a:r>
+              <a:t>Logiciel</a:t>
+            </a:r>
+            <a:endParaRPr lang="en-US" dirty="0"/>
           </a:p>
         </p:txBody>
       </p:sp>
@@ -6789,73 +6792,77 @@
         <p:spPr>
           <a:xfrm>
             <a:off x="4063042" y="1825625"/>
-            <a:ext cx="7290758" cy="4557921"/>
+            <a:ext cx="7290758" cy="4351338"/>
           </a:xfrm>
         </p:spPr>
         <p:txBody>
           <a:bodyPr>
-            <a:normAutofit fontScale="55000" lnSpcReduction="20000"/>
+            <a:normAutofit fontScale="92500" lnSpcReduction="20000"/>
           </a:bodyPr>
           <a:lstStyle/>
           <a:p>
             <a:r>
               <a:rPr lang="fr-FR" dirty="0"/>
-              <a:t>Collaborez avec les équipes d'ingénierie et de développement pour évaluer et identifier les solutions cloud optimales.</a:t>
-            </a:r>
-          </a:p>
-          <a:p>
-            <a:r>
-              <a:rPr lang="fr-FR" dirty="0"/>
-              <a:t>Modifier et améliorer les systèmes existants.</a:t>
-            </a:r>
-          </a:p>
-          <a:p>
-            <a:r>
-              <a:rPr lang="fr-FR" dirty="0"/>
-              <a:t>Sensibiliser les équipes à la mise en œuvre des nouvelles technologies et initiatives cloud.</a:t>
-            </a:r>
-          </a:p>
-          <a:p>
-            <a:r>
-              <a:rPr lang="fr-FR" dirty="0"/>
-              <a:t>Concevez, développez et déployez des systèmes modulaires basés sur le cloud.</a:t>
-            </a:r>
-          </a:p>
-          <a:p>
-            <a:r>
-              <a:rPr lang="fr-FR" dirty="0"/>
-              <a:t>Développer et maintenir des solutions cloud conformément aux meilleures pratiques.</a:t>
-            </a:r>
-          </a:p>
-          <a:p>
-            <a:r>
-              <a:rPr lang="fr-FR" dirty="0"/>
-              <a:t>Assurer le fonctionnement efficace des fonctions de stockage et de traitement des données conformément aux politiques de sécurité de l'entreprise et aux meilleures pratiques en matière de sécurité cloud.</a:t>
-            </a:r>
-          </a:p>
-          <a:p>
-            <a:r>
-              <a:rPr lang="fr-FR" dirty="0"/>
-              <a:t>Identifiez, analysez et résolvez les vulnérabilités de l'infrastructure et les problèmes de déploiement d'applications.</a:t>
-            </a:r>
-          </a:p>
-          <a:p>
-            <a:r>
-              <a:rPr lang="fr-FR" dirty="0"/>
-              <a:t>Examiner régulièrement les systèmes existants et faire des recommandations d'amélioration.</a:t>
-            </a:r>
-          </a:p>
-          <a:p>
-            <a:r>
-              <a:rPr lang="fr-FR" dirty="0"/>
-              <a:t>Interagissez avec les clients, en fournissant une assistance cloud et en formulant des recommandations en fonction des besoins des clients.</a:t>
+              <a:t>Les opérations logicielles comprennent des processus administratifs avec prise en charge du matériel et des logiciels.</a:t>
+            </a:r>
+          </a:p>
+          <a:p>
+            <a:r>
+              <a:rPr lang="fr-FR" dirty="0"/>
+              <a:t>Les rôles importants des équipes opérationnelles comprennent la gestion de la technologie, l'assurance qualité, la gestion de l'infrastructure et la confirmation que les produits finis répondent à tous les besoins et attentes du client.</a:t>
+            </a:r>
+          </a:p>
+          <a:p>
+            <a:r>
+              <a:rPr lang="fr-FR" dirty="0"/>
+              <a:t>Les principaux profils d'emploi sont les suivants:</a:t>
+            </a:r>
+          </a:p>
+          <a:p>
+            <a:pPr lvl="1"/>
+            <a:r>
+              <a:rPr lang="fr-FR" dirty="0"/>
+              <a:t>Administrateur de base de données</a:t>
+            </a:r>
+          </a:p>
+          <a:p>
+            <a:pPr lvl="1"/>
+            <a:r>
+              <a:rPr lang="fr-FR" dirty="0"/>
+              <a:t>Ingénieur réseau</a:t>
+            </a:r>
+          </a:p>
+          <a:p>
+            <a:pPr lvl="1"/>
+            <a:r>
+              <a:rPr lang="fr-FR" dirty="0"/>
+              <a:t>Ingénieur sécurité</a:t>
+            </a:r>
+          </a:p>
+          <a:p>
+            <a:pPr lvl="1"/>
+            <a:r>
+              <a:rPr lang="fr-FR" dirty="0"/>
+              <a:t>Ingénieur Cloud </a:t>
+            </a:r>
+          </a:p>
+          <a:p>
+            <a:pPr lvl="1"/>
+            <a:r>
+              <a:rPr lang="fr-FR" dirty="0"/>
+              <a:t>Ingénieur </a:t>
+            </a:r>
+            <a:r>
+              <a:rPr lang="fr-FR" dirty="0" err="1"/>
+              <a:t>DevSecOps</a:t>
             </a:r>
             <a:endParaRPr lang="en-US" dirty="0"/>
           </a:p>
           <a:p>
-            <a:pPr>
-              <a:buNone/>
-            </a:pPr>
+            <a:pPr lvl="1"/>
+            <a:endParaRPr lang="en-US" dirty="0"/>
+          </a:p>
+          <a:p>
             <a:endParaRPr lang="en-US" dirty="0"/>
           </a:p>
         </p:txBody>
@@ -6942,7 +6949,15 @@
           <a:p>
             <a:r>
               <a:rPr lang="en-US" dirty="0" err="1"/>
-              <a:t>DevOps</a:t>
+              <a:t>Ingénieur</a:t>
+            </a:r>
+            <a:r>
+              <a:rPr lang="en-US" dirty="0"/>
+              <a:t> Bases de </a:t>
+            </a:r>
+            <a:r>
+              <a:rPr lang="en-US" dirty="0" err="1"/>
+              <a:t>Données</a:t>
             </a:r>
             <a:endParaRPr lang="en-US" dirty="0"/>
           </a:p>
@@ -6966,28 +6981,56 @@
         </p:spPr>
         <p:txBody>
           <a:bodyPr>
-            <a:normAutofit lnSpcReduction="10000"/>
+            <a:normAutofit fontScale="92500"/>
           </a:bodyPr>
           <a:lstStyle/>
           <a:p>
             <a:r>
               <a:rPr lang="fr-FR" dirty="0"/>
-              <a:t>Le DevOps est un ensemble de pratiques / combinaison </a:t>
-            </a:r>
-            <a:r>
-              <a:rPr lang="fr-FR" dirty="0" err="1"/>
-              <a:t>interfonctionnelle</a:t>
-            </a:r>
-            <a:r>
-              <a:rPr lang="fr-FR" dirty="0"/>
-              <a:t> qui combine le développement logiciel (Dev) et les opérations informatiques (Ops).</a:t>
-            </a:r>
-          </a:p>
-          <a:p>
-            <a:r>
-              <a:rPr lang="fr-FR" dirty="0"/>
-              <a:t>Il vise à raccourcir le cycle de vie du développement et toutes les opérations informatiques liées à un logiciel en intégrant continuellement et automatiquement les mises à jour et les changements à travers le processus d’ intégration continue (CI) et déploiement continu (CD). </a:t>
-            </a:r>
+              <a:t>Un administrateur de base de données est un professionnel qui maintient les performances, l'intégrité et la sécurité d'une base de données.</a:t>
+            </a:r>
+            <a:endParaRPr lang="en-US" dirty="0"/>
+          </a:p>
+          <a:p>
+            <a:r>
+              <a:rPr lang="fr-FR" dirty="0"/>
+              <a:t>Un DBA s'assurera que:</a:t>
+            </a:r>
+          </a:p>
+          <a:p>
+            <a:pPr lvl="1"/>
+            <a:r>
+              <a:rPr lang="fr-FR" dirty="0"/>
+              <a:t>Les données restent cohérentes dans toute la base de données.</a:t>
+            </a:r>
+          </a:p>
+          <a:p>
+            <a:pPr lvl="1"/>
+            <a:r>
+              <a:rPr lang="fr-FR" dirty="0"/>
+              <a:t>Les données sont clairement définies.</a:t>
+            </a:r>
+          </a:p>
+          <a:p>
+            <a:pPr lvl="1"/>
+            <a:r>
+              <a:rPr lang="fr-FR" dirty="0"/>
+              <a:t>Les utilisateurs accèdent aux données simultanément, sous une forme adaptée à leurs besoins.</a:t>
+            </a:r>
+          </a:p>
+          <a:p>
+            <a:pPr lvl="1"/>
+            <a:r>
+              <a:rPr lang="fr-FR" dirty="0"/>
+              <a:t>Il existe des dispositions pour la sécurité des données et le contrôle de la récupération (garantissant que toutes les données sont récupérables en cas d'urgence).</a:t>
+            </a:r>
+            <a:endParaRPr lang="en-US" dirty="0"/>
+          </a:p>
+          <a:p>
+            <a:pPr lvl="1"/>
+            <a:endParaRPr lang="en-US" dirty="0"/>
+          </a:p>
+          <a:p>
             <a:endParaRPr lang="en-US" dirty="0"/>
           </a:p>
         </p:txBody>
@@ -7074,11 +7117,19 @@
           <a:p>
             <a:r>
               <a:rPr lang="en-US" dirty="0" err="1"/>
-              <a:t>Ingénieur</a:t>
+              <a:t>Compétences</a:t>
             </a:r>
             <a:r>
               <a:rPr lang="en-US" dirty="0"/>
-              <a:t> DevOps</a:t>
+              <a:t> </a:t>
+            </a:r>
+            <a:r>
+              <a:rPr lang="en-US" dirty="0" err="1"/>
+              <a:t>professionnelles</a:t>
+            </a:r>
+            <a:r>
+              <a:rPr lang="en-US" dirty="0"/>
+              <a:t> d’un DBA</a:t>
             </a:r>
           </a:p>
         </p:txBody>
@@ -7101,20 +7152,85 @@
         </p:spPr>
         <p:txBody>
           <a:bodyPr>
-            <a:normAutofit/>
+            <a:normAutofit fontScale="55000" lnSpcReduction="20000"/>
           </a:bodyPr>
           <a:lstStyle/>
           <a:p>
             <a:r>
               <a:rPr lang="fr-FR" dirty="0"/>
-              <a:t>Les ingénieurs DevOps sont des professionnels qui travaillent avec les développeurs et le personnel informatique pour gérer la production des versions de code.</a:t>
-            </a:r>
-          </a:p>
-          <a:p>
-            <a:r>
-              <a:rPr lang="fr-FR" dirty="0"/>
-              <a:t>Ils automatisent la construction, le test et maintiennent l'infrastructure et les outils pour permettre le développement et la publication rapides des logiciels. </a:t>
-            </a:r>
+              <a:t>Établir les besoins des utilisateurs et surveiller l'accès et la sécurité des utilisateurs.</a:t>
+            </a:r>
+          </a:p>
+          <a:p>
+            <a:r>
+              <a:rPr lang="fr-FR" dirty="0"/>
+              <a:t>Surveillez les performances et gérez les paramètres afin de fournir des réponses rapides aux utilisateurs frontaux.</a:t>
+            </a:r>
+          </a:p>
+          <a:p>
+            <a:r>
+              <a:rPr lang="fr-FR" dirty="0"/>
+              <a:t>Cartographiez la conception conceptuelle d'une base de données planifiée.</a:t>
+            </a:r>
+          </a:p>
+          <a:p>
+            <a:r>
+              <a:rPr lang="fr-FR" dirty="0"/>
+              <a:t>Installez et testez de nouvelles versions du système de gestion de base de données (SGBD).</a:t>
+            </a:r>
+          </a:p>
+          <a:p>
+            <a:r>
+              <a:rPr lang="fr-FR" dirty="0"/>
+              <a:t>Maintenir les normes de données, y compris le respect de la loi sur la protection des données.</a:t>
+            </a:r>
+          </a:p>
+          <a:p>
+            <a:r>
+              <a:rPr lang="fr-FR" dirty="0"/>
+              <a:t>Rédiger la documentation de la base de données, y compris les normes de données, les procédures et les définitions du dictionnaire de données (métadonnées).</a:t>
+            </a:r>
+          </a:p>
+          <a:p>
+            <a:r>
+              <a:rPr lang="fr-FR" dirty="0"/>
+              <a:t>Contrôlez les autorisations d'accès et les privilèges.</a:t>
+            </a:r>
+          </a:p>
+          <a:p>
+            <a:r>
+              <a:rPr lang="fr-FR" dirty="0"/>
+              <a:t>Gérez et testez les plans de sauvegarde et de récupération.</a:t>
+            </a:r>
+          </a:p>
+          <a:p>
+            <a:r>
+              <a:rPr lang="fr-FR" dirty="0"/>
+              <a:t>Assurez-vous que les procédures de stockage et d'archivage fonctionnent correctement.</a:t>
+            </a:r>
+          </a:p>
+          <a:p>
+            <a:r>
+              <a:rPr lang="fr-FR" dirty="0"/>
+              <a:t>Effectuer la planification des capacités.</a:t>
+            </a:r>
+          </a:p>
+          <a:p>
+            <a:r>
+              <a:rPr lang="fr-FR" dirty="0"/>
+              <a:t>Travailler en étroite collaboration avec les chefs de projets informatiques, les programmeurs de bases de données et les programmeurs multimédias.</a:t>
+            </a:r>
+            <a:endParaRPr lang="en-US" dirty="0"/>
+          </a:p>
+          <a:p>
+            <a:pPr lvl="1"/>
+            <a:endParaRPr lang="en-US" dirty="0"/>
+          </a:p>
+          <a:p>
+            <a:pPr lvl="1"/>
+            <a:endParaRPr lang="en-US" dirty="0"/>
+          </a:p>
+          <a:p>
             <a:endParaRPr lang="en-US" dirty="0"/>
           </a:p>
         </p:txBody>
@@ -7201,20 +7317,25 @@
           <a:p>
             <a:r>
               <a:rPr lang="en-US" dirty="0" err="1"/>
-              <a:t>Compétence</a:t>
+              <a:t>Ingénieur</a:t>
             </a:r>
             <a:r>
               <a:rPr lang="en-US" dirty="0"/>
-              <a:t> d’un </a:t>
+              <a:t> </a:t>
             </a:r>
             <a:r>
               <a:rPr lang="en-US" dirty="0" err="1"/>
-              <a:t>Ingénieur</a:t>
+              <a:t>Réseau</a:t>
             </a:r>
             <a:r>
               <a:rPr lang="en-US" dirty="0"/>
-              <a:t> DevOps</a:t>
-            </a:r>
+              <a:t>/</a:t>
+            </a:r>
+            <a:r>
+              <a:rPr lang="en-US" dirty="0" err="1"/>
+              <a:t>Télécom</a:t>
+            </a:r>
+            <a:endParaRPr lang="en-US" dirty="0"/>
           </a:p>
         </p:txBody>
       </p:sp>
@@ -7236,57 +7357,23 @@
         </p:spPr>
         <p:txBody>
           <a:bodyPr>
-            <a:normAutofit fontScale="70000" lnSpcReduction="20000"/>
+            <a:normAutofit/>
           </a:bodyPr>
           <a:lstStyle/>
           <a:p>
-            <a:pPr fontAlgn="base"/>
-            <a:r>
-              <a:rPr lang="fr-FR" dirty="0"/>
-              <a:t>Construire et mettre en place de nouveaux outils et infrastructures de développement.</a:t>
-            </a:r>
-          </a:p>
-          <a:p>
-            <a:pPr fontAlgn="base"/>
-            <a:r>
-              <a:rPr lang="fr-FR" dirty="0"/>
-              <a:t>Travaillez sur des moyens d'automatiser et d'améliorer les processus de développement et de publication.</a:t>
-            </a:r>
-          </a:p>
-          <a:p>
-            <a:pPr fontAlgn="base"/>
-            <a:r>
-              <a:rPr lang="fr-FR" dirty="0"/>
-              <a:t>Tester et examiner le code écrit par d'autres et analyser les résultats.</a:t>
-            </a:r>
-          </a:p>
-          <a:p>
-            <a:pPr fontAlgn="base"/>
-            <a:r>
-              <a:rPr lang="fr-FR" dirty="0"/>
-              <a:t>Assurez-vous que les systèmes sont sûrs et sécurisés contre les menaces de cybersécurité.</a:t>
-            </a:r>
-          </a:p>
-          <a:p>
-            <a:pPr fontAlgn="base"/>
-            <a:r>
-              <a:rPr lang="fr-FR" dirty="0"/>
-              <a:t>Identifier les problèmes techniques et développer des mises à jour logicielles et des «correctifs».</a:t>
-            </a:r>
-          </a:p>
-          <a:p>
-            <a:pPr fontAlgn="base"/>
-            <a:r>
-              <a:rPr lang="fr-FR" dirty="0"/>
-              <a:t>Travailler avec les développeurs de logiciels et les ingénieurs en logiciel pour s'assurer que le développement suit les processus établis et fonctionne comme prévu.</a:t>
-            </a:r>
-          </a:p>
-          <a:p>
-            <a:pPr fontAlgn="base"/>
-            <a:r>
-              <a:rPr lang="fr-FR" dirty="0"/>
-              <a:t>Planifier les projets et participer aux décisions de gestion de projet.</a:t>
-            </a:r>
+            <a:r>
+              <a:rPr lang="fr-FR" dirty="0"/>
+              <a:t>L’ingénieur réseaux télécoms définit les besoins et l’architecture des réseaux de télécommunications de l’entreprise.</a:t>
+            </a:r>
+          </a:p>
+          <a:p>
+            <a:r>
+              <a:rPr lang="fr-FR" dirty="0"/>
+              <a:t>Il est garant du bon fonctionnement et de la qualité du réseau, participe à son évolution et pilote l’accès aux utilisateurs..</a:t>
+            </a:r>
+            <a:endParaRPr lang="en-US" dirty="0"/>
+          </a:p>
+          <a:p>
             <a:endParaRPr lang="en-US" dirty="0"/>
           </a:p>
         </p:txBody>
@@ -7326,7 +7413,7 @@
           <p:cNvPr id="5" name="Picture 4">
             <a:extLst>
               <a:ext uri="{FF2B5EF4-FFF2-40B4-BE49-F238E27FC236}">
-                <a16:creationId xmlns:a16="http://schemas.microsoft.com/office/drawing/2014/main" id="{F9F299D9-CB3C-5E4C-B055-26DC86002447}"/>
+                <a16:creationId xmlns:a16="http://schemas.microsoft.com/office/drawing/2014/main" id="{0520B7E2-ABFB-114C-9434-B978ACAAE8EC}"/>
               </a:ext>
             </a:extLst>
           </p:cNvPr>
@@ -7343,7 +7430,7 @@
         </p:blipFill>
         <p:spPr>
           <a:xfrm>
-            <a:off x="0" y="24714"/>
+            <a:off x="0" y="0"/>
             <a:ext cx="12192000" cy="6858000"/>
           </a:xfrm>
           <a:prstGeom prst="rect">
@@ -7351,10 +7438,154 @@
           </a:prstGeom>
         </p:spPr>
       </p:pic>
+      <p:sp>
+        <p:nvSpPr>
+          <p:cNvPr id="4" name="Title 3"/>
+          <p:cNvSpPr>
+            <a:spLocks noGrp="1"/>
+          </p:cNvSpPr>
+          <p:nvPr>
+            <p:ph type="title"/>
+          </p:nvPr>
+        </p:nvSpPr>
+        <p:spPr>
+          <a:xfrm>
+            <a:off x="4063042" y="365125"/>
+            <a:ext cx="7290758" cy="1325563"/>
+          </a:xfrm>
+        </p:spPr>
+        <p:txBody>
+          <a:bodyPr>
+            <a:normAutofit/>
+          </a:bodyPr>
+          <a:lstStyle/>
+          <a:p>
+            <a:r>
+              <a:rPr lang="en-US" dirty="0" err="1"/>
+              <a:t>Compétence</a:t>
+            </a:r>
+            <a:r>
+              <a:rPr lang="en-US" dirty="0"/>
+              <a:t> </a:t>
+            </a:r>
+            <a:r>
+              <a:rPr lang="en-US" dirty="0" err="1"/>
+              <a:t>professionnelle</a:t>
+            </a:r>
+            <a:r>
+              <a:rPr lang="en-US" dirty="0"/>
+              <a:t> d’un </a:t>
+            </a:r>
+            <a:r>
+              <a:rPr lang="en-US" dirty="0" err="1"/>
+              <a:t>Ingénieur</a:t>
+            </a:r>
+            <a:r>
+              <a:rPr lang="en-US" dirty="0"/>
+              <a:t> </a:t>
+            </a:r>
+            <a:r>
+              <a:rPr lang="en-US" dirty="0" err="1"/>
+              <a:t>Réseau</a:t>
+            </a:r>
+            <a:endParaRPr lang="en-US" dirty="0"/>
+          </a:p>
+        </p:txBody>
+      </p:sp>
+      <p:sp>
+        <p:nvSpPr>
+          <p:cNvPr id="6" name="Content Placeholder 5"/>
+          <p:cNvSpPr>
+            <a:spLocks noGrp="1"/>
+          </p:cNvSpPr>
+          <p:nvPr>
+            <p:ph idx="1"/>
+          </p:nvPr>
+        </p:nvSpPr>
+        <p:spPr>
+          <a:xfrm>
+            <a:off x="4063042" y="1825625"/>
+            <a:ext cx="7290758" cy="4747703"/>
+          </a:xfrm>
+        </p:spPr>
+        <p:txBody>
+          <a:bodyPr>
+            <a:normAutofit fontScale="47500" lnSpcReduction="20000"/>
+          </a:bodyPr>
+          <a:lstStyle/>
+          <a:p>
+            <a:r>
+              <a:rPr lang="fr-FR" dirty="0"/>
+              <a:t>Établir l'environnement réseau en concevant la configuration du système, en dirigeant l'installation du système et en définissant, documentant et appliquant les normes du système.</a:t>
+            </a:r>
+          </a:p>
+          <a:p>
+            <a:r>
+              <a:rPr lang="fr-FR" dirty="0"/>
+              <a:t>Optimisez les performances du réseau en surveillant les performances, en résolvant les problèmes et les pannes de réseau, en planifiant les mises à niveau et en collaborant avec les architectes réseau sur l'optimisation du réseau.</a:t>
+            </a:r>
+          </a:p>
+          <a:p>
+            <a:r>
+              <a:rPr lang="fr-FR" dirty="0"/>
+              <a:t>Prendre en compte les exigences des utilisateurs en termes d’exigence de performances du réseau (puissance, rapidité, stabilité).</a:t>
+            </a:r>
+          </a:p>
+          <a:p>
+            <a:r>
+              <a:rPr lang="fr-FR" dirty="0"/>
+              <a:t>Sécurisez les systèmes de réseau en établissant et en appliquant des politiques, et en définissant et en surveillant l'accès.</a:t>
+            </a:r>
+          </a:p>
+          <a:p>
+            <a:r>
+              <a:rPr lang="fr-FR" dirty="0"/>
+              <a:t>Soutenir et administrer les environnements de pare-feu conformément à la politique de sécurité informatique.</a:t>
+            </a:r>
+          </a:p>
+          <a:p>
+            <a:r>
+              <a:rPr lang="fr-FR" dirty="0"/>
+              <a:t>Signaler l'état opérationnel du réseau en collectant et en hiérarchisant les informations et en gérant les projets.</a:t>
+            </a:r>
+          </a:p>
+          <a:p>
+            <a:r>
+              <a:rPr lang="fr-FR" dirty="0"/>
+              <a:t>Configurez les équipements de routage et de commutation, les services vocaux IP hébergés et les pare-feu.</a:t>
+            </a:r>
+          </a:p>
+          <a:p>
+            <a:r>
+              <a:rPr lang="fr-FR" dirty="0"/>
+              <a:t>Fournir une assistance à distance aux ingénieurs sur site et aux utilisateurs finaux / clients pendant l'installation.</a:t>
+            </a:r>
+          </a:p>
+          <a:p>
+            <a:r>
+              <a:rPr lang="fr-FR" dirty="0"/>
+              <a:t>Fournir un dépannage et une recherche de pannes à distance si des problèmes surviennent lors de l'installation initiale.</a:t>
+            </a:r>
+          </a:p>
+          <a:p>
+            <a:r>
+              <a:rPr lang="fr-FR" dirty="0"/>
+              <a:t>Entreprendre la gestion de la capacité et l'audit de l'adressage IP et des appareils hébergés dans les centres de données. </a:t>
+            </a:r>
+          </a:p>
+          <a:p>
+            <a:r>
+              <a:rPr lang="fr-FR" dirty="0"/>
+              <a:t>Assurer une veille technologique pour anticiper les évolutions nécessaires</a:t>
+            </a:r>
+            <a:endParaRPr lang="en-US" dirty="0"/>
+          </a:p>
+        </p:txBody>
+      </p:sp>
     </p:spTree>
     <p:extLst>
       <p:ext uri="{BB962C8B-B14F-4D97-AF65-F5344CB8AC3E}">
-        <p14:creationId xmlns:p14="http://schemas.microsoft.com/office/powerpoint/2010/main" val="786268399"/>
+        <p14:creationId xmlns:p14="http://schemas.microsoft.com/office/powerpoint/2010/main" val="1398404491"/>
       </p:ext>
     </p:extLst>
   </p:cSld>
@@ -7506,6 +7737,1887 @@
 </p:sld>
 </file>
 
+<file path=ppt/slides/slide30.xml><?xml version="1.0" encoding="utf-8"?>
+<p:sld xmlns:a="http://schemas.openxmlformats.org/drawingml/2006/main" xmlns:r="http://schemas.openxmlformats.org/officeDocument/2006/relationships" xmlns:p="http://schemas.openxmlformats.org/presentationml/2006/main">
+  <p:cSld>
+    <p:spTree>
+      <p:nvGrpSpPr>
+        <p:cNvPr id="1" name=""/>
+        <p:cNvGrpSpPr/>
+        <p:nvPr/>
+      </p:nvGrpSpPr>
+      <p:grpSpPr>
+        <a:xfrm>
+          <a:off x="0" y="0"/>
+          <a:ext cx="0" cy="0"/>
+          <a:chOff x="0" y="0"/>
+          <a:chExt cx="0" cy="0"/>
+        </a:xfrm>
+      </p:grpSpPr>
+      <p:pic>
+        <p:nvPicPr>
+          <p:cNvPr id="5" name="Picture 4">
+            <a:extLst>
+              <a:ext uri="{FF2B5EF4-FFF2-40B4-BE49-F238E27FC236}">
+                <a16:creationId xmlns:a16="http://schemas.microsoft.com/office/drawing/2014/main" id="{0520B7E2-ABFB-114C-9434-B978ACAAE8EC}"/>
+              </a:ext>
+            </a:extLst>
+          </p:cNvPr>
+          <p:cNvPicPr>
+            <a:picLocks noChangeAspect="1"/>
+          </p:cNvPicPr>
+          <p:nvPr/>
+        </p:nvPicPr>
+        <p:blipFill>
+          <a:blip r:embed="rId2"/>
+          <a:stretch>
+            <a:fillRect/>
+          </a:stretch>
+        </p:blipFill>
+        <p:spPr>
+          <a:xfrm>
+            <a:off x="0" y="0"/>
+            <a:ext cx="12192000" cy="6858000"/>
+          </a:xfrm>
+          <a:prstGeom prst="rect">
+            <a:avLst/>
+          </a:prstGeom>
+        </p:spPr>
+      </p:pic>
+      <p:sp>
+        <p:nvSpPr>
+          <p:cNvPr id="4" name="Title 3"/>
+          <p:cNvSpPr>
+            <a:spLocks noGrp="1"/>
+          </p:cNvSpPr>
+          <p:nvPr>
+            <p:ph type="title"/>
+          </p:nvPr>
+        </p:nvSpPr>
+        <p:spPr>
+          <a:xfrm>
+            <a:off x="4063042" y="365125"/>
+            <a:ext cx="7290758" cy="1325563"/>
+          </a:xfrm>
+        </p:spPr>
+        <p:txBody>
+          <a:bodyPr/>
+          <a:lstStyle/>
+          <a:p>
+            <a:r>
+              <a:rPr lang="en-US" dirty="0" err="1"/>
+              <a:t>Compétence</a:t>
+            </a:r>
+            <a:r>
+              <a:rPr lang="en-US" dirty="0"/>
+              <a:t> Technique d’un </a:t>
+            </a:r>
+            <a:r>
+              <a:rPr lang="en-US" dirty="0" err="1"/>
+              <a:t>Ingénieur</a:t>
+            </a:r>
+            <a:r>
+              <a:rPr lang="en-US" dirty="0"/>
+              <a:t> </a:t>
+            </a:r>
+            <a:r>
+              <a:rPr lang="en-US" dirty="0" err="1"/>
+              <a:t>Réseau</a:t>
+            </a:r>
+            <a:endParaRPr lang="en-US" dirty="0"/>
+          </a:p>
+        </p:txBody>
+      </p:sp>
+      <p:sp>
+        <p:nvSpPr>
+          <p:cNvPr id="6" name="Content Placeholder 5"/>
+          <p:cNvSpPr>
+            <a:spLocks noGrp="1"/>
+          </p:cNvSpPr>
+          <p:nvPr>
+            <p:ph idx="1"/>
+          </p:nvPr>
+        </p:nvSpPr>
+        <p:spPr>
+          <a:xfrm>
+            <a:off x="4063042" y="1825625"/>
+            <a:ext cx="7290758" cy="4747703"/>
+          </a:xfrm>
+        </p:spPr>
+        <p:txBody>
+          <a:bodyPr>
+            <a:normAutofit fontScale="55000" lnSpcReduction="20000"/>
+          </a:bodyPr>
+          <a:lstStyle/>
+          <a:p>
+            <a:pPr algn="l">
+              <a:buFont typeface="Arial" panose="020B0604020202020204" pitchFamily="34" charset="0"/>
+              <a:buChar char="•"/>
+            </a:pPr>
+            <a:r>
+              <a:rPr lang="fr-FR" b="0" i="0" dirty="0">
+                <a:solidFill>
+                  <a:srgbClr val="232558"/>
+                </a:solidFill>
+                <a:effectLst/>
+                <a:latin typeface="Montserrat-Regular"/>
+              </a:rPr>
+              <a:t>Bonne connaissance de l’architecture et des fonctionnalités du SI de l’entreprise</a:t>
+            </a:r>
+          </a:p>
+          <a:p>
+            <a:pPr algn="l">
+              <a:buFont typeface="Arial" panose="020B0604020202020204" pitchFamily="34" charset="0"/>
+              <a:buChar char="•"/>
+            </a:pPr>
+            <a:r>
+              <a:rPr lang="fr-FR" b="0" i="0" dirty="0">
+                <a:solidFill>
+                  <a:srgbClr val="232558"/>
+                </a:solidFill>
+                <a:effectLst/>
+                <a:latin typeface="Montserrat-Regular"/>
+              </a:rPr>
+              <a:t>Expertise dans l’administration des réseaux et systèmes (routeurs, firewall…)</a:t>
+            </a:r>
+          </a:p>
+          <a:p>
+            <a:pPr algn="l">
+              <a:buFont typeface="Arial" panose="020B0604020202020204" pitchFamily="34" charset="0"/>
+              <a:buChar char="•"/>
+            </a:pPr>
+            <a:r>
+              <a:rPr lang="fr-FR" b="0" i="0" dirty="0">
+                <a:solidFill>
+                  <a:srgbClr val="232558"/>
+                </a:solidFill>
+                <a:effectLst/>
+                <a:latin typeface="Montserrat-Regular"/>
+              </a:rPr>
+              <a:t>Connaissance des protocoles réseaux et de télécommunication (TCP/IP, Ethernet, LAN, WAN, X25…)</a:t>
+            </a:r>
+          </a:p>
+          <a:p>
+            <a:pPr algn="l">
+              <a:buFont typeface="Arial" panose="020B0604020202020204" pitchFamily="34" charset="0"/>
+              <a:buChar char="•"/>
+            </a:pPr>
+            <a:r>
+              <a:rPr lang="fr-FR" b="0" i="0" dirty="0">
+                <a:solidFill>
+                  <a:srgbClr val="232558"/>
+                </a:solidFill>
+                <a:effectLst/>
+                <a:latin typeface="Montserrat-Regular"/>
+              </a:rPr>
+              <a:t>Maîtrise de la gestion des logiciels d’infrastructure (systèmes d’exploitation, serveurs de messagerie, bases de données…)</a:t>
+            </a:r>
+          </a:p>
+          <a:p>
+            <a:pPr algn="l">
+              <a:buFont typeface="Arial" panose="020B0604020202020204" pitchFamily="34" charset="0"/>
+              <a:buChar char="•"/>
+            </a:pPr>
+            <a:r>
+              <a:rPr lang="fr-FR" b="0" i="0" dirty="0">
+                <a:solidFill>
+                  <a:srgbClr val="232558"/>
+                </a:solidFill>
+                <a:effectLst/>
+                <a:latin typeface="Montserrat-Regular"/>
+              </a:rPr>
+              <a:t>Bonne connaissance des technologies télécoms et Internet (DNS, SSH, FTP, DHCP, HTTP(S), NTP, SNMP …)</a:t>
+            </a:r>
+          </a:p>
+          <a:p>
+            <a:pPr algn="l">
+              <a:buFont typeface="Arial" panose="020B0604020202020204" pitchFamily="34" charset="0"/>
+              <a:buChar char="•"/>
+            </a:pPr>
+            <a:r>
+              <a:rPr lang="fr-FR" b="0" i="0" dirty="0">
+                <a:solidFill>
+                  <a:srgbClr val="232558"/>
+                </a:solidFill>
+                <a:effectLst/>
+                <a:latin typeface="Montserrat-Regular"/>
+              </a:rPr>
+              <a:t>Connaissance des bases de données (Oracle, </a:t>
+            </a:r>
+            <a:r>
+              <a:rPr lang="fr-FR" b="0" i="0" dirty="0" err="1">
+                <a:solidFill>
+                  <a:srgbClr val="232558"/>
+                </a:solidFill>
+                <a:effectLst/>
+                <a:latin typeface="Montserrat-Regular"/>
+              </a:rPr>
+              <a:t>SQLServer</a:t>
+            </a:r>
+            <a:r>
+              <a:rPr lang="fr-FR" b="0" i="0" dirty="0">
+                <a:solidFill>
+                  <a:srgbClr val="232558"/>
+                </a:solidFill>
+                <a:effectLst/>
+                <a:latin typeface="Montserrat-Regular"/>
+              </a:rPr>
+              <a:t>…)</a:t>
+            </a:r>
+          </a:p>
+          <a:p>
+            <a:pPr algn="l">
+              <a:buFont typeface="Arial" panose="020B0604020202020204" pitchFamily="34" charset="0"/>
+              <a:buChar char="•"/>
+            </a:pPr>
+            <a:r>
+              <a:rPr lang="fr-FR" b="0" i="0" dirty="0">
+                <a:solidFill>
+                  <a:srgbClr val="232558"/>
+                </a:solidFill>
+                <a:effectLst/>
+                <a:latin typeface="Montserrat-Regular"/>
+              </a:rPr>
+              <a:t>Très bonnes connaissances des principaux systèmes d’exploitation (notamment Windows et Unix)</a:t>
+            </a:r>
+          </a:p>
+          <a:p>
+            <a:pPr algn="l">
+              <a:buFont typeface="Arial" panose="020B0604020202020204" pitchFamily="34" charset="0"/>
+              <a:buChar char="•"/>
+            </a:pPr>
+            <a:r>
+              <a:rPr lang="fr-FR" b="0" i="0" dirty="0">
+                <a:solidFill>
+                  <a:srgbClr val="232558"/>
+                </a:solidFill>
+                <a:effectLst/>
+                <a:latin typeface="Montserrat-Regular"/>
+              </a:rPr>
+              <a:t>Connaissance des normes et procédures de sécurité et des outils et technologies qui s'y rapportent: firewall, antivirus, serveurs d'authentification, filtrages d'URL...</a:t>
+            </a:r>
+          </a:p>
+          <a:p>
+            <a:pPr algn="l">
+              <a:buFont typeface="Arial" panose="020B0604020202020204" pitchFamily="34" charset="0"/>
+              <a:buChar char="•"/>
+            </a:pPr>
+            <a:r>
+              <a:rPr lang="fr-FR" b="0" i="0" dirty="0">
+                <a:solidFill>
+                  <a:srgbClr val="232558"/>
+                </a:solidFill>
+                <a:effectLst/>
+                <a:latin typeface="Montserrat-Regular"/>
+              </a:rPr>
+              <a:t>Connaissance des principaux constructeurs et éditeurs prestataires du marché</a:t>
+            </a:r>
+          </a:p>
+          <a:p>
+            <a:pPr algn="l">
+              <a:buFont typeface="Arial" panose="020B0604020202020204" pitchFamily="34" charset="0"/>
+              <a:buChar char="•"/>
+            </a:pPr>
+            <a:r>
+              <a:rPr lang="fr-FR" b="0" i="0" dirty="0">
+                <a:solidFill>
+                  <a:srgbClr val="232558"/>
+                </a:solidFill>
+                <a:effectLst/>
+                <a:latin typeface="Montserrat-Regular"/>
+              </a:rPr>
+              <a:t>Connaissance des normes ISO (si l’entreprise dispose d’une certification) ou ITIL</a:t>
+            </a:r>
+          </a:p>
+          <a:p>
+            <a:pPr algn="l">
+              <a:buFont typeface="Arial" panose="020B0604020202020204" pitchFamily="34" charset="0"/>
+              <a:buChar char="•"/>
+            </a:pPr>
+            <a:r>
+              <a:rPr lang="fr-FR" b="0" i="0" dirty="0">
+                <a:solidFill>
+                  <a:srgbClr val="232558"/>
+                </a:solidFill>
+                <a:effectLst/>
+                <a:latin typeface="Montserrat-Regular"/>
+              </a:rPr>
+              <a:t>Compréhension de l’environnement de l’entreprise, et de ses spécificités métiers</a:t>
+            </a:r>
+          </a:p>
+          <a:p>
+            <a:pPr algn="l">
+              <a:buFont typeface="Arial" panose="020B0604020202020204" pitchFamily="34" charset="0"/>
+              <a:buChar char="•"/>
+            </a:pPr>
+            <a:r>
+              <a:rPr lang="fr-FR" b="0" i="0" dirty="0">
+                <a:solidFill>
+                  <a:srgbClr val="232558"/>
+                </a:solidFill>
+                <a:effectLst/>
+                <a:latin typeface="Montserrat-Regular"/>
+              </a:rPr>
+              <a:t>Maîtrise de l’anglais technique</a:t>
+            </a:r>
+          </a:p>
+        </p:txBody>
+      </p:sp>
+    </p:spTree>
+    <p:extLst>
+      <p:ext uri="{BB962C8B-B14F-4D97-AF65-F5344CB8AC3E}">
+        <p14:creationId xmlns:p14="http://schemas.microsoft.com/office/powerpoint/2010/main" val="1402577869"/>
+      </p:ext>
+    </p:extLst>
+  </p:cSld>
+  <p:clrMapOvr>
+    <a:masterClrMapping/>
+  </p:clrMapOvr>
+</p:sld>
+</file>
+
+<file path=ppt/slides/slide31.xml><?xml version="1.0" encoding="utf-8"?>
+<p:sld xmlns:a="http://schemas.openxmlformats.org/drawingml/2006/main" xmlns:r="http://schemas.openxmlformats.org/officeDocument/2006/relationships" xmlns:p="http://schemas.openxmlformats.org/presentationml/2006/main">
+  <p:cSld>
+    <p:spTree>
+      <p:nvGrpSpPr>
+        <p:cNvPr id="1" name=""/>
+        <p:cNvGrpSpPr/>
+        <p:nvPr/>
+      </p:nvGrpSpPr>
+      <p:grpSpPr>
+        <a:xfrm>
+          <a:off x="0" y="0"/>
+          <a:ext cx="0" cy="0"/>
+          <a:chOff x="0" y="0"/>
+          <a:chExt cx="0" cy="0"/>
+        </a:xfrm>
+      </p:grpSpPr>
+      <p:pic>
+        <p:nvPicPr>
+          <p:cNvPr id="5" name="Picture 4">
+            <a:extLst>
+              <a:ext uri="{FF2B5EF4-FFF2-40B4-BE49-F238E27FC236}">
+                <a16:creationId xmlns:a16="http://schemas.microsoft.com/office/drawing/2014/main" id="{0520B7E2-ABFB-114C-9434-B978ACAAE8EC}"/>
+              </a:ext>
+            </a:extLst>
+          </p:cNvPr>
+          <p:cNvPicPr>
+            <a:picLocks noChangeAspect="1"/>
+          </p:cNvPicPr>
+          <p:nvPr/>
+        </p:nvPicPr>
+        <p:blipFill>
+          <a:blip r:embed="rId2"/>
+          <a:stretch>
+            <a:fillRect/>
+          </a:stretch>
+        </p:blipFill>
+        <p:spPr>
+          <a:xfrm>
+            <a:off x="0" y="0"/>
+            <a:ext cx="12192000" cy="6858000"/>
+          </a:xfrm>
+          <a:prstGeom prst="rect">
+            <a:avLst/>
+          </a:prstGeom>
+        </p:spPr>
+      </p:pic>
+      <p:sp>
+        <p:nvSpPr>
+          <p:cNvPr id="4" name="Title 3"/>
+          <p:cNvSpPr>
+            <a:spLocks noGrp="1"/>
+          </p:cNvSpPr>
+          <p:nvPr>
+            <p:ph type="title"/>
+          </p:nvPr>
+        </p:nvSpPr>
+        <p:spPr>
+          <a:xfrm>
+            <a:off x="4063042" y="365125"/>
+            <a:ext cx="7290758" cy="1325563"/>
+          </a:xfrm>
+        </p:spPr>
+        <p:txBody>
+          <a:bodyPr/>
+          <a:lstStyle/>
+          <a:p>
+            <a:r>
+              <a:rPr lang="en-US" dirty="0"/>
+              <a:t>Formation </a:t>
+            </a:r>
+            <a:r>
+              <a:rPr lang="fr-FR" dirty="0"/>
+              <a:t>Ingénieur</a:t>
+            </a:r>
+            <a:r>
+              <a:rPr lang="en-US" dirty="0"/>
+              <a:t> </a:t>
+            </a:r>
+            <a:r>
+              <a:rPr lang="fr-FR" dirty="0"/>
+              <a:t>Réseau</a:t>
+            </a:r>
+          </a:p>
+        </p:txBody>
+      </p:sp>
+      <p:sp>
+        <p:nvSpPr>
+          <p:cNvPr id="6" name="Content Placeholder 5"/>
+          <p:cNvSpPr>
+            <a:spLocks noGrp="1"/>
+          </p:cNvSpPr>
+          <p:nvPr>
+            <p:ph idx="1"/>
+          </p:nvPr>
+        </p:nvSpPr>
+        <p:spPr>
+          <a:xfrm>
+            <a:off x="4063042" y="1825625"/>
+            <a:ext cx="7290758" cy="4747703"/>
+          </a:xfrm>
+        </p:spPr>
+        <p:txBody>
+          <a:bodyPr>
+            <a:normAutofit/>
+          </a:bodyPr>
+          <a:lstStyle/>
+          <a:p>
+            <a:pPr algn="l">
+              <a:buFont typeface="Arial" panose="020B0604020202020204" pitchFamily="34" charset="0"/>
+              <a:buChar char="•"/>
+            </a:pPr>
+            <a:r>
+              <a:rPr lang="fr-FR" b="0" i="0" dirty="0">
+                <a:solidFill>
+                  <a:srgbClr val="232558"/>
+                </a:solidFill>
+                <a:effectLst/>
+                <a:latin typeface="Montserrat-Regular"/>
+              </a:rPr>
+              <a:t>Formation de niveau bac +4/5 (Master) spécialisée en informatique, réseaux et télécommunications</a:t>
+            </a:r>
+          </a:p>
+          <a:p>
+            <a:pPr algn="l">
+              <a:buFont typeface="Arial" panose="020B0604020202020204" pitchFamily="34" charset="0"/>
+              <a:buChar char="•"/>
+            </a:pPr>
+            <a:r>
+              <a:rPr lang="fr-FR" b="0" i="0" dirty="0">
+                <a:solidFill>
+                  <a:srgbClr val="232558"/>
+                </a:solidFill>
+                <a:effectLst/>
+                <a:latin typeface="Montserrat-Regular"/>
+              </a:rPr>
+              <a:t>Écoles d’ingénieurs (informatique, télécoms, généralistes..)</a:t>
+            </a:r>
+          </a:p>
+          <a:p>
+            <a:pPr algn="l">
+              <a:buFont typeface="Arial" panose="020B0604020202020204" pitchFamily="34" charset="0"/>
+              <a:buChar char="•"/>
+            </a:pPr>
+            <a:r>
+              <a:rPr lang="fr-FR" b="0" i="0" dirty="0">
+                <a:solidFill>
+                  <a:srgbClr val="232558"/>
+                </a:solidFill>
+                <a:effectLst/>
+                <a:latin typeface="Montserrat-Regular"/>
+              </a:rPr>
+              <a:t>Une certification professionnelle à certains outils (notamment CISCO) peut être exigée</a:t>
+            </a:r>
+          </a:p>
+        </p:txBody>
+      </p:sp>
+    </p:spTree>
+    <p:extLst>
+      <p:ext uri="{BB962C8B-B14F-4D97-AF65-F5344CB8AC3E}">
+        <p14:creationId xmlns:p14="http://schemas.microsoft.com/office/powerpoint/2010/main" val="1692733859"/>
+      </p:ext>
+    </p:extLst>
+  </p:cSld>
+  <p:clrMapOvr>
+    <a:masterClrMapping/>
+  </p:clrMapOvr>
+</p:sld>
+</file>
+
+<file path=ppt/slides/slide32.xml><?xml version="1.0" encoding="utf-8"?>
+<p:sld xmlns:a="http://schemas.openxmlformats.org/drawingml/2006/main" xmlns:r="http://schemas.openxmlformats.org/officeDocument/2006/relationships" xmlns:p="http://schemas.openxmlformats.org/presentationml/2006/main">
+  <p:cSld>
+    <p:spTree>
+      <p:nvGrpSpPr>
+        <p:cNvPr id="1" name=""/>
+        <p:cNvGrpSpPr/>
+        <p:nvPr/>
+      </p:nvGrpSpPr>
+      <p:grpSpPr>
+        <a:xfrm>
+          <a:off x="0" y="0"/>
+          <a:ext cx="0" cy="0"/>
+          <a:chOff x="0" y="0"/>
+          <a:chExt cx="0" cy="0"/>
+        </a:xfrm>
+      </p:grpSpPr>
+      <p:pic>
+        <p:nvPicPr>
+          <p:cNvPr id="5" name="Picture 4">
+            <a:extLst>
+              <a:ext uri="{FF2B5EF4-FFF2-40B4-BE49-F238E27FC236}">
+                <a16:creationId xmlns:a16="http://schemas.microsoft.com/office/drawing/2014/main" id="{0520B7E2-ABFB-114C-9434-B978ACAAE8EC}"/>
+              </a:ext>
+            </a:extLst>
+          </p:cNvPr>
+          <p:cNvPicPr>
+            <a:picLocks noChangeAspect="1"/>
+          </p:cNvPicPr>
+          <p:nvPr/>
+        </p:nvPicPr>
+        <p:blipFill>
+          <a:blip r:embed="rId2"/>
+          <a:stretch>
+            <a:fillRect/>
+          </a:stretch>
+        </p:blipFill>
+        <p:spPr>
+          <a:xfrm>
+            <a:off x="0" y="0"/>
+            <a:ext cx="12192000" cy="6858000"/>
+          </a:xfrm>
+          <a:prstGeom prst="rect">
+            <a:avLst/>
+          </a:prstGeom>
+        </p:spPr>
+      </p:pic>
+      <p:sp>
+        <p:nvSpPr>
+          <p:cNvPr id="4" name="Title 3"/>
+          <p:cNvSpPr>
+            <a:spLocks noGrp="1"/>
+          </p:cNvSpPr>
+          <p:nvPr>
+            <p:ph type="title"/>
+          </p:nvPr>
+        </p:nvSpPr>
+        <p:spPr>
+          <a:xfrm>
+            <a:off x="4063042" y="365125"/>
+            <a:ext cx="7290758" cy="1325563"/>
+          </a:xfrm>
+        </p:spPr>
+        <p:txBody>
+          <a:bodyPr/>
+          <a:lstStyle/>
+          <a:p>
+            <a:r>
+              <a:rPr lang="en-US" dirty="0" err="1"/>
+              <a:t>Ingénieur</a:t>
+            </a:r>
+            <a:r>
+              <a:rPr lang="en-US" dirty="0"/>
+              <a:t> </a:t>
+            </a:r>
+            <a:r>
+              <a:rPr lang="en-US" dirty="0" err="1"/>
+              <a:t>Sécurité</a:t>
+            </a:r>
+            <a:endParaRPr lang="en-US" dirty="0"/>
+          </a:p>
+        </p:txBody>
+      </p:sp>
+      <p:sp>
+        <p:nvSpPr>
+          <p:cNvPr id="6" name="Content Placeholder 5"/>
+          <p:cNvSpPr>
+            <a:spLocks noGrp="1"/>
+          </p:cNvSpPr>
+          <p:nvPr>
+            <p:ph idx="1"/>
+          </p:nvPr>
+        </p:nvSpPr>
+        <p:spPr>
+          <a:xfrm>
+            <a:off x="4063042" y="1825625"/>
+            <a:ext cx="7290758" cy="4351338"/>
+          </a:xfrm>
+        </p:spPr>
+        <p:txBody>
+          <a:bodyPr>
+            <a:normAutofit lnSpcReduction="10000"/>
+          </a:bodyPr>
+          <a:lstStyle/>
+          <a:p>
+            <a:r>
+              <a:rPr lang="fr-FR" dirty="0"/>
+              <a:t>Un ingénieur en cybersécurité est un professionnel chargé de protéger l'infrastructure informatique (y compris les réseaux, le matériel et les logiciels) contre une gamme d'activités criminelles.</a:t>
+            </a:r>
+          </a:p>
+          <a:p>
+            <a:r>
+              <a:rPr lang="fr-FR" dirty="0"/>
+              <a:t>Surveillez les réseaux et les systèmes, détectez les menaces de sécurité (`` événements ''), analysez et évaluez les alarmes et signalez les menaces, les tentatives d'intrusion et les fausses alarmes, en les résolvant ou en les augmentant, selon la gravité. </a:t>
+            </a:r>
+            <a:endParaRPr lang="en-US" dirty="0"/>
+          </a:p>
+          <a:p>
+            <a:endParaRPr lang="en-US" dirty="0"/>
+          </a:p>
+        </p:txBody>
+      </p:sp>
+    </p:spTree>
+    <p:extLst>
+      <p:ext uri="{BB962C8B-B14F-4D97-AF65-F5344CB8AC3E}">
+        <p14:creationId xmlns:p14="http://schemas.microsoft.com/office/powerpoint/2010/main" val="1398404491"/>
+      </p:ext>
+    </p:extLst>
+  </p:cSld>
+  <p:clrMapOvr>
+    <a:masterClrMapping/>
+  </p:clrMapOvr>
+</p:sld>
+</file>
+
+<file path=ppt/slides/slide33.xml><?xml version="1.0" encoding="utf-8"?>
+<p:sld xmlns:a="http://schemas.openxmlformats.org/drawingml/2006/main" xmlns:r="http://schemas.openxmlformats.org/officeDocument/2006/relationships" xmlns:p="http://schemas.openxmlformats.org/presentationml/2006/main">
+  <p:cSld>
+    <p:spTree>
+      <p:nvGrpSpPr>
+        <p:cNvPr id="1" name=""/>
+        <p:cNvGrpSpPr/>
+        <p:nvPr/>
+      </p:nvGrpSpPr>
+      <p:grpSpPr>
+        <a:xfrm>
+          <a:off x="0" y="0"/>
+          <a:ext cx="0" cy="0"/>
+          <a:chOff x="0" y="0"/>
+          <a:chExt cx="0" cy="0"/>
+        </a:xfrm>
+      </p:grpSpPr>
+      <p:pic>
+        <p:nvPicPr>
+          <p:cNvPr id="5" name="Picture 4">
+            <a:extLst>
+              <a:ext uri="{FF2B5EF4-FFF2-40B4-BE49-F238E27FC236}">
+                <a16:creationId xmlns:a16="http://schemas.microsoft.com/office/drawing/2014/main" id="{0520B7E2-ABFB-114C-9434-B978ACAAE8EC}"/>
+              </a:ext>
+            </a:extLst>
+          </p:cNvPr>
+          <p:cNvPicPr>
+            <a:picLocks noChangeAspect="1"/>
+          </p:cNvPicPr>
+          <p:nvPr/>
+        </p:nvPicPr>
+        <p:blipFill>
+          <a:blip r:embed="rId2"/>
+          <a:stretch>
+            <a:fillRect/>
+          </a:stretch>
+        </p:blipFill>
+        <p:spPr>
+          <a:xfrm>
+            <a:off x="0" y="0"/>
+            <a:ext cx="12192000" cy="6858000"/>
+          </a:xfrm>
+          <a:prstGeom prst="rect">
+            <a:avLst/>
+          </a:prstGeom>
+        </p:spPr>
+      </p:pic>
+      <p:sp>
+        <p:nvSpPr>
+          <p:cNvPr id="4" name="Title 3"/>
+          <p:cNvSpPr>
+            <a:spLocks noGrp="1"/>
+          </p:cNvSpPr>
+          <p:nvPr>
+            <p:ph type="title"/>
+          </p:nvPr>
+        </p:nvSpPr>
+        <p:spPr>
+          <a:xfrm>
+            <a:off x="4063042" y="365125"/>
+            <a:ext cx="7290758" cy="1325563"/>
+          </a:xfrm>
+        </p:spPr>
+        <p:txBody>
+          <a:bodyPr/>
+          <a:lstStyle/>
+          <a:p>
+            <a:r>
+              <a:rPr lang="en-US" dirty="0" err="1"/>
+              <a:t>Compétence</a:t>
+            </a:r>
+            <a:r>
+              <a:rPr lang="en-US" dirty="0"/>
+              <a:t> d’un </a:t>
+            </a:r>
+            <a:r>
+              <a:rPr lang="en-US" dirty="0" err="1"/>
+              <a:t>ingénieur</a:t>
+            </a:r>
+            <a:r>
+              <a:rPr lang="en-US" dirty="0"/>
+              <a:t> </a:t>
+            </a:r>
+            <a:r>
+              <a:rPr lang="en-US" dirty="0" err="1"/>
+              <a:t>Sécurité</a:t>
+            </a:r>
+            <a:endParaRPr lang="en-US" dirty="0"/>
+          </a:p>
+        </p:txBody>
+      </p:sp>
+      <p:sp>
+        <p:nvSpPr>
+          <p:cNvPr id="6" name="Content Placeholder 5"/>
+          <p:cNvSpPr>
+            <a:spLocks noGrp="1"/>
+          </p:cNvSpPr>
+          <p:nvPr>
+            <p:ph idx="1"/>
+          </p:nvPr>
+        </p:nvSpPr>
+        <p:spPr>
+          <a:xfrm>
+            <a:off x="4063042" y="1825625"/>
+            <a:ext cx="7290758" cy="4557921"/>
+          </a:xfrm>
+        </p:spPr>
+        <p:txBody>
+          <a:bodyPr>
+            <a:normAutofit fontScale="55000" lnSpcReduction="20000"/>
+          </a:bodyPr>
+          <a:lstStyle/>
+          <a:p>
+            <a:r>
+              <a:rPr lang="fr-FR" dirty="0"/>
+              <a:t>Se tenir au courant des derniers développements en matière de sécurité et de technologie.</a:t>
+            </a:r>
+          </a:p>
+          <a:p>
+            <a:r>
+              <a:rPr lang="fr-FR" dirty="0"/>
+              <a:t>Rechercher / évaluer les menaces de cybersécurité émergentes et les moyens de les gérer.</a:t>
+            </a:r>
+          </a:p>
+          <a:p>
+            <a:r>
+              <a:rPr lang="fr-FR" dirty="0"/>
+              <a:t>Planifiez la reprise après sinistre et créez des plans d'urgence en cas de faille de sécurité.</a:t>
+            </a:r>
+          </a:p>
+          <a:p>
+            <a:r>
+              <a:rPr lang="fr-FR" dirty="0"/>
+              <a:t>Surveillez les attaques, intrusions et activités inhabituelles, non autorisées ou illégales.</a:t>
+            </a:r>
+          </a:p>
+          <a:p>
+            <a:r>
+              <a:rPr lang="fr-FR" dirty="0"/>
+              <a:t>Utilisez des outils d'analyse avancés pour déterminer les modèles de menaces et les vulnérabilités émergentes.</a:t>
+            </a:r>
+          </a:p>
+          <a:p>
+            <a:r>
+              <a:rPr lang="fr-FR" dirty="0"/>
+              <a:t>Participez au «piratage éthique», par exemple en simulant des failles de sécurité.</a:t>
+            </a:r>
+          </a:p>
+          <a:p>
+            <a:r>
+              <a:rPr lang="fr-FR" dirty="0"/>
+              <a:t>Identifiez les faiblesses potentielles et mettez en œuvre des mesures, telles que les pare-feu et le chiffrement.</a:t>
+            </a:r>
+          </a:p>
+          <a:p>
+            <a:r>
+              <a:rPr lang="fr-FR" dirty="0"/>
+              <a:t>Examinez les alertes de sécurité et fournissez une réponse aux incidents.</a:t>
+            </a:r>
+          </a:p>
+          <a:p>
+            <a:r>
+              <a:rPr lang="fr-FR" dirty="0"/>
+              <a:t>Surveillez la gestion des identités et des accès, y compris la surveillance des abus d'autorisations par les utilisateurs système autorisés.</a:t>
+            </a:r>
+          </a:p>
+          <a:p>
+            <a:r>
+              <a:rPr lang="fr-FR" dirty="0"/>
+              <a:t>Tenir un registre des risques de sécurité de l'information et participer aux audits internes et externes relatifs à la sécurité de l'information.</a:t>
+            </a:r>
+          </a:p>
+          <a:p>
+            <a:r>
+              <a:rPr lang="fr-FR" dirty="0"/>
+              <a:t>Surveillez et répondez aux e-mails de «phishing» et aux activités de «pharming».</a:t>
+            </a:r>
+            <a:endParaRPr lang="en-US" dirty="0"/>
+          </a:p>
+        </p:txBody>
+      </p:sp>
+    </p:spTree>
+    <p:extLst>
+      <p:ext uri="{BB962C8B-B14F-4D97-AF65-F5344CB8AC3E}">
+        <p14:creationId xmlns:p14="http://schemas.microsoft.com/office/powerpoint/2010/main" val="1398404491"/>
+      </p:ext>
+    </p:extLst>
+  </p:cSld>
+  <p:clrMapOvr>
+    <a:masterClrMapping/>
+  </p:clrMapOvr>
+</p:sld>
+</file>
+
+<file path=ppt/slides/slide34.xml><?xml version="1.0" encoding="utf-8"?>
+<p:sld xmlns:a="http://schemas.openxmlformats.org/drawingml/2006/main" xmlns:r="http://schemas.openxmlformats.org/officeDocument/2006/relationships" xmlns:p="http://schemas.openxmlformats.org/presentationml/2006/main">
+  <p:cSld>
+    <p:spTree>
+      <p:nvGrpSpPr>
+        <p:cNvPr id="1" name=""/>
+        <p:cNvGrpSpPr/>
+        <p:nvPr/>
+      </p:nvGrpSpPr>
+      <p:grpSpPr>
+        <a:xfrm>
+          <a:off x="0" y="0"/>
+          <a:ext cx="0" cy="0"/>
+          <a:chOff x="0" y="0"/>
+          <a:chExt cx="0" cy="0"/>
+        </a:xfrm>
+      </p:grpSpPr>
+      <p:pic>
+        <p:nvPicPr>
+          <p:cNvPr id="5" name="Picture 4">
+            <a:extLst>
+              <a:ext uri="{FF2B5EF4-FFF2-40B4-BE49-F238E27FC236}">
+                <a16:creationId xmlns:a16="http://schemas.microsoft.com/office/drawing/2014/main" id="{0520B7E2-ABFB-114C-9434-B978ACAAE8EC}"/>
+              </a:ext>
+            </a:extLst>
+          </p:cNvPr>
+          <p:cNvPicPr>
+            <a:picLocks noChangeAspect="1"/>
+          </p:cNvPicPr>
+          <p:nvPr/>
+        </p:nvPicPr>
+        <p:blipFill>
+          <a:blip r:embed="rId2"/>
+          <a:stretch>
+            <a:fillRect/>
+          </a:stretch>
+        </p:blipFill>
+        <p:spPr>
+          <a:xfrm>
+            <a:off x="0" y="0"/>
+            <a:ext cx="12192000" cy="6858000"/>
+          </a:xfrm>
+          <a:prstGeom prst="rect">
+            <a:avLst/>
+          </a:prstGeom>
+        </p:spPr>
+      </p:pic>
+      <p:sp>
+        <p:nvSpPr>
+          <p:cNvPr id="4" name="Title 3"/>
+          <p:cNvSpPr>
+            <a:spLocks noGrp="1"/>
+          </p:cNvSpPr>
+          <p:nvPr>
+            <p:ph type="title"/>
+          </p:nvPr>
+        </p:nvSpPr>
+        <p:spPr>
+          <a:xfrm>
+            <a:off x="4063042" y="365125"/>
+            <a:ext cx="7290758" cy="1325563"/>
+          </a:xfrm>
+        </p:spPr>
+        <p:txBody>
+          <a:bodyPr/>
+          <a:lstStyle/>
+          <a:p>
+            <a:r>
+              <a:rPr lang="en-US" dirty="0" err="1"/>
+              <a:t>Ingénieur</a:t>
+            </a:r>
+            <a:r>
+              <a:rPr lang="en-US" dirty="0"/>
+              <a:t> Cloud</a:t>
+            </a:r>
+          </a:p>
+        </p:txBody>
+      </p:sp>
+      <p:sp>
+        <p:nvSpPr>
+          <p:cNvPr id="6" name="Content Placeholder 5"/>
+          <p:cNvSpPr>
+            <a:spLocks noGrp="1"/>
+          </p:cNvSpPr>
+          <p:nvPr>
+            <p:ph idx="1"/>
+          </p:nvPr>
+        </p:nvSpPr>
+        <p:spPr>
+          <a:xfrm>
+            <a:off x="4063042" y="1825625"/>
+            <a:ext cx="7290758" cy="4351338"/>
+          </a:xfrm>
+        </p:spPr>
+        <p:txBody>
+          <a:bodyPr>
+            <a:normAutofit fontScale="92500" lnSpcReduction="20000"/>
+          </a:bodyPr>
+          <a:lstStyle/>
+          <a:p>
+            <a:r>
+              <a:rPr lang="fr-FR" dirty="0"/>
+              <a:t>Expert en virtualisation des données en dehors de l'entreprise et leur stockage sécurisé sur des serveur distants.</a:t>
+            </a:r>
+          </a:p>
+          <a:p>
+            <a:r>
+              <a:rPr lang="fr-FR" dirty="0"/>
+              <a:t>il repère et scrute les propositions des fournisseurs de logiciels, des plates-formes de stockage, etc., étudie les solutions en regard des besoins, passe les appels d'offres, assure la migration.</a:t>
+            </a:r>
+          </a:p>
+          <a:p>
+            <a:r>
+              <a:rPr lang="fr-FR" dirty="0"/>
+              <a:t>Architecture Cloud : suit la mise en place et l'appropriation du nouveau système par les utilisateurs.</a:t>
+            </a:r>
+          </a:p>
+          <a:p>
+            <a:r>
+              <a:rPr lang="fr-FR" dirty="0"/>
+              <a:t>Implémentez des applications cloud, migrez les applications sur site existantes vers le cloud et déboguez les piles cloud.</a:t>
+            </a:r>
+            <a:endParaRPr lang="en-US" dirty="0"/>
+          </a:p>
+          <a:p>
+            <a:pPr>
+              <a:buNone/>
+            </a:pPr>
+            <a:endParaRPr lang="en-US" dirty="0"/>
+          </a:p>
+          <a:p>
+            <a:endParaRPr lang="en-US" dirty="0"/>
+          </a:p>
+        </p:txBody>
+      </p:sp>
+    </p:spTree>
+    <p:extLst>
+      <p:ext uri="{BB962C8B-B14F-4D97-AF65-F5344CB8AC3E}">
+        <p14:creationId xmlns:p14="http://schemas.microsoft.com/office/powerpoint/2010/main" val="1398404491"/>
+      </p:ext>
+    </p:extLst>
+  </p:cSld>
+  <p:clrMapOvr>
+    <a:masterClrMapping/>
+  </p:clrMapOvr>
+</p:sld>
+</file>
+
+<file path=ppt/slides/slide35.xml><?xml version="1.0" encoding="utf-8"?>
+<p:sld xmlns:a="http://schemas.openxmlformats.org/drawingml/2006/main" xmlns:r="http://schemas.openxmlformats.org/officeDocument/2006/relationships" xmlns:p="http://schemas.openxmlformats.org/presentationml/2006/main">
+  <p:cSld>
+    <p:spTree>
+      <p:nvGrpSpPr>
+        <p:cNvPr id="1" name=""/>
+        <p:cNvGrpSpPr/>
+        <p:nvPr/>
+      </p:nvGrpSpPr>
+      <p:grpSpPr>
+        <a:xfrm>
+          <a:off x="0" y="0"/>
+          <a:ext cx="0" cy="0"/>
+          <a:chOff x="0" y="0"/>
+          <a:chExt cx="0" cy="0"/>
+        </a:xfrm>
+      </p:grpSpPr>
+      <p:pic>
+        <p:nvPicPr>
+          <p:cNvPr id="5" name="Picture 4">
+            <a:extLst>
+              <a:ext uri="{FF2B5EF4-FFF2-40B4-BE49-F238E27FC236}">
+                <a16:creationId xmlns:a16="http://schemas.microsoft.com/office/drawing/2014/main" id="{0520B7E2-ABFB-114C-9434-B978ACAAE8EC}"/>
+              </a:ext>
+            </a:extLst>
+          </p:cNvPr>
+          <p:cNvPicPr>
+            <a:picLocks noChangeAspect="1"/>
+          </p:cNvPicPr>
+          <p:nvPr/>
+        </p:nvPicPr>
+        <p:blipFill>
+          <a:blip r:embed="rId2"/>
+          <a:stretch>
+            <a:fillRect/>
+          </a:stretch>
+        </p:blipFill>
+        <p:spPr>
+          <a:xfrm>
+            <a:off x="0" y="0"/>
+            <a:ext cx="12192000" cy="6858000"/>
+          </a:xfrm>
+          <a:prstGeom prst="rect">
+            <a:avLst/>
+          </a:prstGeom>
+        </p:spPr>
+      </p:pic>
+      <p:sp>
+        <p:nvSpPr>
+          <p:cNvPr id="4" name="Title 3"/>
+          <p:cNvSpPr>
+            <a:spLocks noGrp="1"/>
+          </p:cNvSpPr>
+          <p:nvPr>
+            <p:ph type="title"/>
+          </p:nvPr>
+        </p:nvSpPr>
+        <p:spPr>
+          <a:xfrm>
+            <a:off x="4063042" y="365125"/>
+            <a:ext cx="7290758" cy="1325563"/>
+          </a:xfrm>
+        </p:spPr>
+        <p:txBody>
+          <a:bodyPr/>
+          <a:lstStyle/>
+          <a:p>
+            <a:r>
+              <a:rPr lang="en-US" dirty="0" err="1"/>
+              <a:t>Compétence</a:t>
+            </a:r>
+            <a:r>
+              <a:rPr lang="en-US" dirty="0"/>
+              <a:t> d’un </a:t>
+            </a:r>
+            <a:r>
+              <a:rPr lang="en-US" dirty="0" err="1"/>
+              <a:t>Ingénieur</a:t>
+            </a:r>
+            <a:r>
+              <a:rPr lang="en-US" dirty="0"/>
+              <a:t> Cloud</a:t>
+            </a:r>
+          </a:p>
+        </p:txBody>
+      </p:sp>
+      <p:sp>
+        <p:nvSpPr>
+          <p:cNvPr id="6" name="Content Placeholder 5"/>
+          <p:cNvSpPr>
+            <a:spLocks noGrp="1"/>
+          </p:cNvSpPr>
+          <p:nvPr>
+            <p:ph idx="1"/>
+          </p:nvPr>
+        </p:nvSpPr>
+        <p:spPr>
+          <a:xfrm>
+            <a:off x="4063042" y="1825625"/>
+            <a:ext cx="7290758" cy="4557921"/>
+          </a:xfrm>
+        </p:spPr>
+        <p:txBody>
+          <a:bodyPr>
+            <a:normAutofit fontScale="55000" lnSpcReduction="20000"/>
+          </a:bodyPr>
+          <a:lstStyle/>
+          <a:p>
+            <a:r>
+              <a:rPr lang="fr-FR" dirty="0"/>
+              <a:t>Collaborez avec les équipes d'ingénierie et de développement pour évaluer et identifier les solutions cloud optimales.</a:t>
+            </a:r>
+          </a:p>
+          <a:p>
+            <a:r>
+              <a:rPr lang="fr-FR" dirty="0"/>
+              <a:t>Modifier et améliorer les systèmes existants.</a:t>
+            </a:r>
+          </a:p>
+          <a:p>
+            <a:r>
+              <a:rPr lang="fr-FR" dirty="0"/>
+              <a:t>Sensibiliser les équipes à la mise en œuvre des nouvelles technologies et initiatives cloud.</a:t>
+            </a:r>
+          </a:p>
+          <a:p>
+            <a:r>
+              <a:rPr lang="fr-FR" dirty="0"/>
+              <a:t>Concevez, développez et déployez des systèmes modulaires basés sur le cloud.</a:t>
+            </a:r>
+          </a:p>
+          <a:p>
+            <a:r>
+              <a:rPr lang="fr-FR" dirty="0"/>
+              <a:t>Développer et maintenir des solutions cloud conformément aux meilleures pratiques.</a:t>
+            </a:r>
+          </a:p>
+          <a:p>
+            <a:r>
+              <a:rPr lang="fr-FR" dirty="0"/>
+              <a:t>Assurer le fonctionnement efficace des fonctions de stockage et de traitement des données conformément aux politiques de sécurité de l'entreprise et aux meilleures pratiques en matière de sécurité cloud.</a:t>
+            </a:r>
+          </a:p>
+          <a:p>
+            <a:r>
+              <a:rPr lang="fr-FR" dirty="0"/>
+              <a:t>Identifiez, analysez et résolvez les vulnérabilités de l'infrastructure et les problèmes de déploiement d'applications.</a:t>
+            </a:r>
+          </a:p>
+          <a:p>
+            <a:r>
+              <a:rPr lang="fr-FR" dirty="0"/>
+              <a:t>Examiner régulièrement les systèmes existants et faire des recommandations d'amélioration.</a:t>
+            </a:r>
+          </a:p>
+          <a:p>
+            <a:r>
+              <a:rPr lang="fr-FR" dirty="0"/>
+              <a:t>Interagissez avec les clients, en fournissant une assistance cloud et en formulant des recommandations en fonction des besoins des clients.</a:t>
+            </a:r>
+            <a:endParaRPr lang="en-US" dirty="0"/>
+          </a:p>
+          <a:p>
+            <a:pPr>
+              <a:buNone/>
+            </a:pPr>
+            <a:endParaRPr lang="en-US" dirty="0"/>
+          </a:p>
+        </p:txBody>
+      </p:sp>
+    </p:spTree>
+    <p:extLst>
+      <p:ext uri="{BB962C8B-B14F-4D97-AF65-F5344CB8AC3E}">
+        <p14:creationId xmlns:p14="http://schemas.microsoft.com/office/powerpoint/2010/main" val="1398404491"/>
+      </p:ext>
+    </p:extLst>
+  </p:cSld>
+  <p:clrMapOvr>
+    <a:masterClrMapping/>
+  </p:clrMapOvr>
+</p:sld>
+</file>
+
+<file path=ppt/slides/slide36.xml><?xml version="1.0" encoding="utf-8"?>
+<p:sld xmlns:a="http://schemas.openxmlformats.org/drawingml/2006/main" xmlns:r="http://schemas.openxmlformats.org/officeDocument/2006/relationships" xmlns:p="http://schemas.openxmlformats.org/presentationml/2006/main">
+  <p:cSld>
+    <p:spTree>
+      <p:nvGrpSpPr>
+        <p:cNvPr id="1" name=""/>
+        <p:cNvGrpSpPr/>
+        <p:nvPr/>
+      </p:nvGrpSpPr>
+      <p:grpSpPr>
+        <a:xfrm>
+          <a:off x="0" y="0"/>
+          <a:ext cx="0" cy="0"/>
+          <a:chOff x="0" y="0"/>
+          <a:chExt cx="0" cy="0"/>
+        </a:xfrm>
+      </p:grpSpPr>
+      <p:pic>
+        <p:nvPicPr>
+          <p:cNvPr id="5" name="Picture 4">
+            <a:extLst>
+              <a:ext uri="{FF2B5EF4-FFF2-40B4-BE49-F238E27FC236}">
+                <a16:creationId xmlns:a16="http://schemas.microsoft.com/office/drawing/2014/main" id="{0520B7E2-ABFB-114C-9434-B978ACAAE8EC}"/>
+              </a:ext>
+            </a:extLst>
+          </p:cNvPr>
+          <p:cNvPicPr>
+            <a:picLocks noChangeAspect="1"/>
+          </p:cNvPicPr>
+          <p:nvPr/>
+        </p:nvPicPr>
+        <p:blipFill>
+          <a:blip r:embed="rId2"/>
+          <a:stretch>
+            <a:fillRect/>
+          </a:stretch>
+        </p:blipFill>
+        <p:spPr>
+          <a:xfrm>
+            <a:off x="0" y="0"/>
+            <a:ext cx="12192000" cy="6858000"/>
+          </a:xfrm>
+          <a:prstGeom prst="rect">
+            <a:avLst/>
+          </a:prstGeom>
+        </p:spPr>
+      </p:pic>
+      <p:sp>
+        <p:nvSpPr>
+          <p:cNvPr id="4" name="Title 3"/>
+          <p:cNvSpPr>
+            <a:spLocks noGrp="1"/>
+          </p:cNvSpPr>
+          <p:nvPr>
+            <p:ph type="title"/>
+          </p:nvPr>
+        </p:nvSpPr>
+        <p:spPr>
+          <a:xfrm>
+            <a:off x="4063042" y="365125"/>
+            <a:ext cx="7290758" cy="1325563"/>
+          </a:xfrm>
+        </p:spPr>
+        <p:txBody>
+          <a:bodyPr>
+            <a:normAutofit fontScale="90000"/>
+          </a:bodyPr>
+          <a:lstStyle/>
+          <a:p>
+            <a:r>
+              <a:rPr lang="en-US" dirty="0" err="1"/>
+              <a:t>Quelques</a:t>
+            </a:r>
+            <a:r>
+              <a:rPr lang="en-US" dirty="0"/>
+              <a:t> </a:t>
+            </a:r>
+            <a:r>
+              <a:rPr lang="en-US" dirty="0" err="1"/>
+              <a:t>compétences</a:t>
+            </a:r>
+            <a:r>
+              <a:rPr lang="en-US" dirty="0"/>
+              <a:t> techniques d’un </a:t>
+            </a:r>
+            <a:r>
+              <a:rPr lang="en-US" dirty="0" err="1"/>
+              <a:t>Ingénieur</a:t>
+            </a:r>
+            <a:r>
+              <a:rPr lang="en-US" dirty="0"/>
+              <a:t> Cloud</a:t>
+            </a:r>
+          </a:p>
+        </p:txBody>
+      </p:sp>
+      <p:sp>
+        <p:nvSpPr>
+          <p:cNvPr id="6" name="Content Placeholder 5"/>
+          <p:cNvSpPr>
+            <a:spLocks noGrp="1"/>
+          </p:cNvSpPr>
+          <p:nvPr>
+            <p:ph idx="1"/>
+          </p:nvPr>
+        </p:nvSpPr>
+        <p:spPr>
+          <a:xfrm>
+            <a:off x="4063042" y="1825625"/>
+            <a:ext cx="7290758" cy="4557921"/>
+          </a:xfrm>
+        </p:spPr>
+        <p:txBody>
+          <a:bodyPr>
+            <a:normAutofit/>
+          </a:bodyPr>
+          <a:lstStyle/>
+          <a:p>
+            <a:pPr marL="0" marR="0">
+              <a:spcBef>
+                <a:spcPts val="0"/>
+              </a:spcBef>
+              <a:spcAft>
+                <a:spcPts val="0"/>
+              </a:spcAft>
+            </a:pPr>
+            <a:r>
+              <a:rPr lang="fr-FR" sz="1800" dirty="0">
+                <a:effectLst/>
+                <a:latin typeface="Calibri" panose="020F0502020204030204" pitchFamily="34" charset="0"/>
+              </a:rPr>
+              <a:t>Maitrise des OS Linux et Windows. </a:t>
+            </a:r>
+          </a:p>
+          <a:p>
+            <a:pPr marL="0" marR="0">
+              <a:spcBef>
+                <a:spcPts val="0"/>
+              </a:spcBef>
+              <a:spcAft>
+                <a:spcPts val="0"/>
+              </a:spcAft>
+            </a:pPr>
+            <a:r>
+              <a:rPr lang="fr-FR" sz="1800" dirty="0">
+                <a:effectLst/>
+                <a:latin typeface="Calibri" panose="020F0502020204030204" pitchFamily="34" charset="0"/>
+              </a:rPr>
+              <a:t>Des outils de virtualisation (VirtualBox, </a:t>
+            </a:r>
+            <a:r>
+              <a:rPr lang="fr-FR" sz="1800" dirty="0" err="1">
+                <a:effectLst/>
+                <a:latin typeface="Calibri" panose="020F0502020204030204" pitchFamily="34" charset="0"/>
+              </a:rPr>
+              <a:t>hyper-v</a:t>
+            </a:r>
+            <a:r>
+              <a:rPr lang="fr-FR" sz="1800" dirty="0">
+                <a:effectLst/>
+                <a:latin typeface="Calibri" panose="020F0502020204030204" pitchFamily="34" charset="0"/>
+              </a:rPr>
+              <a:t>, </a:t>
+            </a:r>
+            <a:r>
+              <a:rPr lang="fr-FR" sz="1800" dirty="0" err="1">
+                <a:effectLst/>
+                <a:latin typeface="Calibri" panose="020F0502020204030204" pitchFamily="34" charset="0"/>
+              </a:rPr>
+              <a:t>Virtualbox</a:t>
+            </a:r>
+            <a:r>
+              <a:rPr lang="fr-FR" sz="1800" dirty="0">
+                <a:effectLst/>
+                <a:latin typeface="Calibri" panose="020F0502020204030204" pitchFamily="34" charset="0"/>
+              </a:rPr>
+              <a:t>).</a:t>
+            </a:r>
+          </a:p>
+          <a:p>
+            <a:pPr marL="0" marR="0">
+              <a:spcBef>
+                <a:spcPts val="0"/>
+              </a:spcBef>
+              <a:spcAft>
+                <a:spcPts val="0"/>
+              </a:spcAft>
+            </a:pPr>
+            <a:r>
+              <a:rPr lang="fr-FR" sz="1800" dirty="0">
+                <a:effectLst/>
+                <a:latin typeface="Calibri" panose="020F0502020204030204" pitchFamily="34" charset="0"/>
+              </a:rPr>
+              <a:t>Compétences réseaux et télécom, du système de stockage et des bases de données.</a:t>
+            </a:r>
+          </a:p>
+          <a:p>
+            <a:pPr>
+              <a:spcBef>
+                <a:spcPts val="0"/>
+              </a:spcBef>
+              <a:spcAft>
+                <a:spcPts val="1200"/>
+              </a:spcAft>
+            </a:pPr>
+            <a:r>
+              <a:rPr lang="fr-FR" sz="1800" dirty="0">
+                <a:solidFill>
+                  <a:srgbClr val="000000"/>
+                </a:solidFill>
+                <a:effectLst/>
+                <a:latin typeface="Calibri" panose="020F0502020204030204" pitchFamily="34" charset="0"/>
+              </a:rPr>
+              <a:t>Connaissance des normes et procédures de sécurité et des outils associés.</a:t>
+            </a:r>
+          </a:p>
+          <a:p>
+            <a:pPr>
+              <a:buNone/>
+            </a:pPr>
+            <a:endParaRPr lang="en-US" dirty="0"/>
+          </a:p>
+        </p:txBody>
+      </p:sp>
+    </p:spTree>
+    <p:extLst>
+      <p:ext uri="{BB962C8B-B14F-4D97-AF65-F5344CB8AC3E}">
+        <p14:creationId xmlns:p14="http://schemas.microsoft.com/office/powerpoint/2010/main" val="3324016787"/>
+      </p:ext>
+    </p:extLst>
+  </p:cSld>
+  <p:clrMapOvr>
+    <a:masterClrMapping/>
+  </p:clrMapOvr>
+</p:sld>
+</file>
+
+<file path=ppt/slides/slide37.xml><?xml version="1.0" encoding="utf-8"?>
+<p:sld xmlns:a="http://schemas.openxmlformats.org/drawingml/2006/main" xmlns:r="http://schemas.openxmlformats.org/officeDocument/2006/relationships" xmlns:p="http://schemas.openxmlformats.org/presentationml/2006/main">
+  <p:cSld>
+    <p:spTree>
+      <p:nvGrpSpPr>
+        <p:cNvPr id="1" name=""/>
+        <p:cNvGrpSpPr/>
+        <p:nvPr/>
+      </p:nvGrpSpPr>
+      <p:grpSpPr>
+        <a:xfrm>
+          <a:off x="0" y="0"/>
+          <a:ext cx="0" cy="0"/>
+          <a:chOff x="0" y="0"/>
+          <a:chExt cx="0" cy="0"/>
+        </a:xfrm>
+      </p:grpSpPr>
+      <p:pic>
+        <p:nvPicPr>
+          <p:cNvPr id="5" name="Picture 4">
+            <a:extLst>
+              <a:ext uri="{FF2B5EF4-FFF2-40B4-BE49-F238E27FC236}">
+                <a16:creationId xmlns:a16="http://schemas.microsoft.com/office/drawing/2014/main" id="{0520B7E2-ABFB-114C-9434-B978ACAAE8EC}"/>
+              </a:ext>
+            </a:extLst>
+          </p:cNvPr>
+          <p:cNvPicPr>
+            <a:picLocks noChangeAspect="1"/>
+          </p:cNvPicPr>
+          <p:nvPr/>
+        </p:nvPicPr>
+        <p:blipFill>
+          <a:blip r:embed="rId2"/>
+          <a:stretch>
+            <a:fillRect/>
+          </a:stretch>
+        </p:blipFill>
+        <p:spPr>
+          <a:xfrm>
+            <a:off x="0" y="0"/>
+            <a:ext cx="12192000" cy="6858000"/>
+          </a:xfrm>
+          <a:prstGeom prst="rect">
+            <a:avLst/>
+          </a:prstGeom>
+        </p:spPr>
+      </p:pic>
+      <p:sp>
+        <p:nvSpPr>
+          <p:cNvPr id="4" name="Title 3"/>
+          <p:cNvSpPr>
+            <a:spLocks noGrp="1"/>
+          </p:cNvSpPr>
+          <p:nvPr>
+            <p:ph type="title"/>
+          </p:nvPr>
+        </p:nvSpPr>
+        <p:spPr>
+          <a:xfrm>
+            <a:off x="4063042" y="365125"/>
+            <a:ext cx="7290758" cy="1325563"/>
+          </a:xfrm>
+        </p:spPr>
+        <p:txBody>
+          <a:bodyPr/>
+          <a:lstStyle/>
+          <a:p>
+            <a:r>
+              <a:rPr lang="en-US" dirty="0" err="1"/>
+              <a:t>Ingénieur</a:t>
+            </a:r>
+            <a:r>
+              <a:rPr lang="en-US" dirty="0"/>
+              <a:t> </a:t>
+            </a:r>
+            <a:r>
+              <a:rPr lang="en-US" dirty="0" err="1"/>
+              <a:t>Système</a:t>
+            </a:r>
+            <a:endParaRPr lang="en-US" dirty="0"/>
+          </a:p>
+        </p:txBody>
+      </p:sp>
+      <p:sp>
+        <p:nvSpPr>
+          <p:cNvPr id="6" name="Content Placeholder 5"/>
+          <p:cNvSpPr>
+            <a:spLocks noGrp="1"/>
+          </p:cNvSpPr>
+          <p:nvPr>
+            <p:ph idx="1"/>
+          </p:nvPr>
+        </p:nvSpPr>
+        <p:spPr>
+          <a:xfrm>
+            <a:off x="4063042" y="1825625"/>
+            <a:ext cx="7290758" cy="4557921"/>
+          </a:xfrm>
+        </p:spPr>
+        <p:txBody>
+          <a:bodyPr>
+            <a:normAutofit fontScale="85000" lnSpcReduction="20000"/>
+          </a:bodyPr>
+          <a:lstStyle/>
+          <a:p>
+            <a:r>
+              <a:rPr lang="fr-FR" dirty="0"/>
+              <a:t>L'ingénieur système est un expert du matériel et des logiciels. Il analyse, optimise et sécurise l'outil informatique de son entreprise afin que tous les utilisateurs disposent d'une installation adaptée et performante. En cas d'incidents complexes, il examine de bout en bout la situation pour effectuer au mieux les réparations qui s'imposent. Il assure une veille technologique permanente afin d'anticiper les évolutions des systèmes.</a:t>
+            </a:r>
+          </a:p>
+          <a:p>
+            <a:endParaRPr lang="fr-FR" dirty="0"/>
+          </a:p>
+          <a:p>
+            <a:r>
+              <a:rPr lang="fr-FR" dirty="0"/>
+              <a:t>Cet expert comprend les besoins des utilisateurs, conseille les développeurs, entretient des relations régulières avec les constructeurs, les éditeurs de logiciels, les opérateurs. Il est rigoureux et fait preuve de méthode. Maîtriser l'anglais est indispensable.</a:t>
+            </a:r>
+            <a:endParaRPr lang="en-US" dirty="0"/>
+          </a:p>
+        </p:txBody>
+      </p:sp>
+    </p:spTree>
+    <p:extLst>
+      <p:ext uri="{BB962C8B-B14F-4D97-AF65-F5344CB8AC3E}">
+        <p14:creationId xmlns:p14="http://schemas.microsoft.com/office/powerpoint/2010/main" val="2367578517"/>
+      </p:ext>
+    </p:extLst>
+  </p:cSld>
+  <p:clrMapOvr>
+    <a:masterClrMapping/>
+  </p:clrMapOvr>
+</p:sld>
+</file>
+
+<file path=ppt/slides/slide38.xml><?xml version="1.0" encoding="utf-8"?>
+<p:sld xmlns:a="http://schemas.openxmlformats.org/drawingml/2006/main" xmlns:r="http://schemas.openxmlformats.org/officeDocument/2006/relationships" xmlns:p="http://schemas.openxmlformats.org/presentationml/2006/main">
+  <p:cSld>
+    <p:spTree>
+      <p:nvGrpSpPr>
+        <p:cNvPr id="1" name=""/>
+        <p:cNvGrpSpPr/>
+        <p:nvPr/>
+      </p:nvGrpSpPr>
+      <p:grpSpPr>
+        <a:xfrm>
+          <a:off x="0" y="0"/>
+          <a:ext cx="0" cy="0"/>
+          <a:chOff x="0" y="0"/>
+          <a:chExt cx="0" cy="0"/>
+        </a:xfrm>
+      </p:grpSpPr>
+      <p:pic>
+        <p:nvPicPr>
+          <p:cNvPr id="5" name="Picture 4">
+            <a:extLst>
+              <a:ext uri="{FF2B5EF4-FFF2-40B4-BE49-F238E27FC236}">
+                <a16:creationId xmlns:a16="http://schemas.microsoft.com/office/drawing/2014/main" id="{0520B7E2-ABFB-114C-9434-B978ACAAE8EC}"/>
+              </a:ext>
+            </a:extLst>
+          </p:cNvPr>
+          <p:cNvPicPr>
+            <a:picLocks noChangeAspect="1"/>
+          </p:cNvPicPr>
+          <p:nvPr/>
+        </p:nvPicPr>
+        <p:blipFill>
+          <a:blip r:embed="rId2"/>
+          <a:stretch>
+            <a:fillRect/>
+          </a:stretch>
+        </p:blipFill>
+        <p:spPr>
+          <a:xfrm>
+            <a:off x="0" y="0"/>
+            <a:ext cx="12192000" cy="6858000"/>
+          </a:xfrm>
+          <a:prstGeom prst="rect">
+            <a:avLst/>
+          </a:prstGeom>
+        </p:spPr>
+      </p:pic>
+      <p:sp>
+        <p:nvSpPr>
+          <p:cNvPr id="4" name="Title 3"/>
+          <p:cNvSpPr>
+            <a:spLocks noGrp="1"/>
+          </p:cNvSpPr>
+          <p:nvPr>
+            <p:ph type="title"/>
+          </p:nvPr>
+        </p:nvSpPr>
+        <p:spPr>
+          <a:xfrm>
+            <a:off x="4063042" y="365125"/>
+            <a:ext cx="7290758" cy="1325563"/>
+          </a:xfrm>
+        </p:spPr>
+        <p:txBody>
+          <a:bodyPr/>
+          <a:lstStyle/>
+          <a:p>
+            <a:r>
+              <a:rPr lang="en-US" dirty="0" err="1"/>
+              <a:t>Compétences</a:t>
+            </a:r>
+            <a:r>
+              <a:rPr lang="en-US" dirty="0"/>
+              <a:t> </a:t>
+            </a:r>
+            <a:r>
+              <a:rPr lang="en-US" dirty="0" err="1"/>
+              <a:t>Ingénieur</a:t>
+            </a:r>
+            <a:r>
+              <a:rPr lang="en-US" dirty="0"/>
+              <a:t> </a:t>
+            </a:r>
+            <a:r>
+              <a:rPr lang="en-US" dirty="0" err="1"/>
+              <a:t>Système</a:t>
+            </a:r>
+            <a:endParaRPr lang="en-US" dirty="0"/>
+          </a:p>
+        </p:txBody>
+      </p:sp>
+      <p:sp>
+        <p:nvSpPr>
+          <p:cNvPr id="6" name="Content Placeholder 5"/>
+          <p:cNvSpPr>
+            <a:spLocks noGrp="1"/>
+          </p:cNvSpPr>
+          <p:nvPr>
+            <p:ph idx="1"/>
+          </p:nvPr>
+        </p:nvSpPr>
+        <p:spPr>
+          <a:xfrm>
+            <a:off x="4063042" y="1825625"/>
+            <a:ext cx="7290758" cy="4557921"/>
+          </a:xfrm>
+        </p:spPr>
+        <p:txBody>
+          <a:bodyPr>
+            <a:normAutofit fontScale="55000" lnSpcReduction="20000"/>
+          </a:bodyPr>
+          <a:lstStyle/>
+          <a:p>
+            <a:r>
+              <a:rPr lang="fr-FR" dirty="0"/>
+              <a:t>Maîtrise voire expertise des logiciels de l’infrastructure technique notamment des systèmes d’exploitation (UNIX, LINUX, MVS, Windows…), et des interprétateurs de commandes (Shell) pour diagnostiquer et réparer les dysfonctionnements</a:t>
+            </a:r>
+          </a:p>
+          <a:p>
+            <a:r>
+              <a:rPr lang="fr-FR" dirty="0"/>
+              <a:t>Bonne maîtrise des technologies Internet : protocoles de sécurité, protocoles Internet…</a:t>
+            </a:r>
+          </a:p>
+          <a:p>
+            <a:r>
+              <a:rPr lang="fr-FR" dirty="0"/>
+              <a:t>Bonne connaissance de l’architecture et des fonctionnalités du SI de l’entreprise</a:t>
+            </a:r>
+          </a:p>
+          <a:p>
+            <a:r>
+              <a:rPr lang="fr-FR" dirty="0"/>
+              <a:t>Connaissance des principaux constructeurs et éditeurs prestataires du marché et notamment de l’offre hardware du marché</a:t>
+            </a:r>
+          </a:p>
+          <a:p>
+            <a:r>
+              <a:rPr lang="fr-FR" dirty="0"/>
+              <a:t>Connaissance des normes ITIL ou ISO (si l’entreprise dispose d’une certification)</a:t>
+            </a:r>
+          </a:p>
+          <a:p>
+            <a:r>
+              <a:rPr lang="fr-FR" dirty="0"/>
+              <a:t>Connaissance des bases de données (Oracle, </a:t>
+            </a:r>
+            <a:r>
+              <a:rPr lang="fr-FR" dirty="0" err="1"/>
+              <a:t>SQLServer</a:t>
+            </a:r>
+            <a:r>
+              <a:rPr lang="fr-FR" dirty="0"/>
+              <a:t>…) et des serveurs de messagerie</a:t>
+            </a:r>
+          </a:p>
+          <a:p>
+            <a:r>
+              <a:rPr lang="fr-FR" dirty="0"/>
+              <a:t>Connaissance des normes et procédures de sécurité et des outils associés</a:t>
+            </a:r>
+          </a:p>
+          <a:p>
+            <a:r>
+              <a:rPr lang="fr-FR" dirty="0"/>
+              <a:t>Bonne culture informatique : principaux langages et outils de développement de l’entreprise</a:t>
+            </a:r>
+          </a:p>
+          <a:p>
+            <a:r>
+              <a:rPr lang="fr-FR" dirty="0"/>
+              <a:t>Bonne connaissance des clients internes de la DSI : les principaux métiers de l’entreprise</a:t>
+            </a:r>
+          </a:p>
+          <a:p>
+            <a:r>
+              <a:rPr lang="fr-FR" dirty="0"/>
+              <a:t>Maîtrise de l’anglais technique</a:t>
+            </a:r>
+          </a:p>
+        </p:txBody>
+      </p:sp>
+    </p:spTree>
+    <p:extLst>
+      <p:ext uri="{BB962C8B-B14F-4D97-AF65-F5344CB8AC3E}">
+        <p14:creationId xmlns:p14="http://schemas.microsoft.com/office/powerpoint/2010/main" val="687318836"/>
+      </p:ext>
+    </p:extLst>
+  </p:cSld>
+  <p:clrMapOvr>
+    <a:masterClrMapping/>
+  </p:clrMapOvr>
+</p:sld>
+</file>
+
+<file path=ppt/slides/slide39.xml><?xml version="1.0" encoding="utf-8"?>
+<p:sld xmlns:a="http://schemas.openxmlformats.org/drawingml/2006/main" xmlns:r="http://schemas.openxmlformats.org/officeDocument/2006/relationships" xmlns:p="http://schemas.openxmlformats.org/presentationml/2006/main">
+  <p:cSld>
+    <p:spTree>
+      <p:nvGrpSpPr>
+        <p:cNvPr id="1" name=""/>
+        <p:cNvGrpSpPr/>
+        <p:nvPr/>
+      </p:nvGrpSpPr>
+      <p:grpSpPr>
+        <a:xfrm>
+          <a:off x="0" y="0"/>
+          <a:ext cx="0" cy="0"/>
+          <a:chOff x="0" y="0"/>
+          <a:chExt cx="0" cy="0"/>
+        </a:xfrm>
+      </p:grpSpPr>
+      <p:pic>
+        <p:nvPicPr>
+          <p:cNvPr id="5" name="Picture 4">
+            <a:extLst>
+              <a:ext uri="{FF2B5EF4-FFF2-40B4-BE49-F238E27FC236}">
+                <a16:creationId xmlns:a16="http://schemas.microsoft.com/office/drawing/2014/main" id="{0520B7E2-ABFB-114C-9434-B978ACAAE8EC}"/>
+              </a:ext>
+            </a:extLst>
+          </p:cNvPr>
+          <p:cNvPicPr>
+            <a:picLocks noChangeAspect="1"/>
+          </p:cNvPicPr>
+          <p:nvPr/>
+        </p:nvPicPr>
+        <p:blipFill>
+          <a:blip r:embed="rId2"/>
+          <a:stretch>
+            <a:fillRect/>
+          </a:stretch>
+        </p:blipFill>
+        <p:spPr>
+          <a:xfrm>
+            <a:off x="0" y="-347240"/>
+            <a:ext cx="12192000" cy="6858000"/>
+          </a:xfrm>
+          <a:prstGeom prst="rect">
+            <a:avLst/>
+          </a:prstGeom>
+        </p:spPr>
+      </p:pic>
+      <p:sp>
+        <p:nvSpPr>
+          <p:cNvPr id="4" name="Title 3"/>
+          <p:cNvSpPr>
+            <a:spLocks noGrp="1"/>
+          </p:cNvSpPr>
+          <p:nvPr>
+            <p:ph type="title"/>
+          </p:nvPr>
+        </p:nvSpPr>
+        <p:spPr>
+          <a:xfrm>
+            <a:off x="4063042" y="365125"/>
+            <a:ext cx="7290758" cy="1325563"/>
+          </a:xfrm>
+        </p:spPr>
+        <p:txBody>
+          <a:bodyPr/>
+          <a:lstStyle/>
+          <a:p>
+            <a:r>
+              <a:rPr lang="en-US" dirty="0" err="1"/>
+              <a:t>Ingénieur</a:t>
+            </a:r>
+            <a:r>
+              <a:rPr lang="en-US" dirty="0"/>
+              <a:t> </a:t>
+            </a:r>
+            <a:r>
+              <a:rPr lang="en-US" dirty="0" err="1"/>
+              <a:t>DevSecOps</a:t>
+            </a:r>
+            <a:endParaRPr lang="en-US" dirty="0"/>
+          </a:p>
+        </p:txBody>
+      </p:sp>
+      <p:sp>
+        <p:nvSpPr>
+          <p:cNvPr id="6" name="Content Placeholder 5"/>
+          <p:cNvSpPr>
+            <a:spLocks noGrp="1"/>
+          </p:cNvSpPr>
+          <p:nvPr>
+            <p:ph idx="1"/>
+          </p:nvPr>
+        </p:nvSpPr>
+        <p:spPr>
+          <a:xfrm>
+            <a:off x="4063042" y="1825625"/>
+            <a:ext cx="7290758" cy="4351338"/>
+          </a:xfrm>
+        </p:spPr>
+        <p:txBody>
+          <a:bodyPr>
+            <a:normAutofit fontScale="92500" lnSpcReduction="10000"/>
+          </a:bodyPr>
+          <a:lstStyle/>
+          <a:p>
+            <a:pPr fontAlgn="base"/>
+            <a:r>
+              <a:rPr lang="fr-FR" dirty="0" err="1"/>
+              <a:t>DevSecOps</a:t>
+            </a:r>
+            <a:r>
+              <a:rPr lang="fr-FR" dirty="0"/>
+              <a:t>: méthode de travail collaboratif faisant le lien entre les équipes de sécurité et d’exploitation.</a:t>
+            </a:r>
+          </a:p>
+          <a:p>
+            <a:pPr fontAlgn="base"/>
+            <a:r>
+              <a:rPr lang="fr-FR" dirty="0"/>
+              <a:t>Objectif principal: limiter les risques dans la mesure où la sécurité est « intégrée » à toutes les étapes des projets DevOps.</a:t>
+            </a:r>
+          </a:p>
+          <a:p>
+            <a:pPr fontAlgn="base"/>
+            <a:r>
+              <a:rPr lang="fr-FR" dirty="0"/>
+              <a:t>Implémentation de la sécurité comme élément fondamental de tous les aspects d’une organisation et en fait la responsabilité de l’ensemble des équipes. Les équipes de sécurité et d’exploitation sont donc unifiées pour maximiser la sécurité en limitant l’impact sur l’efficacité.</a:t>
+            </a:r>
+            <a:endParaRPr lang="en-US" dirty="0"/>
+          </a:p>
+        </p:txBody>
+      </p:sp>
+    </p:spTree>
+    <p:extLst>
+      <p:ext uri="{BB962C8B-B14F-4D97-AF65-F5344CB8AC3E}">
+        <p14:creationId xmlns:p14="http://schemas.microsoft.com/office/powerpoint/2010/main" val="1660568598"/>
+      </p:ext>
+    </p:extLst>
+  </p:cSld>
+  <p:clrMapOvr>
+    <a:masterClrMapping/>
+  </p:clrMapOvr>
+</p:sld>
+</file>
+
 <file path=ppt/slides/slide4.xml><?xml version="1.0" encoding="utf-8"?>
 <p:sld xmlns:a="http://schemas.openxmlformats.org/drawingml/2006/main" xmlns:r="http://schemas.openxmlformats.org/officeDocument/2006/relationships" xmlns:p="http://schemas.openxmlformats.org/presentationml/2006/main">
   <p:cSld>
@@ -7603,7 +9715,7 @@
         </p:spPr>
         <p:txBody>
           <a:bodyPr>
-            <a:normAutofit lnSpcReduction="10000"/>
+            <a:normAutofit/>
           </a:bodyPr>
           <a:lstStyle/>
           <a:p>
@@ -7637,12 +9749,6 @@
           <a:p>
             <a:r>
               <a:rPr lang="fr-FR" dirty="0"/>
-              <a:t>Tout profil d'emploi dans le domaine des technologies de l'information relève de l'une ou l'autre des deux branches. </a:t>
-            </a:r>
-          </a:p>
-          <a:p>
-            <a:r>
-              <a:rPr lang="fr-FR" dirty="0"/>
               <a:t>Dans cette présentation, nous nous concentrons sur les principaux profils d'emploi dans l'industrie du </a:t>
             </a:r>
             <a:r>
@@ -7664,6 +9770,681 @@
     <p:extLst>
       <p:ext uri="{BB962C8B-B14F-4D97-AF65-F5344CB8AC3E}">
         <p14:creationId xmlns:p14="http://schemas.microsoft.com/office/powerpoint/2010/main" val="1398404491"/>
+      </p:ext>
+    </p:extLst>
+  </p:cSld>
+  <p:clrMapOvr>
+    <a:masterClrMapping/>
+  </p:clrMapOvr>
+</p:sld>
+</file>
+
+<file path=ppt/slides/slide40.xml><?xml version="1.0" encoding="utf-8"?>
+<p:sld xmlns:a="http://schemas.openxmlformats.org/drawingml/2006/main" xmlns:r="http://schemas.openxmlformats.org/officeDocument/2006/relationships" xmlns:p="http://schemas.openxmlformats.org/presentationml/2006/main">
+  <p:cSld>
+    <p:spTree>
+      <p:nvGrpSpPr>
+        <p:cNvPr id="1" name=""/>
+        <p:cNvGrpSpPr/>
+        <p:nvPr/>
+      </p:nvGrpSpPr>
+      <p:grpSpPr>
+        <a:xfrm>
+          <a:off x="0" y="0"/>
+          <a:ext cx="0" cy="0"/>
+          <a:chOff x="0" y="0"/>
+          <a:chExt cx="0" cy="0"/>
+        </a:xfrm>
+      </p:grpSpPr>
+      <p:pic>
+        <p:nvPicPr>
+          <p:cNvPr id="5" name="Picture 4">
+            <a:extLst>
+              <a:ext uri="{FF2B5EF4-FFF2-40B4-BE49-F238E27FC236}">
+                <a16:creationId xmlns:a16="http://schemas.microsoft.com/office/drawing/2014/main" id="{0520B7E2-ABFB-114C-9434-B978ACAAE8EC}"/>
+              </a:ext>
+            </a:extLst>
+          </p:cNvPr>
+          <p:cNvPicPr>
+            <a:picLocks noChangeAspect="1"/>
+          </p:cNvPicPr>
+          <p:nvPr/>
+        </p:nvPicPr>
+        <p:blipFill>
+          <a:blip r:embed="rId2"/>
+          <a:stretch>
+            <a:fillRect/>
+          </a:stretch>
+        </p:blipFill>
+        <p:spPr>
+          <a:xfrm>
+            <a:off x="0" y="0"/>
+            <a:ext cx="12192000" cy="6858000"/>
+          </a:xfrm>
+          <a:prstGeom prst="rect">
+            <a:avLst/>
+          </a:prstGeom>
+        </p:spPr>
+      </p:pic>
+      <p:sp>
+        <p:nvSpPr>
+          <p:cNvPr id="4" name="Title 3"/>
+          <p:cNvSpPr>
+            <a:spLocks noGrp="1"/>
+          </p:cNvSpPr>
+          <p:nvPr>
+            <p:ph type="title"/>
+          </p:nvPr>
+        </p:nvSpPr>
+        <p:spPr>
+          <a:xfrm>
+            <a:off x="4063042" y="365125"/>
+            <a:ext cx="7290758" cy="1325563"/>
+          </a:xfrm>
+        </p:spPr>
+        <p:txBody>
+          <a:bodyPr/>
+          <a:lstStyle/>
+          <a:p>
+            <a:r>
+              <a:rPr lang="en-US" dirty="0" err="1"/>
+              <a:t>Compétence</a:t>
+            </a:r>
+            <a:r>
+              <a:rPr lang="en-US" dirty="0"/>
+              <a:t> d’un </a:t>
+            </a:r>
+            <a:r>
+              <a:rPr lang="en-US" dirty="0" err="1"/>
+              <a:t>Ingénieur</a:t>
+            </a:r>
+            <a:r>
+              <a:rPr lang="en-US" dirty="0"/>
+              <a:t> </a:t>
+            </a:r>
+            <a:r>
+              <a:rPr lang="en-US" dirty="0" err="1"/>
+              <a:t>DevSecOps</a:t>
+            </a:r>
+            <a:endParaRPr lang="en-US" dirty="0"/>
+          </a:p>
+        </p:txBody>
+      </p:sp>
+      <p:sp>
+        <p:nvSpPr>
+          <p:cNvPr id="6" name="Content Placeholder 5"/>
+          <p:cNvSpPr>
+            <a:spLocks noGrp="1"/>
+          </p:cNvSpPr>
+          <p:nvPr>
+            <p:ph idx="1"/>
+          </p:nvPr>
+        </p:nvSpPr>
+        <p:spPr>
+          <a:xfrm>
+            <a:off x="4063042" y="1825625"/>
+            <a:ext cx="7290758" cy="4351338"/>
+          </a:xfrm>
+        </p:spPr>
+        <p:txBody>
+          <a:bodyPr>
+            <a:normAutofit fontScale="77500" lnSpcReduction="20000"/>
+          </a:bodyPr>
+          <a:lstStyle/>
+          <a:p>
+            <a:pPr fontAlgn="base"/>
+            <a:r>
+              <a:rPr lang="fr-FR" dirty="0"/>
+              <a:t>Le suivi des process</a:t>
+            </a:r>
+          </a:p>
+          <a:p>
+            <a:pPr fontAlgn="base"/>
+            <a:r>
+              <a:rPr lang="fr-FR" dirty="0"/>
+              <a:t>La rédaction des analyses de risques</a:t>
+            </a:r>
+          </a:p>
+          <a:p>
+            <a:pPr fontAlgn="base"/>
+            <a:r>
+              <a:rPr lang="fr-FR" dirty="0"/>
+              <a:t>La gestion des incidents</a:t>
+            </a:r>
+          </a:p>
+          <a:p>
+            <a:pPr fontAlgn="base"/>
+            <a:r>
+              <a:rPr lang="fr-FR" dirty="0"/>
+              <a:t>Les tests, la sélection et la mise en place de technologies, outillages et méthodes de travail</a:t>
+            </a:r>
+          </a:p>
+          <a:p>
+            <a:pPr fontAlgn="base"/>
+            <a:r>
+              <a:rPr lang="fr-FR" dirty="0"/>
+              <a:t>L’automatisation des contrôles de sécurité</a:t>
+            </a:r>
+          </a:p>
+          <a:p>
+            <a:pPr fontAlgn="base"/>
+            <a:r>
+              <a:rPr lang="fr-FR" dirty="0"/>
+              <a:t>La maintenance du système et du réseau informatique externe et interne de l’entreprise</a:t>
+            </a:r>
+          </a:p>
+          <a:p>
+            <a:pPr fontAlgn="base"/>
+            <a:r>
+              <a:rPr lang="fr-FR" dirty="0"/>
+              <a:t>Le contrôle et le management des opérations de sécurité</a:t>
+            </a:r>
+          </a:p>
+          <a:p>
+            <a:pPr fontAlgn="base"/>
+            <a:r>
+              <a:rPr lang="fr-FR" dirty="0"/>
+              <a:t>Plus largement, il participe à la construction d’une « culture sécurité » au sein de l’entreprise via l’accompagnement des différentes équipes et des clients dans la mise en place des bonnes pratiques de sécurité</a:t>
+            </a:r>
+            <a:endParaRPr lang="en-US" dirty="0"/>
+          </a:p>
+        </p:txBody>
+      </p:sp>
+    </p:spTree>
+    <p:extLst>
+      <p:ext uri="{BB962C8B-B14F-4D97-AF65-F5344CB8AC3E}">
+        <p14:creationId xmlns:p14="http://schemas.microsoft.com/office/powerpoint/2010/main" val="2690145923"/>
+      </p:ext>
+    </p:extLst>
+  </p:cSld>
+  <p:clrMapOvr>
+    <a:masterClrMapping/>
+  </p:clrMapOvr>
+</p:sld>
+</file>
+
+<file path=ppt/slides/slide41.xml><?xml version="1.0" encoding="utf-8"?>
+<p:sld xmlns:a="http://schemas.openxmlformats.org/drawingml/2006/main" xmlns:r="http://schemas.openxmlformats.org/officeDocument/2006/relationships" xmlns:p="http://schemas.openxmlformats.org/presentationml/2006/main">
+  <p:cSld>
+    <p:spTree>
+      <p:nvGrpSpPr>
+        <p:cNvPr id="1" name=""/>
+        <p:cNvGrpSpPr/>
+        <p:nvPr/>
+      </p:nvGrpSpPr>
+      <p:grpSpPr>
+        <a:xfrm>
+          <a:off x="0" y="0"/>
+          <a:ext cx="0" cy="0"/>
+          <a:chOff x="0" y="0"/>
+          <a:chExt cx="0" cy="0"/>
+        </a:xfrm>
+      </p:grpSpPr>
+      <p:pic>
+        <p:nvPicPr>
+          <p:cNvPr id="5" name="Picture 4">
+            <a:extLst>
+              <a:ext uri="{FF2B5EF4-FFF2-40B4-BE49-F238E27FC236}">
+                <a16:creationId xmlns:a16="http://schemas.microsoft.com/office/drawing/2014/main" id="{0520B7E2-ABFB-114C-9434-B978ACAAE8EC}"/>
+              </a:ext>
+            </a:extLst>
+          </p:cNvPr>
+          <p:cNvPicPr>
+            <a:picLocks noChangeAspect="1"/>
+          </p:cNvPicPr>
+          <p:nvPr/>
+        </p:nvPicPr>
+        <p:blipFill>
+          <a:blip r:embed="rId2"/>
+          <a:stretch>
+            <a:fillRect/>
+          </a:stretch>
+        </p:blipFill>
+        <p:spPr>
+          <a:xfrm>
+            <a:off x="0" y="0"/>
+            <a:ext cx="12192000" cy="6858000"/>
+          </a:xfrm>
+          <a:prstGeom prst="rect">
+            <a:avLst/>
+          </a:prstGeom>
+        </p:spPr>
+      </p:pic>
+      <p:sp>
+        <p:nvSpPr>
+          <p:cNvPr id="4" name="Title 3"/>
+          <p:cNvSpPr>
+            <a:spLocks noGrp="1"/>
+          </p:cNvSpPr>
+          <p:nvPr>
+            <p:ph type="title"/>
+          </p:nvPr>
+        </p:nvSpPr>
+        <p:spPr>
+          <a:xfrm>
+            <a:off x="4063042" y="365125"/>
+            <a:ext cx="7290758" cy="1325563"/>
+          </a:xfrm>
+        </p:spPr>
+        <p:txBody>
+          <a:bodyPr/>
+          <a:lstStyle/>
+          <a:p>
+            <a:r>
+              <a:rPr lang="en-US" dirty="0" err="1"/>
+              <a:t>DevOps</a:t>
+            </a:r>
+            <a:endParaRPr lang="en-US" dirty="0"/>
+          </a:p>
+        </p:txBody>
+      </p:sp>
+      <p:sp>
+        <p:nvSpPr>
+          <p:cNvPr id="6" name="Content Placeholder 5"/>
+          <p:cNvSpPr>
+            <a:spLocks noGrp="1"/>
+          </p:cNvSpPr>
+          <p:nvPr>
+            <p:ph idx="1"/>
+          </p:nvPr>
+        </p:nvSpPr>
+        <p:spPr>
+          <a:xfrm>
+            <a:off x="4063042" y="1825625"/>
+            <a:ext cx="7290758" cy="4351338"/>
+          </a:xfrm>
+        </p:spPr>
+        <p:txBody>
+          <a:bodyPr>
+            <a:normAutofit lnSpcReduction="10000"/>
+          </a:bodyPr>
+          <a:lstStyle/>
+          <a:p>
+            <a:r>
+              <a:rPr lang="fr-FR" dirty="0"/>
+              <a:t>Le DevOps est un ensemble de pratiques / combinaison </a:t>
+            </a:r>
+            <a:r>
+              <a:rPr lang="fr-FR" dirty="0" err="1"/>
+              <a:t>interfonctionnelle</a:t>
+            </a:r>
+            <a:r>
+              <a:rPr lang="fr-FR" dirty="0"/>
+              <a:t> qui combine le développement logiciel (Dev) et les opérations informatiques (Ops).</a:t>
+            </a:r>
+          </a:p>
+          <a:p>
+            <a:r>
+              <a:rPr lang="fr-FR" dirty="0"/>
+              <a:t>Il vise à raccourcir le cycle de vie du développement et toutes les opérations informatiques liées à un logiciel en intégrant continuellement et automatiquement les mises à jour et les changements à travers le processus d’ intégration continue (CI) et déploiement continu (CD). </a:t>
+            </a:r>
+            <a:endParaRPr lang="en-US" dirty="0"/>
+          </a:p>
+        </p:txBody>
+      </p:sp>
+    </p:spTree>
+    <p:extLst>
+      <p:ext uri="{BB962C8B-B14F-4D97-AF65-F5344CB8AC3E}">
+        <p14:creationId xmlns:p14="http://schemas.microsoft.com/office/powerpoint/2010/main" val="1398404491"/>
+      </p:ext>
+    </p:extLst>
+  </p:cSld>
+  <p:clrMapOvr>
+    <a:masterClrMapping/>
+  </p:clrMapOvr>
+</p:sld>
+</file>
+
+<file path=ppt/slides/slide42.xml><?xml version="1.0" encoding="utf-8"?>
+<p:sld xmlns:a="http://schemas.openxmlformats.org/drawingml/2006/main" xmlns:r="http://schemas.openxmlformats.org/officeDocument/2006/relationships" xmlns:p="http://schemas.openxmlformats.org/presentationml/2006/main">
+  <p:cSld>
+    <p:spTree>
+      <p:nvGrpSpPr>
+        <p:cNvPr id="1" name=""/>
+        <p:cNvGrpSpPr/>
+        <p:nvPr/>
+      </p:nvGrpSpPr>
+      <p:grpSpPr>
+        <a:xfrm>
+          <a:off x="0" y="0"/>
+          <a:ext cx="0" cy="0"/>
+          <a:chOff x="0" y="0"/>
+          <a:chExt cx="0" cy="0"/>
+        </a:xfrm>
+      </p:grpSpPr>
+      <p:pic>
+        <p:nvPicPr>
+          <p:cNvPr id="5" name="Picture 4">
+            <a:extLst>
+              <a:ext uri="{FF2B5EF4-FFF2-40B4-BE49-F238E27FC236}">
+                <a16:creationId xmlns:a16="http://schemas.microsoft.com/office/drawing/2014/main" id="{0520B7E2-ABFB-114C-9434-B978ACAAE8EC}"/>
+              </a:ext>
+            </a:extLst>
+          </p:cNvPr>
+          <p:cNvPicPr>
+            <a:picLocks noChangeAspect="1"/>
+          </p:cNvPicPr>
+          <p:nvPr/>
+        </p:nvPicPr>
+        <p:blipFill>
+          <a:blip r:embed="rId2"/>
+          <a:stretch>
+            <a:fillRect/>
+          </a:stretch>
+        </p:blipFill>
+        <p:spPr>
+          <a:xfrm>
+            <a:off x="0" y="0"/>
+            <a:ext cx="12192000" cy="6858000"/>
+          </a:xfrm>
+          <a:prstGeom prst="rect">
+            <a:avLst/>
+          </a:prstGeom>
+        </p:spPr>
+      </p:pic>
+      <p:sp>
+        <p:nvSpPr>
+          <p:cNvPr id="4" name="Title 3"/>
+          <p:cNvSpPr>
+            <a:spLocks noGrp="1"/>
+          </p:cNvSpPr>
+          <p:nvPr>
+            <p:ph type="title"/>
+          </p:nvPr>
+        </p:nvSpPr>
+        <p:spPr>
+          <a:xfrm>
+            <a:off x="4063042" y="365125"/>
+            <a:ext cx="7290758" cy="1325563"/>
+          </a:xfrm>
+        </p:spPr>
+        <p:txBody>
+          <a:bodyPr/>
+          <a:lstStyle/>
+          <a:p>
+            <a:r>
+              <a:rPr lang="en-US" dirty="0" err="1"/>
+              <a:t>Ingénieur</a:t>
+            </a:r>
+            <a:r>
+              <a:rPr lang="en-US" dirty="0"/>
+              <a:t> DevOps</a:t>
+            </a:r>
+          </a:p>
+        </p:txBody>
+      </p:sp>
+      <p:sp>
+        <p:nvSpPr>
+          <p:cNvPr id="6" name="Content Placeholder 5"/>
+          <p:cNvSpPr>
+            <a:spLocks noGrp="1"/>
+          </p:cNvSpPr>
+          <p:nvPr>
+            <p:ph idx="1"/>
+          </p:nvPr>
+        </p:nvSpPr>
+        <p:spPr>
+          <a:xfrm>
+            <a:off x="4063042" y="1825625"/>
+            <a:ext cx="7290758" cy="4351338"/>
+          </a:xfrm>
+        </p:spPr>
+        <p:txBody>
+          <a:bodyPr>
+            <a:normAutofit/>
+          </a:bodyPr>
+          <a:lstStyle/>
+          <a:p>
+            <a:r>
+              <a:rPr lang="fr-FR" dirty="0"/>
+              <a:t>Les ingénieurs DevOps sont des professionnels qui travaillent avec les développeurs et le personnel informatique pour gérer la production des versions de code.</a:t>
+            </a:r>
+          </a:p>
+          <a:p>
+            <a:r>
+              <a:rPr lang="fr-FR" dirty="0"/>
+              <a:t>Ils automatisent la construction, le test et maintiennent l'infrastructure et les outils pour permettre le développement et la publication rapides des logiciels. </a:t>
+            </a:r>
+            <a:endParaRPr lang="en-US" dirty="0"/>
+          </a:p>
+        </p:txBody>
+      </p:sp>
+    </p:spTree>
+    <p:extLst>
+      <p:ext uri="{BB962C8B-B14F-4D97-AF65-F5344CB8AC3E}">
+        <p14:creationId xmlns:p14="http://schemas.microsoft.com/office/powerpoint/2010/main" val="1398404491"/>
+      </p:ext>
+    </p:extLst>
+  </p:cSld>
+  <p:clrMapOvr>
+    <a:masterClrMapping/>
+  </p:clrMapOvr>
+</p:sld>
+</file>
+
+<file path=ppt/slides/slide43.xml><?xml version="1.0" encoding="utf-8"?>
+<p:sld xmlns:a="http://schemas.openxmlformats.org/drawingml/2006/main" xmlns:r="http://schemas.openxmlformats.org/officeDocument/2006/relationships" xmlns:p="http://schemas.openxmlformats.org/presentationml/2006/main">
+  <p:cSld>
+    <p:spTree>
+      <p:nvGrpSpPr>
+        <p:cNvPr id="1" name=""/>
+        <p:cNvGrpSpPr/>
+        <p:nvPr/>
+      </p:nvGrpSpPr>
+      <p:grpSpPr>
+        <a:xfrm>
+          <a:off x="0" y="0"/>
+          <a:ext cx="0" cy="0"/>
+          <a:chOff x="0" y="0"/>
+          <a:chExt cx="0" cy="0"/>
+        </a:xfrm>
+      </p:grpSpPr>
+      <p:pic>
+        <p:nvPicPr>
+          <p:cNvPr id="5" name="Picture 4">
+            <a:extLst>
+              <a:ext uri="{FF2B5EF4-FFF2-40B4-BE49-F238E27FC236}">
+                <a16:creationId xmlns:a16="http://schemas.microsoft.com/office/drawing/2014/main" id="{0520B7E2-ABFB-114C-9434-B978ACAAE8EC}"/>
+              </a:ext>
+            </a:extLst>
+          </p:cNvPr>
+          <p:cNvPicPr>
+            <a:picLocks noChangeAspect="1"/>
+          </p:cNvPicPr>
+          <p:nvPr/>
+        </p:nvPicPr>
+        <p:blipFill>
+          <a:blip r:embed="rId2"/>
+          <a:stretch>
+            <a:fillRect/>
+          </a:stretch>
+        </p:blipFill>
+        <p:spPr>
+          <a:xfrm>
+            <a:off x="0" y="0"/>
+            <a:ext cx="12192000" cy="6858000"/>
+          </a:xfrm>
+          <a:prstGeom prst="rect">
+            <a:avLst/>
+          </a:prstGeom>
+        </p:spPr>
+      </p:pic>
+      <p:sp>
+        <p:nvSpPr>
+          <p:cNvPr id="4" name="Title 3"/>
+          <p:cNvSpPr>
+            <a:spLocks noGrp="1"/>
+          </p:cNvSpPr>
+          <p:nvPr>
+            <p:ph type="title"/>
+          </p:nvPr>
+        </p:nvSpPr>
+        <p:spPr>
+          <a:xfrm>
+            <a:off x="4063042" y="365125"/>
+            <a:ext cx="7290758" cy="1325563"/>
+          </a:xfrm>
+        </p:spPr>
+        <p:txBody>
+          <a:bodyPr/>
+          <a:lstStyle/>
+          <a:p>
+            <a:r>
+              <a:rPr lang="en-US" dirty="0" err="1"/>
+              <a:t>Compétence</a:t>
+            </a:r>
+            <a:r>
+              <a:rPr lang="en-US" dirty="0"/>
+              <a:t> d’un </a:t>
+            </a:r>
+            <a:r>
+              <a:rPr lang="en-US" dirty="0" err="1"/>
+              <a:t>Ingénieur</a:t>
+            </a:r>
+            <a:r>
+              <a:rPr lang="en-US" dirty="0"/>
+              <a:t> DevOps</a:t>
+            </a:r>
+          </a:p>
+        </p:txBody>
+      </p:sp>
+      <p:sp>
+        <p:nvSpPr>
+          <p:cNvPr id="6" name="Content Placeholder 5"/>
+          <p:cNvSpPr>
+            <a:spLocks noGrp="1"/>
+          </p:cNvSpPr>
+          <p:nvPr>
+            <p:ph idx="1"/>
+          </p:nvPr>
+        </p:nvSpPr>
+        <p:spPr>
+          <a:xfrm>
+            <a:off x="4063042" y="1825625"/>
+            <a:ext cx="7290758" cy="4351338"/>
+          </a:xfrm>
+        </p:spPr>
+        <p:txBody>
+          <a:bodyPr>
+            <a:normAutofit fontScale="70000" lnSpcReduction="20000"/>
+          </a:bodyPr>
+          <a:lstStyle/>
+          <a:p>
+            <a:pPr fontAlgn="base"/>
+            <a:r>
+              <a:rPr lang="fr-FR" dirty="0"/>
+              <a:t>Construire et mettre en place de nouveaux outils et infrastructures de développement.</a:t>
+            </a:r>
+          </a:p>
+          <a:p>
+            <a:pPr fontAlgn="base"/>
+            <a:r>
+              <a:rPr lang="fr-FR" dirty="0"/>
+              <a:t>Travaillez sur des moyens d'automatiser et d'améliorer les processus de développement et de publication.</a:t>
+            </a:r>
+          </a:p>
+          <a:p>
+            <a:pPr fontAlgn="base"/>
+            <a:r>
+              <a:rPr lang="fr-FR" dirty="0"/>
+              <a:t>Tester et examiner le code écrit par d'autres et analyser les résultats.</a:t>
+            </a:r>
+          </a:p>
+          <a:p>
+            <a:pPr fontAlgn="base"/>
+            <a:r>
+              <a:rPr lang="fr-FR" dirty="0"/>
+              <a:t>Assurez-vous que les systèmes sont sûrs et sécurisés contre les menaces de cybersécurité.</a:t>
+            </a:r>
+          </a:p>
+          <a:p>
+            <a:pPr fontAlgn="base"/>
+            <a:r>
+              <a:rPr lang="fr-FR" dirty="0"/>
+              <a:t>Identifier les problèmes techniques et développer des mises à jour logicielles et des «correctifs».</a:t>
+            </a:r>
+          </a:p>
+          <a:p>
+            <a:pPr fontAlgn="base"/>
+            <a:r>
+              <a:rPr lang="fr-FR" dirty="0"/>
+              <a:t>Travailler avec les développeurs de logiciels et les ingénieurs en logiciel pour s'assurer que le développement suit les processus établis et fonctionne comme prévu.</a:t>
+            </a:r>
+          </a:p>
+          <a:p>
+            <a:pPr fontAlgn="base"/>
+            <a:r>
+              <a:rPr lang="fr-FR" dirty="0"/>
+              <a:t>Planifier les projets et participer aux décisions de gestion de projet.</a:t>
+            </a:r>
+            <a:endParaRPr lang="en-US" dirty="0"/>
+          </a:p>
+        </p:txBody>
+      </p:sp>
+    </p:spTree>
+    <p:extLst>
+      <p:ext uri="{BB962C8B-B14F-4D97-AF65-F5344CB8AC3E}">
+        <p14:creationId xmlns:p14="http://schemas.microsoft.com/office/powerpoint/2010/main" val="1398404491"/>
+      </p:ext>
+    </p:extLst>
+  </p:cSld>
+  <p:clrMapOvr>
+    <a:masterClrMapping/>
+  </p:clrMapOvr>
+</p:sld>
+</file>
+
+<file path=ppt/slides/slide44.xml><?xml version="1.0" encoding="utf-8"?>
+<p:sld xmlns:a="http://schemas.openxmlformats.org/drawingml/2006/main" xmlns:r="http://schemas.openxmlformats.org/officeDocument/2006/relationships" xmlns:p="http://schemas.openxmlformats.org/presentationml/2006/main">
+  <p:cSld>
+    <p:spTree>
+      <p:nvGrpSpPr>
+        <p:cNvPr id="1" name=""/>
+        <p:cNvGrpSpPr/>
+        <p:nvPr/>
+      </p:nvGrpSpPr>
+      <p:grpSpPr>
+        <a:xfrm>
+          <a:off x="0" y="0"/>
+          <a:ext cx="0" cy="0"/>
+          <a:chOff x="0" y="0"/>
+          <a:chExt cx="0" cy="0"/>
+        </a:xfrm>
+      </p:grpSpPr>
+      <p:pic>
+        <p:nvPicPr>
+          <p:cNvPr id="5" name="Picture 4">
+            <a:extLst>
+              <a:ext uri="{FF2B5EF4-FFF2-40B4-BE49-F238E27FC236}">
+                <a16:creationId xmlns:a16="http://schemas.microsoft.com/office/drawing/2014/main" id="{F9F299D9-CB3C-5E4C-B055-26DC86002447}"/>
+              </a:ext>
+            </a:extLst>
+          </p:cNvPr>
+          <p:cNvPicPr>
+            <a:picLocks noChangeAspect="1"/>
+          </p:cNvPicPr>
+          <p:nvPr/>
+        </p:nvPicPr>
+        <p:blipFill>
+          <a:blip r:embed="rId2"/>
+          <a:stretch>
+            <a:fillRect/>
+          </a:stretch>
+        </p:blipFill>
+        <p:spPr>
+          <a:xfrm>
+            <a:off x="0" y="24714"/>
+            <a:ext cx="12192000" cy="6858000"/>
+          </a:xfrm>
+          <a:prstGeom prst="rect">
+            <a:avLst/>
+          </a:prstGeom>
+        </p:spPr>
+      </p:pic>
+    </p:spTree>
+    <p:extLst>
+      <p:ext uri="{BB962C8B-B14F-4D97-AF65-F5344CB8AC3E}">
+        <p14:creationId xmlns:p14="http://schemas.microsoft.com/office/powerpoint/2010/main" val="786268399"/>
       </p:ext>
     </p:extLst>
   </p:cSld>
@@ -7782,7 +10563,7 @@
             </a:r>
             <a:r>
               <a:rPr lang="fr-FR" dirty="0"/>
-              <a:t>L'ensemble de l'industrie du logiciel peut être divisé en deux, en fonction de ses fonctions: </a:t>
+              <a:t>L'ensemble de l'industrie du logiciel peut être divisé en deux domaines: </a:t>
             </a:r>
             <a:endParaRPr lang="en-US" dirty="0"/>
           </a:p>
@@ -7972,15 +10753,7 @@
             </a:r>
             <a:r>
               <a:rPr lang="fr-FR" dirty="0"/>
-              <a:t>d'un </a:t>
-            </a:r>
-            <a:r>
-              <a:rPr lang="fr-FR"/>
-              <a:t>logiciel a </a:t>
-            </a:r>
-            <a:r>
-              <a:rPr lang="fr-FR" dirty="0"/>
-              <a:t>un cycle de vie qui se compose de 6 étapes majeures.</a:t>
+              <a:t>d'un logiciel a un cycle de vie qui se compose de 6 étapes majeures.</a:t>
             </a:r>
             <a:r>
               <a:rPr lang="fr-FR" b="1" dirty="0"/>
@@ -7997,15 +10770,19 @@
           <a:p>
             <a:pPr lvl="1"/>
             <a:r>
+              <a:rPr lang="en-US" dirty="0" err="1"/>
+              <a:t>Développeurs</a:t>
+            </a:r>
+            <a:r>
               <a:rPr lang="en-US" dirty="0"/>
-              <a:t>Application/web developer</a:t>
+              <a:t> Application/web</a:t>
             </a:r>
           </a:p>
           <a:p>
             <a:pPr lvl="1"/>
             <a:r>
               <a:rPr lang="en-US" dirty="0"/>
-              <a:t>Application Analyst/architect</a:t>
+              <a:t>Architect Application</a:t>
             </a:r>
           </a:p>
           <a:p>
@@ -8018,12 +10795,8 @@
           <a:p>
             <a:pPr lvl="1"/>
             <a:r>
-              <a:rPr lang="en-US" dirty="0" err="1"/>
-              <a:t>Testeur</a:t>
-            </a:r>
-            <a:r>
               <a:rPr lang="en-US" dirty="0"/>
-              <a:t> </a:t>
+              <a:t>Tests/Validation </a:t>
             </a:r>
             <a:r>
               <a:rPr lang="en-US" dirty="0" err="1"/>
@@ -8276,12 +11049,9 @@
             </a:r>
             <a:r>
               <a:rPr lang="fr-FR" sz="4900" dirty="0"/>
-              <a:t>, en revanche, créera des applications et des services fiables et hautement performants, accessibles sur Internet.</a:t>
-            </a:r>
-            <a:r>
-              <a:rPr lang="en-US" sz="4900" dirty="0"/>
-              <a:t>.</a:t>
-            </a:r>
+              <a:t>, en revanche, créera des applications et des services fiables et hautement performants, destinés à un utilisation sur internet.</a:t>
+            </a:r>
+            <a:endParaRPr lang="en-US" sz="4900" dirty="0"/>
           </a:p>
           <a:p>
             <a:pPr marL="800100" lvl="1" indent="-342900">
@@ -8371,7 +11141,9 @@
           </a:xfrm>
         </p:spPr>
         <p:txBody>
-          <a:bodyPr/>
+          <a:bodyPr>
+            <a:normAutofit/>
+          </a:bodyPr>
           <a:lstStyle/>
           <a:p>
             <a:r>
@@ -8380,16 +11152,21 @@
             </a:r>
             <a:r>
               <a:rPr lang="en-US" dirty="0"/>
+              <a:t> </a:t>
+            </a:r>
+            <a:r>
+              <a:rPr lang="en-US" dirty="0" err="1"/>
+              <a:t>professionnelles</a:t>
+            </a:r>
+            <a:r>
+              <a:rPr lang="en-US" dirty="0"/>
               <a:t> d’un </a:t>
             </a:r>
             <a:r>
               <a:rPr lang="en-US" dirty="0" err="1"/>
               <a:t>développeur</a:t>
             </a:r>
-            <a:r>
-              <a:rPr lang="en-US" dirty="0"/>
-              <a:t> Applications</a:t>
-            </a:r>
+            <a:endParaRPr lang="en-US" dirty="0"/>
           </a:p>
         </p:txBody>
       </p:sp>
@@ -8417,83 +11194,62 @@
           <a:p>
             <a:r>
               <a:rPr lang="fr-FR" sz="5400" dirty="0"/>
-              <a:t>Établir une spécification détaillée discutant avec les clients.</a:t>
+              <a:t>Forte motivation pour l’informatique et pour l’apprentissage de nouveaux langages et systèmes</a:t>
             </a:r>
           </a:p>
           <a:p>
             <a:r>
               <a:rPr lang="fr-FR" sz="5400" dirty="0"/>
-              <a:t>Écrivez le programme - pour ce faire, vous allez décomposer la spécification du programme en ses éléments les plus simples et traduire cette logique dans un langage de programmation.</a:t>
+              <a:t>Souplesse pour répondre aux demandes des clients tout en respectant les normes de développement.</a:t>
             </a:r>
           </a:p>
           <a:p>
             <a:r>
               <a:rPr lang="fr-FR" sz="5400" dirty="0"/>
-              <a:t>Travaillez au sein d'une équipe - qui peut être constituée uniquement pour un projet particulier afin d'écrire une section spécifique du programme.</a:t>
+              <a:t>Rapidité d'exécution pour rendre les livrables dans les délais impartis</a:t>
             </a:r>
           </a:p>
           <a:p>
             <a:r>
               <a:rPr lang="fr-FR" sz="5400" dirty="0"/>
-              <a:t>Testez des ensembles de données d'échantillons pour vérifier que la sortie du programme fonctionne comme prévu.</a:t>
+              <a:t>Facilité à s'adapter à de nouveaux langages et de nouvelles méthodes de développement</a:t>
             </a:r>
           </a:p>
           <a:p>
             <a:r>
               <a:rPr lang="fr-FR" sz="5400" dirty="0"/>
-              <a:t>Connaitre un EDI de développement (Visual Studio, Eclipse …), et un langage de programmation (Java, C++….) parfaitement.</a:t>
+              <a:t>Polyvalence, créativité pour identifier les solutions techniques appropriées</a:t>
             </a:r>
           </a:p>
           <a:p>
             <a:r>
               <a:rPr lang="fr-FR" sz="5400" dirty="0"/>
-              <a:t>Installez le programme en production, une fois le test terminé.</a:t>
+              <a:t>Bonnes qualités relationnelles (écoute et expression) permettant de communiquer efficacement avec les utilisateurs</a:t>
             </a:r>
           </a:p>
           <a:p>
             <a:r>
               <a:rPr lang="fr-FR" sz="5400" dirty="0"/>
-              <a:t>Réagissez aux problèmes et corrigez le programme si nécessaire.</a:t>
+              <a:t>Ouverture d’esprit, compte tenu de la variété des problématiques clients et technologiques</a:t>
             </a:r>
           </a:p>
           <a:p>
             <a:r>
               <a:rPr lang="fr-FR" sz="5400" dirty="0"/>
-              <a:t>Évaluer et augmenter l'efficacité du programme.</a:t>
+              <a:t>Capacité à travailler en équipe. Connaissance des protocoles Agiles.</a:t>
             </a:r>
           </a:p>
           <a:p>
             <a:r>
               <a:rPr lang="fr-FR" sz="5400" dirty="0"/>
-              <a:t>Adaptez le programme aux nouvelles exigences, si nécessaire.</a:t>
+              <a:t>Autonomie : l’ingénieur développement est souvent amené à exercer son activité en dehors de son entreprise, il lui faut donc faire preuve d’autonomie une fois placé chez un client car il ne dispose pas toujours d’un support</a:t>
             </a:r>
           </a:p>
           <a:p>
             <a:r>
               <a:rPr lang="fr-FR" sz="5400" dirty="0"/>
-              <a:t>Effectuer des tests d'acceptation par les utilisateurs pour s'assurer que le programme peut être utilisé facilement, rapidement et avec précision.</a:t>
-            </a:r>
-          </a:p>
-          <a:p>
-            <a:r>
-              <a:rPr lang="fr-FR" sz="5400" dirty="0"/>
-              <a:t>Rédiger une documentation.</a:t>
-            </a:r>
-          </a:p>
-          <a:p>
-            <a:r>
-              <a:rPr lang="fr-FR" sz="5400" dirty="0"/>
-              <a:t>Consultez des manuels, des périodiques et des rapports techniques pour apprendre de nouvelles façons d'élaborer des programmes et de maintenir les compétences et connaissances existantes.</a:t>
-            </a:r>
-          </a:p>
-          <a:p>
-            <a:r>
-              <a:rPr lang="fr-FR" sz="5400" dirty="0"/>
-              <a:t>Mettre à jour, réparer, modifier et développer des logiciels existants et des applications génériques. </a:t>
-            </a:r>
-            <a:endParaRPr lang="en-US" dirty="0"/>
-          </a:p>
-          <a:p>
+              <a:t>Forte motivation afin de pouvoir s’impliquer dans des projets souvent lourds et longs</a:t>
+            </a:r>
             <a:endParaRPr lang="en-US" dirty="0"/>
           </a:p>
         </p:txBody>
@@ -8580,7 +11336,15 @@
           <a:p>
             <a:r>
               <a:rPr lang="en-US" dirty="0" err="1"/>
-              <a:t>Compétence</a:t>
+              <a:t>Compétences</a:t>
+            </a:r>
+            <a:r>
+              <a:rPr lang="en-US" dirty="0"/>
+              <a:t> </a:t>
+            </a:r>
+            <a:r>
+              <a:rPr lang="en-US" dirty="0" err="1"/>
+              <a:t>Téchniques</a:t>
             </a:r>
             <a:r>
               <a:rPr lang="en-US" dirty="0"/>
@@ -8588,12 +11352,17 @@
             </a:r>
             <a:r>
               <a:rPr lang="en-US" dirty="0" err="1"/>
-              <a:t>Développeur</a:t>
+              <a:t>développeur</a:t>
             </a:r>
             <a:r>
               <a:rPr lang="en-US" dirty="0"/>
-              <a:t> Web</a:t>
-            </a:r>
+              <a:t> </a:t>
+            </a:r>
+            <a:r>
+              <a:rPr lang="en-US" dirty="0" err="1"/>
+              <a:t>d’applications</a:t>
+            </a:r>
+            <a:endParaRPr lang="en-US" dirty="0"/>
           </a:p>
         </p:txBody>
       </p:sp>
@@ -8610,130 +11379,83 @@
         <p:spPr>
           <a:xfrm>
             <a:off x="4063042" y="1480838"/>
-            <a:ext cx="7290758" cy="4600785"/>
+            <a:ext cx="7290758" cy="4954468"/>
           </a:xfrm>
         </p:spPr>
         <p:txBody>
           <a:bodyPr>
-            <a:normAutofit fontScale="25000" lnSpcReduction="20000"/>
+            <a:normAutofit fontScale="32500" lnSpcReduction="20000"/>
           </a:bodyPr>
           <a:lstStyle/>
           <a:p>
-            <a:pPr>
-              <a:lnSpc>
-                <a:spcPct val="150000"/>
-              </a:lnSpc>
-            </a:pPr>
             <a:r>
               <a:rPr lang="fr-FR" sz="5400" dirty="0"/>
-              <a:t>Écrivez du code dans un ou plusieurs langages de programmation ou de script, tels que PHP ou JavaScript.</a:t>
-            </a:r>
-          </a:p>
-          <a:p>
-            <a:pPr>
-              <a:lnSpc>
-                <a:spcPct val="150000"/>
-              </a:lnSpc>
-            </a:pPr>
+              <a:t>Maîtrise des méthodes et outils de développement (UML, Merise, Rational Rose, méthodes agiles, méthodologies objet…)</a:t>
+            </a:r>
+          </a:p>
+          <a:p>
             <a:r>
               <a:rPr lang="fr-FR" sz="5400" dirty="0"/>
-              <a:t>Correction de bogues dans les projets existants.</a:t>
-            </a:r>
-          </a:p>
-          <a:p>
-            <a:pPr>
-              <a:lnSpc>
-                <a:spcPct val="150000"/>
-              </a:lnSpc>
-            </a:pPr>
+              <a:t>Environnement de développement (ex : technologie objet, </a:t>
+            </a:r>
+            <a:r>
+              <a:rPr lang="fr-FR" sz="5400" dirty="0" err="1"/>
+              <a:t>NETPlateforme</a:t>
+            </a:r>
             <a:r>
               <a:rPr lang="fr-FR" sz="5400" dirty="0"/>
-              <a:t>Bonne </a:t>
-            </a:r>
-            <a:r>
-              <a:rPr lang="fr-FR" sz="5400"/>
-              <a:t>pratique du </a:t>
-            </a:r>
+              <a:t> de développement : J2EE...)</a:t>
+            </a:r>
+          </a:p>
+          <a:p>
             <a:r>
               <a:rPr lang="fr-FR" sz="5400" dirty="0"/>
-              <a:t>test</a:t>
-            </a:r>
-          </a:p>
-          <a:p>
-            <a:pPr>
-              <a:lnSpc>
-                <a:spcPct val="150000"/>
-              </a:lnSpc>
-            </a:pPr>
+              <a:t>Connaissance des </a:t>
+            </a:r>
+            <a:r>
+              <a:rPr lang="fr-FR" sz="5400" dirty="0" err="1"/>
+              <a:t>framework</a:t>
+            </a:r>
+            <a:endParaRPr lang="fr-FR" sz="5400" dirty="0"/>
+          </a:p>
+          <a:p>
             <a:r>
               <a:rPr lang="fr-FR" sz="5400" dirty="0"/>
-              <a:t>Bien connaitre les interfaces de programme d'application (API)</a:t>
-            </a:r>
-          </a:p>
-          <a:p>
-            <a:pPr>
-              <a:lnSpc>
-                <a:spcPct val="150000"/>
-              </a:lnSpc>
-            </a:pPr>
+              <a:t>Connaissance de plusieurs langages de programmation (C,C#, javascript, C++, COBOL, Visual C++, Assembleur…), ainsi que de certains systèmes d’exploitation (Windows, Unix, Linux…) ou d’OS (operating system) temps réel (QNX, </a:t>
+            </a:r>
+            <a:r>
+              <a:rPr lang="fr-FR" sz="5400" dirty="0" err="1"/>
+              <a:t>eCos</a:t>
+            </a:r>
             <a:r>
               <a:rPr lang="fr-FR" sz="5400" dirty="0"/>
-              <a:t>Rencontrez les concepteurs, les développeurs et le personnel du projet pour des mises à jour d'avancement.</a:t>
-            </a:r>
-          </a:p>
-          <a:p>
-            <a:pPr>
-              <a:lnSpc>
-                <a:spcPct val="150000"/>
-              </a:lnSpc>
-            </a:pPr>
+              <a:t>, </a:t>
+            </a:r>
+            <a:r>
+              <a:rPr lang="fr-FR" sz="5400" dirty="0" err="1"/>
+              <a:t>VxWorks</a:t>
+            </a:r>
             <a:r>
               <a:rPr lang="fr-FR" sz="5400" dirty="0"/>
-              <a:t>Rassemblez les exigences des clients et des utilisateurs.</a:t>
-            </a:r>
-          </a:p>
-          <a:p>
-            <a:pPr>
-              <a:lnSpc>
-                <a:spcPct val="150000"/>
-              </a:lnSpc>
-            </a:pPr>
+              <a:t>...)</a:t>
+            </a:r>
+          </a:p>
+          <a:p>
             <a:r>
               <a:rPr lang="fr-FR" sz="5400" dirty="0"/>
-              <a:t>Apprenez et testez de nouvelles technologies, cadres et langages.</a:t>
-            </a:r>
-          </a:p>
-          <a:p>
-            <a:pPr>
-              <a:lnSpc>
-                <a:spcPct val="150000"/>
-              </a:lnSpc>
-            </a:pPr>
+              <a:t>Bonne connaissance des normes et procédures de sécurité</a:t>
+            </a:r>
+          </a:p>
+          <a:p>
             <a:r>
               <a:rPr lang="fr-FR" sz="5400" dirty="0"/>
-              <a:t>Restez à jour avec les nouvelles tendances et les progrès du développement Web.</a:t>
-            </a:r>
-          </a:p>
-          <a:p>
-            <a:pPr>
-              <a:lnSpc>
-                <a:spcPct val="150000"/>
-              </a:lnSpc>
-            </a:pPr>
+              <a:t>Compréhension de l’environnement et du fonctionnement de l’entreprise</a:t>
+            </a:r>
+          </a:p>
+          <a:p>
             <a:r>
               <a:rPr lang="fr-FR" sz="5400" dirty="0"/>
-              <a:t>Effectuer la refactorisation du code et l'optimisation du code existant.</a:t>
-            </a:r>
-          </a:p>
-          <a:p>
-            <a:pPr>
-              <a:lnSpc>
-                <a:spcPct val="150000"/>
-              </a:lnSpc>
-            </a:pPr>
-            <a:r>
-              <a:rPr lang="fr-FR" sz="5400" dirty="0"/>
-              <a:t>Documentez le code.</a:t>
+              <a:t>Une bonne maîtrise de l’anglais technique peut être suffisante mais un bon niveau en anglais est un atout majeur pour comprendre les documentations techniques et/ou se voir confier des missions en environnement international</a:t>
             </a:r>
             <a:endParaRPr lang="en-US" dirty="0"/>
           </a:p>
@@ -8742,7 +11464,7 @@
     </p:spTree>
     <p:extLst>
       <p:ext uri="{BB962C8B-B14F-4D97-AF65-F5344CB8AC3E}">
-        <p14:creationId xmlns:p14="http://schemas.microsoft.com/office/powerpoint/2010/main" val="1398404491"/>
+        <p14:creationId xmlns:p14="http://schemas.microsoft.com/office/powerpoint/2010/main" val="1022920666"/>
       </p:ext>
     </p:extLst>
   </p:cSld>
